--- a/PPT Details/ParallaX_DepthWizard_SIH2026.pptx
+++ b/PPT Details/ParallaX_DepthWizard_SIH2026.pptx
@@ -178,7 +178,7 @@
                 </a:solidFill>
                 <a:latin typeface="Arial"/>
               </a:rPr>
-              <a:t>Height error on 40 held-out LiDAR tiles (RMSE, m)</a:t>
+              <a:t>Error on 40 held-out LiDAR test tiles, metres [3]</a:t>
             </a:r>
           </a:p>
         </c:rich>
@@ -212,41 +212,29 @@
           </c:spPr>
           <c:cat>
             <c:strRef>
-              <c:f>Sheet1!$A$2:$A$5</c:f>
+              <c:f>Sheet1!$A$2:$A$3</c:f>
               <c:strCache>
-                <c:ptCount val="4"/>
+                <c:ptCount val="2"/>
                 <c:pt idx="0">
-                  <c:v>Urban</c:v>
+                  <c:v>RMSE</c:v>
                 </c:pt>
                 <c:pt idx="1">
-                  <c:v>Sparse</c:v>
-                </c:pt>
-                <c:pt idx="2">
-                  <c:v>Forest</c:v>
-                </c:pt>
-                <c:pt idx="3">
-                  <c:v>Overall</c:v>
+                  <c:v>MAE</c:v>
                 </c:pt>
               </c:strCache>
             </c:strRef>
           </c:cat>
           <c:val>
             <c:numRef>
-              <c:f>Sheet1!$B$2:$B$5</c:f>
+              <c:f>Sheet1!$B$2:$B$3</c:f>
               <c:numCache>
                 <c:formatCode>General</c:formatCode>
-                <c:ptCount val="4"/>
+                <c:ptCount val="2"/>
                 <c:pt idx="0">
-                  <c:v>8.81</c:v>
+                  <c:v>9.35</c:v>
                 </c:pt>
                 <c:pt idx="1">
-                  <c:v>4.21</c:v>
-                </c:pt>
-                <c:pt idx="2">
-                  <c:v>13.66</c:v>
-                </c:pt>
-                <c:pt idx="3">
-                  <c:v>9.35</c:v>
+                  <c:v>5.1</c:v>
                 </c:pt>
               </c:numCache>
             </c:numRef>
@@ -261,7 +249,7 @@
               <c:strCache>
                 <c:ptCount val="1"/>
                 <c:pt idx="0">
-                  <c:v>RS3DAda (run by us)</c:v>
+                  <c:v>RS3DAda [6]</c:v>
                 </c:pt>
               </c:strCache>
             </c:strRef>
@@ -273,41 +261,29 @@
           </c:spPr>
           <c:cat>
             <c:strRef>
-              <c:f>Sheet1!$A$2:$A$5</c:f>
+              <c:f>Sheet1!$A$2:$A$3</c:f>
               <c:strCache>
-                <c:ptCount val="4"/>
+                <c:ptCount val="2"/>
                 <c:pt idx="0">
-                  <c:v>Urban</c:v>
+                  <c:v>RMSE</c:v>
                 </c:pt>
                 <c:pt idx="1">
-                  <c:v>Sparse</c:v>
-                </c:pt>
-                <c:pt idx="2">
-                  <c:v>Forest</c:v>
-                </c:pt>
-                <c:pt idx="3">
-                  <c:v>Overall</c:v>
+                  <c:v>MAE</c:v>
                 </c:pt>
               </c:strCache>
             </c:strRef>
           </c:cat>
           <c:val>
             <c:numRef>
-              <c:f>Sheet1!$C$2:$C$5</c:f>
+              <c:f>Sheet1!$C$2:$C$3</c:f>
               <c:numCache>
                 <c:formatCode>General</c:formatCode>
-                <c:ptCount val="4"/>
+                <c:ptCount val="2"/>
                 <c:pt idx="0">
-                  <c:v>5.11</c:v>
+                  <c:v>6.74</c:v>
                 </c:pt>
                 <c:pt idx="1">
-                  <c:v>2.83</c:v>
-                </c:pt>
-                <c:pt idx="2">
-                  <c:v>11.87</c:v>
-                </c:pt>
-                <c:pt idx="3">
-                  <c:v>6.74</c:v>
+                  <c:v>3.47</c:v>
                 </c:pt>
               </c:numCache>
             </c:numRef>
@@ -334,41 +310,29 @@
           </c:spPr>
           <c:cat>
             <c:strRef>
-              <c:f>Sheet1!$A$2:$A$5</c:f>
+              <c:f>Sheet1!$A$2:$A$3</c:f>
               <c:strCache>
-                <c:ptCount val="4"/>
+                <c:ptCount val="2"/>
                 <c:pt idx="0">
-                  <c:v>Urban</c:v>
+                  <c:v>RMSE</c:v>
                 </c:pt>
                 <c:pt idx="1">
-                  <c:v>Sparse</c:v>
-                </c:pt>
-                <c:pt idx="2">
-                  <c:v>Forest</c:v>
-                </c:pt>
-                <c:pt idx="3">
-                  <c:v>Overall</c:v>
+                  <c:v>MAE</c:v>
                 </c:pt>
               </c:strCache>
             </c:strRef>
           </c:cat>
           <c:val>
             <c:numRef>
-              <c:f>Sheet1!$D$2:$D$5</c:f>
+              <c:f>Sheet1!$D$2:$D$3</c:f>
               <c:numCache>
                 <c:formatCode>General</c:formatCode>
-                <c:ptCount val="4"/>
+                <c:ptCount val="2"/>
                 <c:pt idx="0">
-                  <c:v>5.28</c:v>
+                  <c:v>4.69</c:v>
                 </c:pt>
                 <c:pt idx="1">
-                  <c:v>2.15</c:v>
-                </c:pt>
-                <c:pt idx="2">
-                  <c:v>5.91</c:v>
-                </c:pt>
-                <c:pt idx="3">
-                  <c:v>4.96</c:v>
+                  <c:v>2.29</c:v>
                 </c:pt>
               </c:numCache>
             </c:numRef>
@@ -498,7 +462,7 @@
                 </a:solidFill>
                 <a:latin typeface="Arial"/>
               </a:rPr>
-              <a:t>Full elevation model vs airborne LiDAR (RMSE, m)</a:t>
+              <a:t>Full DSM vs airborne LiDAR, RMSE in metres [8]</a:t>
             </a:r>
           </a:p>
         </c:rich>
@@ -6811,7 +6775,7 @@
                 </a:solidFill>
                 <a:latin typeface="Arial"/>
               </a:rPr>
-              <a:t>AI depth models give only </a:t>
+              <a:t>Depth AI trained on street photos gives only </a:t>
             </a:r>
             <a:r>
               <a:rPr sz="1250" b="1" i="0">
@@ -6829,7 +6793,7 @@
                 </a:solidFill>
                 <a:latin typeface="Arial"/>
               </a:rPr>
-              <a:t> from a photo, not real metres.</a:t>
+              <a:t>, not real metres from above.</a:t>
             </a:r>
           </a:p>
         </p:txBody>
@@ -6941,11 +6905,11 @@
           <a:p>
             <a:pPr algn="l">
               <a:spcAft>
-                <a:spcPts val="600"/>
+                <a:spcPts val="400"/>
               </a:spcAft>
             </a:pPr>
             <a:r>
-              <a:rPr sz="1200" b="1" i="0">
+              <a:rPr sz="1100" b="1" i="0">
                 <a:solidFill>
                   <a:srgbClr val="0070C0"/>
                 </a:solidFill>
@@ -6954,16 +6918,16 @@
               <a:t>▪ </a:t>
             </a:r>
             <a:r>
-              <a:rPr sz="1200" b="1" i="0">
+              <a:rPr sz="1100" b="1" i="0">
                 <a:solidFill>
                   <a:srgbClr val="1C1C1C"/>
                 </a:solidFill>
                 <a:latin typeface="Arial"/>
               </a:rPr>
-              <a:t>One satellite or aerial image in, a metric elevation model out</a:t>
-            </a:r>
-            <a:r>
-              <a:rPr sz="1200" b="0" i="0">
+              <a:t>One satellite or aerial image in, a measured elevation model out</a:t>
+            </a:r>
+            <a:r>
+              <a:rPr sz="1100" b="0" i="0">
                 <a:solidFill>
                   <a:srgbClr val="1C1C1C"/>
                 </a:solidFill>
@@ -6975,11 +6939,11 @@
           <a:p>
             <a:pPr algn="l">
               <a:spcAft>
-                <a:spcPts val="600"/>
+                <a:spcPts val="400"/>
               </a:spcAft>
             </a:pPr>
             <a:r>
-              <a:rPr sz="1200" b="1" i="0">
+              <a:rPr sz="1100" b="1" i="0">
                 <a:solidFill>
                   <a:srgbClr val="0070C0"/>
                 </a:solidFill>
@@ -6988,16 +6952,16 @@
               <a:t>▪ </a:t>
             </a:r>
             <a:r>
-              <a:rPr sz="1200" b="0" i="0">
+              <a:rPr sz="1100" b="0" i="0">
                 <a:solidFill>
                   <a:srgbClr val="1C1C1C"/>
                 </a:solidFill>
                 <a:latin typeface="Arial"/>
               </a:rPr>
-              <a:t>Our model reads </a:t>
-            </a:r>
-            <a:r>
-              <a:rPr sz="1200" b="1" i="0">
+              <a:t>Built on DINOv3-SAT [4] and trained on LiDAR heights [3], our model reads </a:t>
+            </a:r>
+            <a:r>
+              <a:rPr sz="1100" b="1" i="0">
                 <a:solidFill>
                   <a:srgbClr val="1C1C1C"/>
                 </a:solidFill>
@@ -7006,23 +6970,23 @@
               <a:t>height above ground in metres</a:t>
             </a:r>
             <a:r>
-              <a:rPr sz="1200" b="0" i="0">
+              <a:rPr sz="1100" b="0" i="0">
                 <a:solidFill>
                   <a:srgbClr val="1C1C1C"/>
                 </a:solidFill>
                 <a:latin typeface="Arial"/>
               </a:rPr>
-              <a:t> straight from the photo; a free 30 m terrain map adds the ground.</a:t>
+              <a:t>; a 30 m terrain map adds the ground [7].</a:t>
             </a:r>
           </a:p>
           <a:p>
             <a:pPr algn="l">
               <a:spcAft>
-                <a:spcPts val="600"/>
+                <a:spcPts val="400"/>
               </a:spcAft>
             </a:pPr>
             <a:r>
-              <a:rPr sz="1200" b="1" i="0">
+              <a:rPr sz="1100" b="1" i="0">
                 <a:solidFill>
                   <a:srgbClr val="0070C0"/>
                 </a:solidFill>
@@ -7031,23 +6995,23 @@
               <a:t>▪ </a:t>
             </a:r>
             <a:r>
-              <a:rPr sz="1200" b="0" i="0">
+              <a:rPr sz="1100" b="0" i="0">
                 <a:solidFill>
                   <a:srgbClr val="1C1C1C"/>
                 </a:solidFill>
                 <a:latin typeface="Arial"/>
               </a:rPr>
-              <a:t>GeoTIFF → absolute DSM · PNG/JPG → relative DSM · 3 map points place a plain image.</a:t>
+              <a:t>GeoTIFF gives an absolute DSM; PNG/JPG a relative DSM, or a full DSM with 3 map points.</a:t>
             </a:r>
           </a:p>
           <a:p>
             <a:pPr algn="l">
               <a:spcAft>
-                <a:spcPts val="600"/>
+                <a:spcPts val="400"/>
               </a:spcAft>
             </a:pPr>
             <a:r>
-              <a:rPr sz="1200" b="1" i="0">
+              <a:rPr sz="1100" b="1" i="0">
                 <a:solidFill>
                   <a:srgbClr val="0070C0"/>
                 </a:solidFill>
@@ -7056,7 +7020,7 @@
               <a:t>▪ </a:t>
             </a:r>
             <a:r>
-              <a:rPr sz="1200" b="0" i="0">
+              <a:rPr sz="1100" b="0" i="0">
                 <a:solidFill>
                   <a:srgbClr val="1C1C1C"/>
                 </a:solidFill>
@@ -7065,7 +7029,7 @@
               <a:t>It </a:t>
             </a:r>
             <a:r>
-              <a:rPr sz="1200" b="1" i="0">
+              <a:rPr sz="1100" b="1" i="0">
                 <a:solidFill>
                   <a:srgbClr val="1C1C1C"/>
                 </a:solidFill>
@@ -7074,20 +7038,20 @@
               <a:t>checks itself</a:t>
             </a:r>
             <a:r>
-              <a:rPr sz="1200" b="0" i="0">
+              <a:rPr sz="1100" b="0" i="0">
                 <a:solidFill>
                   <a:srgbClr val="1C1C1C"/>
                 </a:solidFill>
                 <a:latin typeface="Arial"/>
               </a:rPr>
-              <a:t>: drop in LiDAR or any reference and see the error map.</a:t>
+              <a:t>: load LiDAR or any reference and get RMSE, MAE, correlation and an error map.</a:t>
             </a:r>
           </a:p>
         </p:txBody>
       </p:sp>
       <p:pic>
         <p:nvPicPr>
-          <p:cNvPr id="15369" name="Picture 15368" descr="hero.jpg"/>
+          <p:cNvPr id="15369" name="Picture 15368" descr="ui.jpg"/>
           <p:cNvPicPr>
             <a:picLocks noChangeAspect="1"/>
           </p:cNvPicPr>
@@ -7095,7 +7059,7 @@
         </p:nvPicPr>
         <p:blipFill>
           <a:blip r:embed="rId5"/>
-          <a:srcRect t="15" b="15"/>
+          <a:srcRect t="5642" b="5642"/>
           <a:stretch>
             <a:fillRect/>
           </a:stretch>
@@ -7149,7 +7113,7 @@
                 </a:solidFill>
                 <a:latin typeface="Arial"/>
               </a:rPr>
-              <a:t>Our output: Chungthang, Sikkim, from one WorldView-2 image</a:t>
+              <a:t>Our app: Chungthang, Sikkim, from one WorldView-2 image [9]</a:t>
             </a:r>
           </a:p>
         </p:txBody>
@@ -7278,7 +7242,7 @@
                 </a:solidFill>
                 <a:latin typeface="Arial"/>
               </a:rPr>
-              <a:t>4.96 m</a:t>
+              <a:t>4.69 m</a:t>
             </a:r>
           </a:p>
         </p:txBody>
@@ -7317,7 +7281,7 @@
                 </a:solidFill>
                 <a:latin typeface="Arial"/>
               </a:rPr>
-              <a:t>average height error on 40 held-out airborne-LiDAR test tiles</a:t>
+              <a:t>average height error (RMSE) on 40 held-out airborne-LiDAR test tiles [3]</a:t>
             </a:r>
           </a:p>
         </p:txBody>
@@ -7446,7 +7410,7 @@
                 </a:solidFill>
                 <a:latin typeface="Arial"/>
               </a:rPr>
-              <a:t>26% lower</a:t>
+              <a:t>30% lower</a:t>
             </a:r>
           </a:p>
         </p:txBody>
@@ -7485,7 +7449,7 @@
                 </a:solidFill>
                 <a:latin typeface="Arial"/>
               </a:rPr>
-              <a:t>error than RS3DAda, a published height model, on the same tiles</a:t>
+              <a:t>error than RS3DAda, a NeurIPS 2024 height model, on the same tiles [6]</a:t>
             </a:r>
           </a:p>
         </p:txBody>
@@ -7653,7 +7617,7 @@
                 </a:solidFill>
                 <a:latin typeface="Arial"/>
               </a:rPr>
-              <a:t>full-DSM error on hilly terrain vs airborne LiDAR (terrain map alone: 5.9 m)</a:t>
+              <a:t>full-DSM error on hilly terrain against USGS airborne LiDAR; terrain map alone: 5.9 m [8]</a:t>
             </a:r>
           </a:p>
         </p:txBody>
@@ -7860,7 +7824,7 @@
                 </a:solidFill>
                 <a:latin typeface="Arial"/>
               </a:rPr>
-              <a:t>HOW IT WORKS</a:t>
+              <a:t>WHAT IS NEW</a:t>
             </a:r>
             <a:r>
               <a:rPr sz="1150" b="0" i="0">
@@ -7869,7 +7833,7 @@
                 </a:solidFill>
                 <a:latin typeface="Arial"/>
               </a:rPr>
-              <a:t>   ·   innovation: the model predicts metres directly (no relative-depth guessing) and every result can be checked against LiDAR</a:t>
+              <a:t>   ·   heights come out in real metres directly, not as relative depth, and every result can be scored against LiDAR inside the app</a:t>
             </a:r>
           </a:p>
         </p:txBody>
@@ -7922,7 +7886,7 @@
                 </a:solidFill>
                 <a:latin typeface="Arial"/>
               </a:rPr>
-              <a:t>Image in</a:t>
+              <a:t>Upload any image</a:t>
             </a:r>
           </a:p>
           <a:p>
@@ -7934,7 +7898,7 @@
                 </a:solidFill>
                 <a:latin typeface="Arial"/>
               </a:rPr>
-              <a:t>GeoTIFF · PNG · JPG · TIFF</a:t>
+              <a:t>GeoTIFF, PNG, JPG or TIFF</a:t>
             </a:r>
           </a:p>
         </p:txBody>
@@ -7987,7 +7951,7 @@
                 </a:solidFill>
                 <a:latin typeface="Arial"/>
               </a:rPr>
-              <a:t>Our AI model</a:t>
+              <a:t>AI reads heights</a:t>
             </a:r>
           </a:p>
           <a:p>
@@ -7999,7 +7963,7 @@
                 </a:solidFill>
                 <a:latin typeface="Arial"/>
               </a:rPr>
-              <a:t>heights in metres</a:t>
+              <a:t>in metres, per pixel</a:t>
             </a:r>
           </a:p>
         </p:txBody>
@@ -8052,7 +8016,7 @@
                 </a:solidFill>
                 <a:latin typeface="Arial"/>
               </a:rPr>
-              <a:t>+ Terrain map</a:t>
+              <a:t>Add the terrain</a:t>
             </a:r>
           </a:p>
           <a:p>
@@ -8064,7 +8028,7 @@
                 </a:solidFill>
                 <a:latin typeface="Arial"/>
               </a:rPr>
-              <a:t>Copernicus / SRTM</a:t>
+              <a:t>Copernicus or SRTM 30 m [7]</a:t>
             </a:r>
           </a:p>
         </p:txBody>
@@ -8117,7 +8081,7 @@
                 </a:solidFill>
                 <a:latin typeface="Arial"/>
               </a:rPr>
-              <a:t>DSM GeoTIFF</a:t>
+              <a:t>Save the DSM</a:t>
             </a:r>
           </a:p>
           <a:p>
@@ -8129,7 +8093,7 @@
                 </a:solidFill>
                 <a:latin typeface="Arial"/>
               </a:rPr>
-              <a:t>QGIS / ArcGIS ready</a:t>
+              <a:t>GeoTIFF for QGIS / ArcGIS</a:t>
             </a:r>
           </a:p>
         </p:txBody>
@@ -8182,7 +8146,7 @@
                 </a:solidFill>
                 <a:latin typeface="Arial"/>
               </a:rPr>
-              <a:t>3D flythrough</a:t>
+              <a:t>Fly through in 3D</a:t>
             </a:r>
           </a:p>
           <a:p>
@@ -8194,7 +8158,7 @@
                 </a:solidFill>
                 <a:latin typeface="Arial"/>
               </a:rPr>
-              <a:t>+ LiDAR check</a:t>
+              <a:t>and check against LiDAR</a:t>
             </a:r>
           </a:p>
         </p:txBody>
@@ -8448,8 +8412,54 @@
         </p:nvSpPr>
         <p:spPr>
           <a:xfrm>
-            <a:off x="320040" y="1197864"/>
-            <a:ext cx="73152" cy="274320"/>
+            <a:off x="320040" y="1188720"/>
+            <a:ext cx="3749039" cy="2286000"/>
+          </a:xfrm>
+          <a:prstGeom prst="rect">
+            <a:avLst/>
+          </a:prstGeom>
+          <a:solidFill>
+            <a:srgbClr val="FFFFFF"/>
+          </a:solidFill>
+          <a:ln w="15875">
+            <a:solidFill>
+              <a:srgbClr val="0070C0"/>
+            </a:solidFill>
+          </a:ln>
+          <a:effectLst/>
+        </p:spPr>
+        <p:style>
+          <a:lnRef idx="1">
+            <a:schemeClr val="accent1"/>
+          </a:lnRef>
+          <a:fillRef idx="3">
+            <a:schemeClr val="accent1"/>
+          </a:fillRef>
+          <a:effectRef idx="2">
+            <a:schemeClr val="accent1"/>
+          </a:effectRef>
+          <a:fontRef idx="minor">
+            <a:schemeClr val="lt1"/>
+          </a:fontRef>
+        </p:style>
+        <p:txBody>
+          <a:bodyPr rtlCol="0" anchor="ctr" lIns="54864" rIns="54864"/>
+          <a:lstStyle/>
+          <a:p>
+            <a:pPr algn="ctr"/>
+          </a:p>
+        </p:txBody>
+      </p:sp>
+      <p:sp>
+        <p:nvSpPr>
+          <p:cNvPr id="17412" name="Rectangle 17411"/>
+          <p:cNvSpPr/>
+          <p:nvPr/>
+        </p:nvSpPr>
+        <p:spPr>
+          <a:xfrm>
+            <a:off x="320040" y="1188720"/>
+            <a:ext cx="3749039" cy="365760"/>
           </a:xfrm>
           <a:prstGeom prst="rect">
             <a:avLst/>
@@ -8477,23 +8487,32 @@
           </a:fontRef>
         </p:style>
         <p:txBody>
-          <a:bodyPr rtlCol="0" anchor="ctr" lIns="54864" rIns="54864"/>
-          <a:lstStyle/>
-          <a:p>
-            <a:pPr algn="ctr"/>
-          </a:p>
-        </p:txBody>
-      </p:sp>
-      <p:sp>
-        <p:nvSpPr>
-          <p:cNvPr id="17412" name="TextBox 17411"/>
+          <a:bodyPr rtlCol="0" anchor="ctr" lIns="54864" rIns="54864" wrap="square"/>
+          <a:lstStyle/>
+          <a:p>
+            <a:pPr algn="l"/>
+            <a:r>
+              <a:rPr sz="1250" b="1" i="0">
+                <a:solidFill>
+                  <a:srgbClr val="FFFFFF"/>
+                </a:solidFill>
+                <a:latin typeface="Arial"/>
+              </a:rPr>
+              <a:t>1  ELEVATION EXTRACTION</a:t>
+            </a:r>
+          </a:p>
+        </p:txBody>
+      </p:sp>
+      <p:sp>
+        <p:nvSpPr>
+          <p:cNvPr id="17413" name="TextBox 17412"/>
           <p:cNvSpPr txBox="1"/>
           <p:nvPr/>
         </p:nvSpPr>
         <p:spPr>
           <a:xfrm>
-            <a:off x="448056" y="1152144"/>
-            <a:ext cx="5486400" cy="365760"/>
+            <a:off x="393192" y="1609344"/>
+            <a:ext cx="3611880" cy="1828800"/>
           </a:xfrm>
           <a:prstGeom prst="rect">
             <a:avLst/>
@@ -8512,27 +8531,1924 @@
               </a:spcAft>
             </a:pPr>
             <a:r>
-              <a:rPr sz="1450" b="1" i="0">
+              <a:rPr sz="1050" b="1" i="0">
                 <a:solidFill>
                   <a:srgbClr val="0070C0"/>
                 </a:solidFill>
                 <a:latin typeface="Arial"/>
               </a:rPr>
-              <a:t>TECHNOLOGIES</a:t>
-            </a:r>
-          </a:p>
-        </p:txBody>
-      </p:sp>
-      <p:sp>
-        <p:nvSpPr>
-          <p:cNvPr id="17413" name="Rounded Rectangle 17412"/>
+              <a:t>▪ </a:t>
+            </a:r>
+            <a:r>
+              <a:rPr sz="1050" b="0" i="0">
+                <a:solidFill>
+                  <a:srgbClr val="1C1C1C"/>
+                </a:solidFill>
+                <a:latin typeface="Arial"/>
+              </a:rPr>
+              <a:t>Frozen </a:t>
+            </a:r>
+            <a:r>
+              <a:rPr sz="1050" b="1" i="0">
+                <a:solidFill>
+                  <a:srgbClr val="1C1C1C"/>
+                </a:solidFill>
+                <a:latin typeface="Arial"/>
+              </a:rPr>
+              <a:t>DINOv3-SAT ViT-L/16</a:t>
+            </a:r>
+            <a:r>
+              <a:rPr sz="1050" b="0" i="0">
+                <a:solidFill>
+                  <a:srgbClr val="1C1C1C"/>
+                </a:solidFill>
+                <a:latin typeface="Arial"/>
+              </a:rPr>
+              <a:t> encoder, pre-trained by Meta on 493 M satellite images [4]</a:t>
+            </a:r>
+          </a:p>
+          <a:p>
+            <a:pPr algn="l">
+              <a:spcAft>
+                <a:spcPts val="400"/>
+              </a:spcAft>
+            </a:pPr>
+            <a:r>
+              <a:rPr sz="1050" b="1" i="0">
+                <a:solidFill>
+                  <a:srgbClr val="0070C0"/>
+                </a:solidFill>
+                <a:latin typeface="Arial"/>
+              </a:rPr>
+              <a:t>▪ </a:t>
+            </a:r>
+            <a:r>
+              <a:rPr sz="1050" b="0" i="0">
+                <a:solidFill>
+                  <a:srgbClr val="1C1C1C"/>
+                </a:solidFill>
+                <a:latin typeface="Arial"/>
+              </a:rPr>
+              <a:t>Features from blocks 6, 12, 18 and 24 fused by a </a:t>
+            </a:r>
+            <a:r>
+              <a:rPr sz="1050" b="1" i="0">
+                <a:solidFill>
+                  <a:srgbClr val="1C1C1C"/>
+                </a:solidFill>
+                <a:latin typeface="Arial"/>
+              </a:rPr>
+              <a:t>DPT decoder</a:t>
+            </a:r>
+            <a:r>
+              <a:rPr sz="1050" b="0" i="0">
+                <a:solidFill>
+                  <a:srgbClr val="1C1C1C"/>
+                </a:solidFill>
+                <a:latin typeface="Arial"/>
+              </a:rPr>
+              <a:t> that we trained [5]</a:t>
+            </a:r>
+          </a:p>
+          <a:p>
+            <a:pPr algn="l">
+              <a:spcAft>
+                <a:spcPts val="400"/>
+              </a:spcAft>
+            </a:pPr>
+            <a:r>
+              <a:rPr sz="1050" b="1" i="0">
+                <a:solidFill>
+                  <a:srgbClr val="0070C0"/>
+                </a:solidFill>
+                <a:latin typeface="Arial"/>
+              </a:rPr>
+              <a:t>▪ </a:t>
+            </a:r>
+            <a:r>
+              <a:rPr sz="1050" b="0" i="0">
+                <a:solidFill>
+                  <a:srgbClr val="1C1C1C"/>
+                </a:solidFill>
+                <a:latin typeface="Arial"/>
+              </a:rPr>
+              <a:t>Output: </a:t>
+            </a:r>
+            <a:r>
+              <a:rPr sz="1050" b="1" i="0">
+                <a:solidFill>
+                  <a:srgbClr val="1C1C1C"/>
+                </a:solidFill>
+                <a:latin typeface="Arial"/>
+              </a:rPr>
+              <a:t>height above ground in metres</a:t>
+            </a:r>
+            <a:r>
+              <a:rPr sz="1050" b="0" i="0">
+                <a:solidFill>
+                  <a:srgbClr val="1C1C1C"/>
+                </a:solidFill>
+                <a:latin typeface="Arial"/>
+              </a:rPr>
+              <a:t> for every pixel (nDSM)</a:t>
+            </a:r>
+          </a:p>
+          <a:p>
+            <a:pPr algn="l">
+              <a:spcAft>
+                <a:spcPts val="400"/>
+              </a:spcAft>
+            </a:pPr>
+            <a:r>
+              <a:rPr sz="1050" b="1" i="0">
+                <a:solidFill>
+                  <a:srgbClr val="0070C0"/>
+                </a:solidFill>
+                <a:latin typeface="Arial"/>
+              </a:rPr>
+              <a:t>▪ </a:t>
+            </a:r>
+            <a:r>
+              <a:rPr sz="1050" b="0" i="0">
+                <a:solidFill>
+                  <a:srgbClr val="1C1C1C"/>
+                </a:solidFill>
+                <a:latin typeface="Arial"/>
+              </a:rPr>
+              <a:t>Any pixel size normalised to 0.5 m; 608 px tiles, 25% overlap, Gaussian blending, flip averaging</a:t>
+            </a:r>
+          </a:p>
+        </p:txBody>
+      </p:sp>
+      <p:sp>
+        <p:nvSpPr>
+          <p:cNvPr id="17414" name="Rectangle 17413"/>
           <p:cNvSpPr/>
           <p:nvPr/>
         </p:nvSpPr>
         <p:spPr>
           <a:xfrm>
-            <a:off x="320040" y="1517904"/>
-            <a:ext cx="740664" cy="329184"/>
+            <a:off x="4219955" y="1188720"/>
+            <a:ext cx="3749039" cy="2286000"/>
+          </a:xfrm>
+          <a:prstGeom prst="rect">
+            <a:avLst/>
+          </a:prstGeom>
+          <a:solidFill>
+            <a:srgbClr val="FFFFFF"/>
+          </a:solidFill>
+          <a:ln w="15875">
+            <a:solidFill>
+              <a:srgbClr val="138D75"/>
+            </a:solidFill>
+          </a:ln>
+          <a:effectLst/>
+        </p:spPr>
+        <p:style>
+          <a:lnRef idx="1">
+            <a:schemeClr val="accent1"/>
+          </a:lnRef>
+          <a:fillRef idx="3">
+            <a:schemeClr val="accent1"/>
+          </a:fillRef>
+          <a:effectRef idx="2">
+            <a:schemeClr val="accent1"/>
+          </a:effectRef>
+          <a:fontRef idx="minor">
+            <a:schemeClr val="lt1"/>
+          </a:fontRef>
+        </p:style>
+        <p:txBody>
+          <a:bodyPr rtlCol="0" anchor="ctr" lIns="54864" rIns="54864"/>
+          <a:lstStyle/>
+          <a:p>
+            <a:pPr algn="ctr"/>
+          </a:p>
+        </p:txBody>
+      </p:sp>
+      <p:sp>
+        <p:nvSpPr>
+          <p:cNvPr id="17415" name="Rectangle 17414"/>
+          <p:cNvSpPr/>
+          <p:nvPr/>
+        </p:nvSpPr>
+        <p:spPr>
+          <a:xfrm>
+            <a:off x="4219955" y="1188720"/>
+            <a:ext cx="3749039" cy="365760"/>
+          </a:xfrm>
+          <a:prstGeom prst="rect">
+            <a:avLst/>
+          </a:prstGeom>
+          <a:solidFill>
+            <a:srgbClr val="138D75"/>
+          </a:solidFill>
+          <a:ln>
+            <a:noFill/>
+          </a:ln>
+          <a:effectLst/>
+        </p:spPr>
+        <p:style>
+          <a:lnRef idx="1">
+            <a:schemeClr val="accent1"/>
+          </a:lnRef>
+          <a:fillRef idx="3">
+            <a:schemeClr val="accent1"/>
+          </a:fillRef>
+          <a:effectRef idx="2">
+            <a:schemeClr val="accent1"/>
+          </a:effectRef>
+          <a:fontRef idx="minor">
+            <a:schemeClr val="lt1"/>
+          </a:fontRef>
+        </p:style>
+        <p:txBody>
+          <a:bodyPr rtlCol="0" anchor="ctr" lIns="54864" rIns="54864" wrap="square"/>
+          <a:lstStyle/>
+          <a:p>
+            <a:pPr algn="l"/>
+            <a:r>
+              <a:rPr sz="1250" b="1" i="0">
+                <a:solidFill>
+                  <a:srgbClr val="FFFFFF"/>
+                </a:solidFill>
+                <a:latin typeface="Arial"/>
+              </a:rPr>
+              <a:t>2  SCALE CALIBRATION</a:t>
+            </a:r>
+          </a:p>
+        </p:txBody>
+      </p:sp>
+      <p:sp>
+        <p:nvSpPr>
+          <p:cNvPr id="17416" name="TextBox 17415"/>
+          <p:cNvSpPr txBox="1"/>
+          <p:nvPr/>
+        </p:nvSpPr>
+        <p:spPr>
+          <a:xfrm>
+            <a:off x="4293107" y="1609344"/>
+            <a:ext cx="3611880" cy="1828800"/>
+          </a:xfrm>
+          <a:prstGeom prst="rect">
+            <a:avLst/>
+          </a:prstGeom>
+          <a:noFill/>
+        </p:spPr>
+        <p:txBody>
+          <a:bodyPr wrap="square" anchor="t" lIns="36576" rIns="36576" tIns="18288" bIns="18288">
+            <a:spAutoFit/>
+          </a:bodyPr>
+          <a:lstStyle/>
+          <a:p>
+            <a:pPr algn="l">
+              <a:spcAft>
+                <a:spcPts val="400"/>
+              </a:spcAft>
+            </a:pPr>
+            <a:r>
+              <a:rPr sz="1050" b="1" i="0">
+                <a:solidFill>
+                  <a:srgbClr val="0070C0"/>
+                </a:solidFill>
+                <a:latin typeface="Arial"/>
+              </a:rPr>
+              <a:t>▪ </a:t>
+            </a:r>
+            <a:r>
+              <a:rPr sz="1050" b="0" i="0">
+                <a:solidFill>
+                  <a:srgbClr val="1C1C1C"/>
+                </a:solidFill>
+                <a:latin typeface="Arial"/>
+              </a:rPr>
+              <a:t>Metric scale </a:t>
+            </a:r>
+            <a:r>
+              <a:rPr sz="1050" b="1" i="0">
+                <a:solidFill>
+                  <a:srgbClr val="1C1C1C"/>
+                </a:solidFill>
+                <a:latin typeface="Arial"/>
+              </a:rPr>
+              <a:t>learned from airborne-LiDAR heights</a:t>
+            </a:r>
+            <a:r>
+              <a:rPr sz="1050" b="0" i="0">
+                <a:solidFill>
+                  <a:srgbClr val="1C1C1C"/>
+                </a:solidFill>
+                <a:latin typeface="Arial"/>
+              </a:rPr>
+              <a:t> (masked Huber loss in metres) [3]</a:t>
+            </a:r>
+          </a:p>
+          <a:p>
+            <a:pPr algn="l">
+              <a:spcAft>
+                <a:spcPts val="400"/>
+              </a:spcAft>
+            </a:pPr>
+            <a:r>
+              <a:rPr sz="1050" b="1" i="0">
+                <a:solidFill>
+                  <a:srgbClr val="0070C0"/>
+                </a:solidFill>
+                <a:latin typeface="Arial"/>
+              </a:rPr>
+              <a:t>▪ </a:t>
+            </a:r>
+            <a:r>
+              <a:rPr sz="1050" b="1" i="0">
+                <a:solidFill>
+                  <a:srgbClr val="1C1C1C"/>
+                </a:solidFill>
+                <a:latin typeface="Arial"/>
+              </a:rPr>
+              <a:t>DSM = terrain + heights</a:t>
+            </a:r>
+            <a:r>
+              <a:rPr sz="1050" b="0" i="0">
+                <a:solidFill>
+                  <a:srgbClr val="1C1C1C"/>
+                </a:solidFill>
+                <a:latin typeface="Arial"/>
+              </a:rPr>
+              <a:t>: Copernicus GLO-30 or SRTM resampled onto the image grid, EGM2008 [7]</a:t>
+            </a:r>
+          </a:p>
+          <a:p>
+            <a:pPr algn="l">
+              <a:spcAft>
+                <a:spcPts val="400"/>
+              </a:spcAft>
+            </a:pPr>
+            <a:r>
+              <a:rPr sz="1050" b="1" i="0">
+                <a:solidFill>
+                  <a:srgbClr val="0070C0"/>
+                </a:solidFill>
+                <a:latin typeface="Arial"/>
+              </a:rPr>
+              <a:t>▪ </a:t>
+            </a:r>
+            <a:r>
+              <a:rPr sz="1050" b="0" i="0">
+                <a:solidFill>
+                  <a:srgbClr val="1C1C1C"/>
+                </a:solidFill>
+                <a:latin typeface="Arial"/>
+              </a:rPr>
+              <a:t>PNG/JPG: relative DSM, or </a:t>
+            </a:r>
+            <a:r>
+              <a:rPr sz="1050" b="1" i="0">
+                <a:solidFill>
+                  <a:srgbClr val="1C1C1C"/>
+                </a:solidFill>
+                <a:latin typeface="Arial"/>
+              </a:rPr>
+              <a:t>3+ GCPs</a:t>
+            </a:r>
+            <a:r>
+              <a:rPr sz="1050" b="0" i="0">
+                <a:solidFill>
+                  <a:srgbClr val="1C1C1C"/>
+                </a:solidFill>
+                <a:latin typeface="Arial"/>
+              </a:rPr>
+              <a:t> fit an affine to UTM for a full metric DSM</a:t>
+            </a:r>
+          </a:p>
+          <a:p>
+            <a:pPr algn="l">
+              <a:spcAft>
+                <a:spcPts val="400"/>
+              </a:spcAft>
+            </a:pPr>
+            <a:r>
+              <a:rPr sz="1050" b="1" i="0">
+                <a:solidFill>
+                  <a:srgbClr val="0070C0"/>
+                </a:solidFill>
+                <a:latin typeface="Arial"/>
+              </a:rPr>
+              <a:t>▪ </a:t>
+            </a:r>
+            <a:r>
+              <a:rPr sz="1050" b="0" i="0">
+                <a:solidFill>
+                  <a:srgbClr val="1C1C1C"/>
+                </a:solidFill>
+                <a:latin typeface="Arial"/>
+              </a:rPr>
+              <a:t>With reference data: </a:t>
+            </a:r>
+            <a:r>
+              <a:rPr sz="1050" b="1" i="0">
+                <a:solidFill>
+                  <a:srgbClr val="1C1C1C"/>
+                </a:solidFill>
+                <a:latin typeface="Arial"/>
+              </a:rPr>
+              <a:t>robust offset + scale</a:t>
+            </a:r>
+            <a:r>
+              <a:rPr sz="1050" b="0" i="0">
+                <a:solidFill>
+                  <a:srgbClr val="1C1C1C"/>
+                </a:solidFill>
+                <a:latin typeface="Arial"/>
+              </a:rPr>
+              <a:t> (RANSAC + Huber IRLS), tested on held-out pixels</a:t>
+            </a:r>
+          </a:p>
+        </p:txBody>
+      </p:sp>
+      <p:sp>
+        <p:nvSpPr>
+          <p:cNvPr id="17417" name="Rectangle 17416"/>
+          <p:cNvSpPr/>
+          <p:nvPr/>
+        </p:nvSpPr>
+        <p:spPr>
+          <a:xfrm>
+            <a:off x="8119871" y="1188720"/>
+            <a:ext cx="3749039" cy="2286000"/>
+          </a:xfrm>
+          <a:prstGeom prst="rect">
+            <a:avLst/>
+          </a:prstGeom>
+          <a:solidFill>
+            <a:srgbClr val="FFFFFF"/>
+          </a:solidFill>
+          <a:ln w="15875">
+            <a:solidFill>
+              <a:srgbClr val="D9822B"/>
+            </a:solidFill>
+          </a:ln>
+          <a:effectLst/>
+        </p:spPr>
+        <p:style>
+          <a:lnRef idx="1">
+            <a:schemeClr val="accent1"/>
+          </a:lnRef>
+          <a:fillRef idx="3">
+            <a:schemeClr val="accent1"/>
+          </a:fillRef>
+          <a:effectRef idx="2">
+            <a:schemeClr val="accent1"/>
+          </a:effectRef>
+          <a:fontRef idx="minor">
+            <a:schemeClr val="lt1"/>
+          </a:fontRef>
+        </p:style>
+        <p:txBody>
+          <a:bodyPr rtlCol="0" anchor="ctr" lIns="54864" rIns="54864"/>
+          <a:lstStyle/>
+          <a:p>
+            <a:pPr algn="ctr"/>
+          </a:p>
+        </p:txBody>
+      </p:sp>
+      <p:sp>
+        <p:nvSpPr>
+          <p:cNvPr id="17418" name="Rectangle 17417"/>
+          <p:cNvSpPr/>
+          <p:nvPr/>
+        </p:nvSpPr>
+        <p:spPr>
+          <a:xfrm>
+            <a:off x="8119871" y="1188720"/>
+            <a:ext cx="3749039" cy="365760"/>
+          </a:xfrm>
+          <a:prstGeom prst="rect">
+            <a:avLst/>
+          </a:prstGeom>
+          <a:solidFill>
+            <a:srgbClr val="D9822B"/>
+          </a:solidFill>
+          <a:ln>
+            <a:noFill/>
+          </a:ln>
+          <a:effectLst/>
+        </p:spPr>
+        <p:style>
+          <a:lnRef idx="1">
+            <a:schemeClr val="accent1"/>
+          </a:lnRef>
+          <a:fillRef idx="3">
+            <a:schemeClr val="accent1"/>
+          </a:fillRef>
+          <a:effectRef idx="2">
+            <a:schemeClr val="accent1"/>
+          </a:effectRef>
+          <a:fontRef idx="minor">
+            <a:schemeClr val="lt1"/>
+          </a:fontRef>
+        </p:style>
+        <p:txBody>
+          <a:bodyPr rtlCol="0" anchor="ctr" lIns="54864" rIns="54864" wrap="square"/>
+          <a:lstStyle/>
+          <a:p>
+            <a:pPr algn="l"/>
+            <a:r>
+              <a:rPr sz="1250" b="1" i="0">
+                <a:solidFill>
+                  <a:srgbClr val="FFFFFF"/>
+                </a:solidFill>
+                <a:latin typeface="Arial"/>
+              </a:rPr>
+              <a:t>3  VISUALIZATION LAYER</a:t>
+            </a:r>
+          </a:p>
+        </p:txBody>
+      </p:sp>
+      <p:sp>
+        <p:nvSpPr>
+          <p:cNvPr id="17419" name="TextBox 17418"/>
+          <p:cNvSpPr txBox="1"/>
+          <p:nvPr/>
+        </p:nvSpPr>
+        <p:spPr>
+          <a:xfrm>
+            <a:off x="8193023" y="1609344"/>
+            <a:ext cx="3611880" cy="1828800"/>
+          </a:xfrm>
+          <a:prstGeom prst="rect">
+            <a:avLst/>
+          </a:prstGeom>
+          <a:noFill/>
+        </p:spPr>
+        <p:txBody>
+          <a:bodyPr wrap="square" anchor="t" lIns="36576" rIns="36576" tIns="18288" bIns="18288">
+            <a:spAutoFit/>
+          </a:bodyPr>
+          <a:lstStyle/>
+          <a:p>
+            <a:pPr algn="l">
+              <a:spcAft>
+                <a:spcPts val="400"/>
+              </a:spcAft>
+            </a:pPr>
+            <a:r>
+              <a:rPr sz="1050" b="1" i="0">
+                <a:solidFill>
+                  <a:srgbClr val="0070C0"/>
+                </a:solidFill>
+                <a:latin typeface="Arial"/>
+              </a:rPr>
+              <a:t>▪ </a:t>
+            </a:r>
+            <a:r>
+              <a:rPr sz="1050" b="1" i="0">
+                <a:solidFill>
+                  <a:srgbClr val="1C1C1C"/>
+                </a:solidFill>
+                <a:latin typeface="Arial"/>
+              </a:rPr>
+              <a:t>Three.js / WebGL</a:t>
+            </a:r>
+            <a:r>
+              <a:rPr sz="1050" b="0" i="0">
+                <a:solidFill>
+                  <a:srgbClr val="1C1C1C"/>
+                </a:solidFill>
+                <a:latin typeface="Arial"/>
+              </a:rPr>
+              <a:t> terrain mesh up to 1024 × 1024 vertices, photo draped pixel-exact [10]</a:t>
+            </a:r>
+          </a:p>
+          <a:p>
+            <a:pPr algn="l">
+              <a:spcAft>
+                <a:spcPts val="400"/>
+              </a:spcAft>
+            </a:pPr>
+            <a:r>
+              <a:rPr sz="1050" b="1" i="0">
+                <a:solidFill>
+                  <a:srgbClr val="0070C0"/>
+                </a:solidFill>
+                <a:latin typeface="Arial"/>
+              </a:rPr>
+              <a:t>▪ </a:t>
+            </a:r>
+            <a:r>
+              <a:rPr sz="1050" b="0" i="0">
+                <a:solidFill>
+                  <a:srgbClr val="1C1C1C"/>
+                </a:solidFill>
+                <a:latin typeface="Arial"/>
+              </a:rPr>
+              <a:t>Orbit and </a:t>
+            </a:r>
+            <a:r>
+              <a:rPr sz="1050" b="1" i="0">
+                <a:solidFill>
+                  <a:srgbClr val="1C1C1C"/>
+                </a:solidFill>
+                <a:latin typeface="Arial"/>
+              </a:rPr>
+              <a:t>first-person flight</a:t>
+            </a:r>
+            <a:r>
+              <a:rPr sz="1050" b="0" i="0">
+                <a:solidFill>
+                  <a:srgbClr val="1C1C1C"/>
+                </a:solidFill>
+                <a:latin typeface="Arial"/>
+              </a:rPr>
+              <a:t>; height, slope and contour shading; height profiles</a:t>
+            </a:r>
+          </a:p>
+          <a:p>
+            <a:pPr algn="l">
+              <a:spcAft>
+                <a:spcPts val="400"/>
+              </a:spcAft>
+            </a:pPr>
+            <a:r>
+              <a:rPr sz="1050" b="1" i="0">
+                <a:solidFill>
+                  <a:srgbClr val="0070C0"/>
+                </a:solidFill>
+                <a:latin typeface="Arial"/>
+              </a:rPr>
+              <a:t>▪ </a:t>
+            </a:r>
+            <a:r>
+              <a:rPr sz="1050" b="1" i="0">
+                <a:solidFill>
+                  <a:srgbClr val="1C1C1C"/>
+                </a:solidFill>
+                <a:latin typeface="Arial"/>
+              </a:rPr>
+              <a:t>Validation</a:t>
+            </a:r>
+            <a:r>
+              <a:rPr sz="1050" b="0" i="0">
+                <a:solidFill>
+                  <a:srgbClr val="1C1C1C"/>
+                </a:solidFill>
+                <a:latin typeface="Arial"/>
+              </a:rPr>
+              <a:t>: upload a reference and get RMSE, MAE, r, an error map and a side-by-side swipe</a:t>
+            </a:r>
+          </a:p>
+          <a:p>
+            <a:pPr algn="l">
+              <a:spcAft>
+                <a:spcPts val="400"/>
+              </a:spcAft>
+            </a:pPr>
+            <a:r>
+              <a:rPr sz="1050" b="1" i="0">
+                <a:solidFill>
+                  <a:srgbClr val="0070C0"/>
+                </a:solidFill>
+                <a:latin typeface="Arial"/>
+              </a:rPr>
+              <a:t>▪ </a:t>
+            </a:r>
+            <a:r>
+              <a:rPr sz="1050" b="0" i="0">
+                <a:solidFill>
+                  <a:srgbClr val="1C1C1C"/>
+                </a:solidFill>
+                <a:latin typeface="Arial"/>
+              </a:rPr>
+              <a:t>Exports </a:t>
+            </a:r>
+            <a:r>
+              <a:rPr sz="1050" b="1" i="0">
+                <a:solidFill>
+                  <a:srgbClr val="1C1C1C"/>
+                </a:solidFill>
+                <a:latin typeface="Arial"/>
+              </a:rPr>
+              <a:t>GeoTIFF and GLB</a:t>
+            </a:r>
+            <a:r>
+              <a:rPr sz="1050" b="0" i="0">
+                <a:solidFill>
+                  <a:srgbClr val="1C1C1C"/>
+                </a:solidFill>
+                <a:latin typeface="Arial"/>
+              </a:rPr>
+              <a:t>; runs offline in the browser, no cloud</a:t>
+            </a:r>
+          </a:p>
+        </p:txBody>
+      </p:sp>
+      <p:pic>
+        <p:nvPicPr>
+          <p:cNvPr id="17420" name="Picture 17419" descr="india_rgb.jpg"/>
+          <p:cNvPicPr>
+            <a:picLocks noChangeAspect="1"/>
+          </p:cNvPicPr>
+          <p:nvPr/>
+        </p:nvPicPr>
+        <p:blipFill>
+          <a:blip r:embed="rId5"/>
+          <a:srcRect t="19430" b="19430"/>
+          <a:stretch>
+            <a:fillRect/>
+          </a:stretch>
+        </p:blipFill>
+        <p:spPr>
+          <a:xfrm>
+            <a:off x="320040" y="3584448"/>
+            <a:ext cx="1764792" cy="1078992"/>
+          </a:xfrm>
+          <a:prstGeom prst="rect">
+            <a:avLst/>
+          </a:prstGeom>
+          <a:ln w="9525">
+            <a:solidFill>
+              <a:srgbClr val="C9D6E8"/>
+            </a:solidFill>
+          </a:ln>
+        </p:spPr>
+      </p:pic>
+      <p:sp>
+        <p:nvSpPr>
+          <p:cNvPr id="17421" name="Oval 17420"/>
+          <p:cNvSpPr/>
+          <p:nvPr/>
+        </p:nvSpPr>
+        <p:spPr>
+          <a:xfrm>
+            <a:off x="365759" y="3630168"/>
+            <a:ext cx="274320" cy="274320"/>
+          </a:xfrm>
+          <a:prstGeom prst="ellipse">
+            <a:avLst/>
+          </a:prstGeom>
+          <a:solidFill>
+            <a:srgbClr val="1F3864"/>
+          </a:solidFill>
+          <a:ln w="12700">
+            <a:solidFill>
+              <a:srgbClr val="FFFFFF"/>
+            </a:solidFill>
+          </a:ln>
+          <a:effectLst/>
+        </p:spPr>
+        <p:style>
+          <a:lnRef idx="1">
+            <a:schemeClr val="accent1"/>
+          </a:lnRef>
+          <a:fillRef idx="3">
+            <a:schemeClr val="accent1"/>
+          </a:fillRef>
+          <a:effectRef idx="2">
+            <a:schemeClr val="accent1"/>
+          </a:effectRef>
+          <a:fontRef idx="minor">
+            <a:schemeClr val="lt1"/>
+          </a:fontRef>
+        </p:style>
+        <p:txBody>
+          <a:bodyPr rtlCol="0" anchor="ctr" lIns="54864" rIns="54864" wrap="square"/>
+          <a:lstStyle/>
+          <a:p>
+            <a:pPr algn="ctr"/>
+            <a:r>
+              <a:rPr sz="1000" b="1" i="0">
+                <a:solidFill>
+                  <a:srgbClr val="FFFFFF"/>
+                </a:solidFill>
+                <a:latin typeface="Arial"/>
+              </a:rPr>
+              <a:t>1</a:t>
+            </a:r>
+          </a:p>
+        </p:txBody>
+      </p:sp>
+      <p:sp>
+        <p:nvSpPr>
+          <p:cNvPr id="17422" name="TextBox 17421"/>
+          <p:cNvSpPr txBox="1"/>
+          <p:nvPr/>
+        </p:nvSpPr>
+        <p:spPr>
+          <a:xfrm>
+            <a:off x="320040" y="4681728"/>
+            <a:ext cx="1764792" cy="237744"/>
+          </a:xfrm>
+          <a:prstGeom prst="rect">
+            <a:avLst/>
+          </a:prstGeom>
+          <a:noFill/>
+        </p:spPr>
+        <p:txBody>
+          <a:bodyPr wrap="square" anchor="t" lIns="36576" rIns="36576" tIns="18288" bIns="18288">
+            <a:spAutoFit/>
+          </a:bodyPr>
+          <a:lstStyle/>
+          <a:p>
+            <a:pPr algn="ctr">
+              <a:spcAft>
+                <a:spcPts val="400"/>
+              </a:spcAft>
+            </a:pPr>
+            <a:r>
+              <a:rPr sz="1050" b="1" i="0">
+                <a:solidFill>
+                  <a:srgbClr val="1F3864"/>
+                </a:solidFill>
+                <a:latin typeface="Arial"/>
+              </a:rPr>
+              <a:t>Input image</a:t>
+            </a:r>
+          </a:p>
+        </p:txBody>
+      </p:sp>
+      <p:sp>
+        <p:nvSpPr>
+          <p:cNvPr id="17423" name="TextBox 17422"/>
+          <p:cNvSpPr txBox="1"/>
+          <p:nvPr/>
+        </p:nvSpPr>
+        <p:spPr>
+          <a:xfrm>
+            <a:off x="320040" y="4901183"/>
+            <a:ext cx="1764792" cy="237744"/>
+          </a:xfrm>
+          <a:prstGeom prst="rect">
+            <a:avLst/>
+          </a:prstGeom>
+          <a:noFill/>
+        </p:spPr>
+        <p:txBody>
+          <a:bodyPr wrap="square" anchor="t" lIns="36576" rIns="36576" tIns="18288" bIns="18288">
+            <a:spAutoFit/>
+          </a:bodyPr>
+          <a:lstStyle/>
+          <a:p>
+            <a:pPr algn="ctr">
+              <a:spcAft>
+                <a:spcPts val="400"/>
+              </a:spcAft>
+            </a:pPr>
+            <a:r>
+              <a:rPr sz="900" b="0" i="0">
+                <a:solidFill>
+                  <a:srgbClr val="555E6B"/>
+                </a:solidFill>
+                <a:latin typeface="Arial"/>
+              </a:rPr>
+              <a:t>WorldView-2, 0.31 m</a:t>
+            </a:r>
+          </a:p>
+        </p:txBody>
+      </p:sp>
+      <p:sp>
+        <p:nvSpPr>
+          <p:cNvPr id="17424" name="Isosceles Triangle 17423"/>
+          <p:cNvSpPr/>
+          <p:nvPr/>
+        </p:nvSpPr>
+        <p:spPr>
+          <a:xfrm rot="5400000">
+            <a:off x="2116836" y="4014215"/>
+            <a:ext cx="128016" cy="219456"/>
+          </a:xfrm>
+          <a:prstGeom prst="triangle">
+            <a:avLst/>
+          </a:prstGeom>
+          <a:solidFill>
+            <a:srgbClr val="0070C0"/>
+          </a:solidFill>
+          <a:ln>
+            <a:noFill/>
+          </a:ln>
+          <a:effectLst/>
+        </p:spPr>
+        <p:style>
+          <a:lnRef idx="1">
+            <a:schemeClr val="accent1"/>
+          </a:lnRef>
+          <a:fillRef idx="3">
+            <a:schemeClr val="accent1"/>
+          </a:fillRef>
+          <a:effectRef idx="2">
+            <a:schemeClr val="accent1"/>
+          </a:effectRef>
+          <a:fontRef idx="minor">
+            <a:schemeClr val="lt1"/>
+          </a:fontRef>
+        </p:style>
+        <p:txBody>
+          <a:bodyPr rtlCol="0" anchor="ctr" lIns="54864" rIns="54864"/>
+          <a:lstStyle/>
+          <a:p>
+            <a:pPr algn="ctr"/>
+          </a:p>
+        </p:txBody>
+      </p:sp>
+      <p:pic>
+        <p:nvPicPr>
+          <p:cNvPr id="17425" name="Picture 17424" descr="india_tiles.jpg"/>
+          <p:cNvPicPr>
+            <a:picLocks noChangeAspect="1"/>
+          </p:cNvPicPr>
+          <p:nvPr/>
+        </p:nvPicPr>
+        <p:blipFill>
+          <a:blip r:embed="rId6"/>
+          <a:srcRect t="19430" b="19430"/>
+          <a:stretch>
+            <a:fillRect/>
+          </a:stretch>
+        </p:blipFill>
+        <p:spPr>
+          <a:xfrm>
+            <a:off x="2276856" y="3584448"/>
+            <a:ext cx="1764792" cy="1078992"/>
+          </a:xfrm>
+          <a:prstGeom prst="rect">
+            <a:avLst/>
+          </a:prstGeom>
+          <a:ln w="9525">
+            <a:solidFill>
+              <a:srgbClr val="C9D6E8"/>
+            </a:solidFill>
+          </a:ln>
+        </p:spPr>
+      </p:pic>
+      <p:sp>
+        <p:nvSpPr>
+          <p:cNvPr id="17426" name="Oval 17425"/>
+          <p:cNvSpPr/>
+          <p:nvPr/>
+        </p:nvSpPr>
+        <p:spPr>
+          <a:xfrm>
+            <a:off x="2322576" y="3630168"/>
+            <a:ext cx="274320" cy="274320"/>
+          </a:xfrm>
+          <a:prstGeom prst="ellipse">
+            <a:avLst/>
+          </a:prstGeom>
+          <a:solidFill>
+            <a:srgbClr val="1F3864"/>
+          </a:solidFill>
+          <a:ln w="12700">
+            <a:solidFill>
+              <a:srgbClr val="FFFFFF"/>
+            </a:solidFill>
+          </a:ln>
+          <a:effectLst/>
+        </p:spPr>
+        <p:style>
+          <a:lnRef idx="1">
+            <a:schemeClr val="accent1"/>
+          </a:lnRef>
+          <a:fillRef idx="3">
+            <a:schemeClr val="accent1"/>
+          </a:fillRef>
+          <a:effectRef idx="2">
+            <a:schemeClr val="accent1"/>
+          </a:effectRef>
+          <a:fontRef idx="minor">
+            <a:schemeClr val="lt1"/>
+          </a:fontRef>
+        </p:style>
+        <p:txBody>
+          <a:bodyPr rtlCol="0" anchor="ctr" lIns="54864" rIns="54864" wrap="square"/>
+          <a:lstStyle/>
+          <a:p>
+            <a:pPr algn="ctr"/>
+            <a:r>
+              <a:rPr sz="1000" b="1" i="0">
+                <a:solidFill>
+                  <a:srgbClr val="FFFFFF"/>
+                </a:solidFill>
+                <a:latin typeface="Arial"/>
+              </a:rPr>
+              <a:t>2</a:t>
+            </a:r>
+          </a:p>
+        </p:txBody>
+      </p:sp>
+      <p:sp>
+        <p:nvSpPr>
+          <p:cNvPr id="17427" name="TextBox 17426"/>
+          <p:cNvSpPr txBox="1"/>
+          <p:nvPr/>
+        </p:nvSpPr>
+        <p:spPr>
+          <a:xfrm>
+            <a:off x="2276856" y="4681728"/>
+            <a:ext cx="1764792" cy="237744"/>
+          </a:xfrm>
+          <a:prstGeom prst="rect">
+            <a:avLst/>
+          </a:prstGeom>
+          <a:noFill/>
+        </p:spPr>
+        <p:txBody>
+          <a:bodyPr wrap="square" anchor="t" lIns="36576" rIns="36576" tIns="18288" bIns="18288">
+            <a:spAutoFit/>
+          </a:bodyPr>
+          <a:lstStyle/>
+          <a:p>
+            <a:pPr algn="ctr">
+              <a:spcAft>
+                <a:spcPts val="400"/>
+              </a:spcAft>
+            </a:pPr>
+            <a:r>
+              <a:rPr sz="1050" b="1" i="0">
+                <a:solidFill>
+                  <a:srgbClr val="1F3864"/>
+                </a:solidFill>
+                <a:latin typeface="Arial"/>
+              </a:rPr>
+              <a:t>Tiling</a:t>
+            </a:r>
+          </a:p>
+        </p:txBody>
+      </p:sp>
+      <p:sp>
+        <p:nvSpPr>
+          <p:cNvPr id="17428" name="TextBox 17427"/>
+          <p:cNvSpPr txBox="1"/>
+          <p:nvPr/>
+        </p:nvSpPr>
+        <p:spPr>
+          <a:xfrm>
+            <a:off x="2276856" y="4901183"/>
+            <a:ext cx="1764792" cy="237744"/>
+          </a:xfrm>
+          <a:prstGeom prst="rect">
+            <a:avLst/>
+          </a:prstGeom>
+          <a:noFill/>
+        </p:spPr>
+        <p:txBody>
+          <a:bodyPr wrap="square" anchor="t" lIns="36576" rIns="36576" tIns="18288" bIns="18288">
+            <a:spAutoFit/>
+          </a:bodyPr>
+          <a:lstStyle/>
+          <a:p>
+            <a:pPr algn="ctr">
+              <a:spcAft>
+                <a:spcPts val="400"/>
+              </a:spcAft>
+            </a:pPr>
+            <a:r>
+              <a:rPr sz="900" b="0" i="0">
+                <a:solidFill>
+                  <a:srgbClr val="555E6B"/>
+                </a:solidFill>
+                <a:latin typeface="Arial"/>
+              </a:rPr>
+              <a:t>608 px, 25% overlap</a:t>
+            </a:r>
+          </a:p>
+        </p:txBody>
+      </p:sp>
+      <p:sp>
+        <p:nvSpPr>
+          <p:cNvPr id="17429" name="Isosceles Triangle 17428"/>
+          <p:cNvSpPr/>
+          <p:nvPr/>
+        </p:nvSpPr>
+        <p:spPr>
+          <a:xfrm rot="5400000">
+            <a:off x="4073652" y="4014215"/>
+            <a:ext cx="128016" cy="219456"/>
+          </a:xfrm>
+          <a:prstGeom prst="triangle">
+            <a:avLst/>
+          </a:prstGeom>
+          <a:solidFill>
+            <a:srgbClr val="0070C0"/>
+          </a:solidFill>
+          <a:ln>
+            <a:noFill/>
+          </a:ln>
+          <a:effectLst/>
+        </p:spPr>
+        <p:style>
+          <a:lnRef idx="1">
+            <a:schemeClr val="accent1"/>
+          </a:lnRef>
+          <a:fillRef idx="3">
+            <a:schemeClr val="accent1"/>
+          </a:fillRef>
+          <a:effectRef idx="2">
+            <a:schemeClr val="accent1"/>
+          </a:effectRef>
+          <a:fontRef idx="minor">
+            <a:schemeClr val="lt1"/>
+          </a:fontRef>
+        </p:style>
+        <p:txBody>
+          <a:bodyPr rtlCol="0" anchor="ctr" lIns="54864" rIns="54864"/>
+          <a:lstStyle/>
+          <a:p>
+            <a:pPr algn="ctr"/>
+          </a:p>
+        </p:txBody>
+      </p:sp>
+      <p:pic>
+        <p:nvPicPr>
+          <p:cNvPr id="17430" name="Picture 17429" descr="india_features.jpg"/>
+          <p:cNvPicPr>
+            <a:picLocks noChangeAspect="1"/>
+          </p:cNvPicPr>
+          <p:nvPr/>
+        </p:nvPicPr>
+        <p:blipFill>
+          <a:blip r:embed="rId7"/>
+          <a:srcRect t="19430" b="19430"/>
+          <a:stretch>
+            <a:fillRect/>
+          </a:stretch>
+        </p:blipFill>
+        <p:spPr>
+          <a:xfrm>
+            <a:off x="4233672" y="3584448"/>
+            <a:ext cx="1764792" cy="1078992"/>
+          </a:xfrm>
+          <a:prstGeom prst="rect">
+            <a:avLst/>
+          </a:prstGeom>
+          <a:ln w="9525">
+            <a:solidFill>
+              <a:srgbClr val="C9D6E8"/>
+            </a:solidFill>
+          </a:ln>
+        </p:spPr>
+      </p:pic>
+      <p:sp>
+        <p:nvSpPr>
+          <p:cNvPr id="17431" name="Oval 17430"/>
+          <p:cNvSpPr/>
+          <p:nvPr/>
+        </p:nvSpPr>
+        <p:spPr>
+          <a:xfrm>
+            <a:off x="4279392" y="3630168"/>
+            <a:ext cx="274320" cy="274320"/>
+          </a:xfrm>
+          <a:prstGeom prst="ellipse">
+            <a:avLst/>
+          </a:prstGeom>
+          <a:solidFill>
+            <a:srgbClr val="1F3864"/>
+          </a:solidFill>
+          <a:ln w="12700">
+            <a:solidFill>
+              <a:srgbClr val="FFFFFF"/>
+            </a:solidFill>
+          </a:ln>
+          <a:effectLst/>
+        </p:spPr>
+        <p:style>
+          <a:lnRef idx="1">
+            <a:schemeClr val="accent1"/>
+          </a:lnRef>
+          <a:fillRef idx="3">
+            <a:schemeClr val="accent1"/>
+          </a:fillRef>
+          <a:effectRef idx="2">
+            <a:schemeClr val="accent1"/>
+          </a:effectRef>
+          <a:fontRef idx="minor">
+            <a:schemeClr val="lt1"/>
+          </a:fontRef>
+        </p:style>
+        <p:txBody>
+          <a:bodyPr rtlCol="0" anchor="ctr" lIns="54864" rIns="54864" wrap="square"/>
+          <a:lstStyle/>
+          <a:p>
+            <a:pPr algn="ctr"/>
+            <a:r>
+              <a:rPr sz="1000" b="1" i="0">
+                <a:solidFill>
+                  <a:srgbClr val="FFFFFF"/>
+                </a:solidFill>
+                <a:latin typeface="Arial"/>
+              </a:rPr>
+              <a:t>3</a:t>
+            </a:r>
+          </a:p>
+        </p:txBody>
+      </p:sp>
+      <p:sp>
+        <p:nvSpPr>
+          <p:cNvPr id="17432" name="TextBox 17431"/>
+          <p:cNvSpPr txBox="1"/>
+          <p:nvPr/>
+        </p:nvSpPr>
+        <p:spPr>
+          <a:xfrm>
+            <a:off x="4233672" y="4681728"/>
+            <a:ext cx="1764792" cy="237744"/>
+          </a:xfrm>
+          <a:prstGeom prst="rect">
+            <a:avLst/>
+          </a:prstGeom>
+          <a:noFill/>
+        </p:spPr>
+        <p:txBody>
+          <a:bodyPr wrap="square" anchor="t" lIns="36576" rIns="36576" tIns="18288" bIns="18288">
+            <a:spAutoFit/>
+          </a:bodyPr>
+          <a:lstStyle/>
+          <a:p>
+            <a:pPr algn="ctr">
+              <a:spcAft>
+                <a:spcPts val="400"/>
+              </a:spcAft>
+            </a:pPr>
+            <a:r>
+              <a:rPr sz="1050" b="1" i="0">
+                <a:solidFill>
+                  <a:srgbClr val="1F3864"/>
+                </a:solidFill>
+                <a:latin typeface="Arial"/>
+              </a:rPr>
+              <a:t>What the AI sees</a:t>
+            </a:r>
+          </a:p>
+        </p:txBody>
+      </p:sp>
+      <p:sp>
+        <p:nvSpPr>
+          <p:cNvPr id="17433" name="TextBox 17432"/>
+          <p:cNvSpPr txBox="1"/>
+          <p:nvPr/>
+        </p:nvSpPr>
+        <p:spPr>
+          <a:xfrm>
+            <a:off x="4233672" y="4901183"/>
+            <a:ext cx="1764792" cy="237744"/>
+          </a:xfrm>
+          <a:prstGeom prst="rect">
+            <a:avLst/>
+          </a:prstGeom>
+          <a:noFill/>
+        </p:spPr>
+        <p:txBody>
+          <a:bodyPr wrap="square" anchor="t" lIns="36576" rIns="36576" tIns="18288" bIns="18288">
+            <a:spAutoFit/>
+          </a:bodyPr>
+          <a:lstStyle/>
+          <a:p>
+            <a:pPr algn="ctr">
+              <a:spcAft>
+                <a:spcPts val="400"/>
+              </a:spcAft>
+            </a:pPr>
+            <a:r>
+              <a:rPr sz="900" b="0" i="0">
+                <a:solidFill>
+                  <a:srgbClr val="555E6B"/>
+                </a:solidFill>
+                <a:latin typeface="Arial"/>
+              </a:rPr>
+              <a:t>DINOv3-SAT features</a:t>
+            </a:r>
+          </a:p>
+        </p:txBody>
+      </p:sp>
+      <p:sp>
+        <p:nvSpPr>
+          <p:cNvPr id="17434" name="Isosceles Triangle 17433"/>
+          <p:cNvSpPr/>
+          <p:nvPr/>
+        </p:nvSpPr>
+        <p:spPr>
+          <a:xfrm rot="5400000">
+            <a:off x="6030468" y="4014215"/>
+            <a:ext cx="128016" cy="219456"/>
+          </a:xfrm>
+          <a:prstGeom prst="triangle">
+            <a:avLst/>
+          </a:prstGeom>
+          <a:solidFill>
+            <a:srgbClr val="0070C0"/>
+          </a:solidFill>
+          <a:ln>
+            <a:noFill/>
+          </a:ln>
+          <a:effectLst/>
+        </p:spPr>
+        <p:style>
+          <a:lnRef idx="1">
+            <a:schemeClr val="accent1"/>
+          </a:lnRef>
+          <a:fillRef idx="3">
+            <a:schemeClr val="accent1"/>
+          </a:fillRef>
+          <a:effectRef idx="2">
+            <a:schemeClr val="accent1"/>
+          </a:effectRef>
+          <a:fontRef idx="minor">
+            <a:schemeClr val="lt1"/>
+          </a:fontRef>
+        </p:style>
+        <p:txBody>
+          <a:bodyPr rtlCol="0" anchor="ctr" lIns="54864" rIns="54864"/>
+          <a:lstStyle/>
+          <a:p>
+            <a:pPr algn="ctr"/>
+          </a:p>
+        </p:txBody>
+      </p:sp>
+      <p:pic>
+        <p:nvPicPr>
+          <p:cNvPr id="17435" name="Picture 17434" descr="india_ndsm.jpg"/>
+          <p:cNvPicPr>
+            <a:picLocks noChangeAspect="1"/>
+          </p:cNvPicPr>
+          <p:nvPr/>
+        </p:nvPicPr>
+        <p:blipFill>
+          <a:blip r:embed="rId8"/>
+          <a:srcRect t="19430" b="19430"/>
+          <a:stretch>
+            <a:fillRect/>
+          </a:stretch>
+        </p:blipFill>
+        <p:spPr>
+          <a:xfrm>
+            <a:off x="6190488" y="3584448"/>
+            <a:ext cx="1764792" cy="1078992"/>
+          </a:xfrm>
+          <a:prstGeom prst="rect">
+            <a:avLst/>
+          </a:prstGeom>
+          <a:ln w="9525">
+            <a:solidFill>
+              <a:srgbClr val="C9D6E8"/>
+            </a:solidFill>
+          </a:ln>
+        </p:spPr>
+      </p:pic>
+      <p:sp>
+        <p:nvSpPr>
+          <p:cNvPr id="17436" name="Oval 17435"/>
+          <p:cNvSpPr/>
+          <p:nvPr/>
+        </p:nvSpPr>
+        <p:spPr>
+          <a:xfrm>
+            <a:off x="6236207" y="3630168"/>
+            <a:ext cx="274320" cy="274320"/>
+          </a:xfrm>
+          <a:prstGeom prst="ellipse">
+            <a:avLst/>
+          </a:prstGeom>
+          <a:solidFill>
+            <a:srgbClr val="1F3864"/>
+          </a:solidFill>
+          <a:ln w="12700">
+            <a:solidFill>
+              <a:srgbClr val="FFFFFF"/>
+            </a:solidFill>
+          </a:ln>
+          <a:effectLst/>
+        </p:spPr>
+        <p:style>
+          <a:lnRef idx="1">
+            <a:schemeClr val="accent1"/>
+          </a:lnRef>
+          <a:fillRef idx="3">
+            <a:schemeClr val="accent1"/>
+          </a:fillRef>
+          <a:effectRef idx="2">
+            <a:schemeClr val="accent1"/>
+          </a:effectRef>
+          <a:fontRef idx="minor">
+            <a:schemeClr val="lt1"/>
+          </a:fontRef>
+        </p:style>
+        <p:txBody>
+          <a:bodyPr rtlCol="0" anchor="ctr" lIns="54864" rIns="54864" wrap="square"/>
+          <a:lstStyle/>
+          <a:p>
+            <a:pPr algn="ctr"/>
+            <a:r>
+              <a:rPr sz="1000" b="1" i="0">
+                <a:solidFill>
+                  <a:srgbClr val="FFFFFF"/>
+                </a:solidFill>
+                <a:latin typeface="Arial"/>
+              </a:rPr>
+              <a:t>4</a:t>
+            </a:r>
+          </a:p>
+        </p:txBody>
+      </p:sp>
+      <p:sp>
+        <p:nvSpPr>
+          <p:cNvPr id="17437" name="TextBox 17436"/>
+          <p:cNvSpPr txBox="1"/>
+          <p:nvPr/>
+        </p:nvSpPr>
+        <p:spPr>
+          <a:xfrm>
+            <a:off x="6190488" y="4681728"/>
+            <a:ext cx="1764792" cy="237744"/>
+          </a:xfrm>
+          <a:prstGeom prst="rect">
+            <a:avLst/>
+          </a:prstGeom>
+          <a:noFill/>
+        </p:spPr>
+        <p:txBody>
+          <a:bodyPr wrap="square" anchor="t" lIns="36576" rIns="36576" tIns="18288" bIns="18288">
+            <a:spAutoFit/>
+          </a:bodyPr>
+          <a:lstStyle/>
+          <a:p>
+            <a:pPr algn="ctr">
+              <a:spcAft>
+                <a:spcPts val="400"/>
+              </a:spcAft>
+            </a:pPr>
+            <a:r>
+              <a:rPr sz="1050" b="1" i="0">
+                <a:solidFill>
+                  <a:srgbClr val="1F3864"/>
+                </a:solidFill>
+                <a:latin typeface="Arial"/>
+              </a:rPr>
+              <a:t>Heights (nDSM)</a:t>
+            </a:r>
+          </a:p>
+        </p:txBody>
+      </p:sp>
+      <p:sp>
+        <p:nvSpPr>
+          <p:cNvPr id="17438" name="TextBox 17437"/>
+          <p:cNvSpPr txBox="1"/>
+          <p:nvPr/>
+        </p:nvSpPr>
+        <p:spPr>
+          <a:xfrm>
+            <a:off x="6190488" y="4901183"/>
+            <a:ext cx="1764792" cy="237744"/>
+          </a:xfrm>
+          <a:prstGeom prst="rect">
+            <a:avLst/>
+          </a:prstGeom>
+          <a:noFill/>
+        </p:spPr>
+        <p:txBody>
+          <a:bodyPr wrap="square" anchor="t" lIns="36576" rIns="36576" tIns="18288" bIns="18288">
+            <a:spAutoFit/>
+          </a:bodyPr>
+          <a:lstStyle/>
+          <a:p>
+            <a:pPr algn="ctr">
+              <a:spcAft>
+                <a:spcPts val="400"/>
+              </a:spcAft>
+            </a:pPr>
+            <a:r>
+              <a:rPr sz="900" b="0" i="0">
+                <a:solidFill>
+                  <a:srgbClr val="555E6B"/>
+                </a:solidFill>
+                <a:latin typeface="Arial"/>
+              </a:rPr>
+              <a:t>metres above ground</a:t>
+            </a:r>
+          </a:p>
+        </p:txBody>
+      </p:sp>
+      <p:sp>
+        <p:nvSpPr>
+          <p:cNvPr id="17439" name="Isosceles Triangle 17438"/>
+          <p:cNvSpPr/>
+          <p:nvPr/>
+        </p:nvSpPr>
+        <p:spPr>
+          <a:xfrm rot="5400000">
+            <a:off x="7987283" y="4014215"/>
+            <a:ext cx="128016" cy="219456"/>
+          </a:xfrm>
+          <a:prstGeom prst="triangle">
+            <a:avLst/>
+          </a:prstGeom>
+          <a:solidFill>
+            <a:srgbClr val="0070C0"/>
+          </a:solidFill>
+          <a:ln>
+            <a:noFill/>
+          </a:ln>
+          <a:effectLst/>
+        </p:spPr>
+        <p:style>
+          <a:lnRef idx="1">
+            <a:schemeClr val="accent1"/>
+          </a:lnRef>
+          <a:fillRef idx="3">
+            <a:schemeClr val="accent1"/>
+          </a:fillRef>
+          <a:effectRef idx="2">
+            <a:schemeClr val="accent1"/>
+          </a:effectRef>
+          <a:fontRef idx="minor">
+            <a:schemeClr val="lt1"/>
+          </a:fontRef>
+        </p:style>
+        <p:txBody>
+          <a:bodyPr rtlCol="0" anchor="ctr" lIns="54864" rIns="54864"/>
+          <a:lstStyle/>
+          <a:p>
+            <a:pPr algn="ctr"/>
+          </a:p>
+        </p:txBody>
+      </p:sp>
+      <p:pic>
+        <p:nvPicPr>
+          <p:cNvPr id="17440" name="Picture 17439" descr="india_dsm.jpg"/>
+          <p:cNvPicPr>
+            <a:picLocks noChangeAspect="1"/>
+          </p:cNvPicPr>
+          <p:nvPr/>
+        </p:nvPicPr>
+        <p:blipFill>
+          <a:blip r:embed="rId9"/>
+          <a:srcRect t="19430" b="19430"/>
+          <a:stretch>
+            <a:fillRect/>
+          </a:stretch>
+        </p:blipFill>
+        <p:spPr>
+          <a:xfrm>
+            <a:off x="8147304" y="3584448"/>
+            <a:ext cx="1764792" cy="1078992"/>
+          </a:xfrm>
+          <a:prstGeom prst="rect">
+            <a:avLst/>
+          </a:prstGeom>
+          <a:ln w="9525">
+            <a:solidFill>
+              <a:srgbClr val="C9D6E8"/>
+            </a:solidFill>
+          </a:ln>
+        </p:spPr>
+      </p:pic>
+      <p:sp>
+        <p:nvSpPr>
+          <p:cNvPr id="17441" name="Oval 17440"/>
+          <p:cNvSpPr/>
+          <p:nvPr/>
+        </p:nvSpPr>
+        <p:spPr>
+          <a:xfrm>
+            <a:off x="8193024" y="3630168"/>
+            <a:ext cx="274320" cy="274320"/>
+          </a:xfrm>
+          <a:prstGeom prst="ellipse">
+            <a:avLst/>
+          </a:prstGeom>
+          <a:solidFill>
+            <a:srgbClr val="1F3864"/>
+          </a:solidFill>
+          <a:ln w="12700">
+            <a:solidFill>
+              <a:srgbClr val="FFFFFF"/>
+            </a:solidFill>
+          </a:ln>
+          <a:effectLst/>
+        </p:spPr>
+        <p:style>
+          <a:lnRef idx="1">
+            <a:schemeClr val="accent1"/>
+          </a:lnRef>
+          <a:fillRef idx="3">
+            <a:schemeClr val="accent1"/>
+          </a:fillRef>
+          <a:effectRef idx="2">
+            <a:schemeClr val="accent1"/>
+          </a:effectRef>
+          <a:fontRef idx="minor">
+            <a:schemeClr val="lt1"/>
+          </a:fontRef>
+        </p:style>
+        <p:txBody>
+          <a:bodyPr rtlCol="0" anchor="ctr" lIns="54864" rIns="54864" wrap="square"/>
+          <a:lstStyle/>
+          <a:p>
+            <a:pPr algn="ctr"/>
+            <a:r>
+              <a:rPr sz="1000" b="1" i="0">
+                <a:solidFill>
+                  <a:srgbClr val="FFFFFF"/>
+                </a:solidFill>
+                <a:latin typeface="Arial"/>
+              </a:rPr>
+              <a:t>5</a:t>
+            </a:r>
+          </a:p>
+        </p:txBody>
+      </p:sp>
+      <p:sp>
+        <p:nvSpPr>
+          <p:cNvPr id="17442" name="TextBox 17441"/>
+          <p:cNvSpPr txBox="1"/>
+          <p:nvPr/>
+        </p:nvSpPr>
+        <p:spPr>
+          <a:xfrm>
+            <a:off x="8147304" y="4681728"/>
+            <a:ext cx="1764792" cy="237744"/>
+          </a:xfrm>
+          <a:prstGeom prst="rect">
+            <a:avLst/>
+          </a:prstGeom>
+          <a:noFill/>
+        </p:spPr>
+        <p:txBody>
+          <a:bodyPr wrap="square" anchor="t" lIns="36576" rIns="36576" tIns="18288" bIns="18288">
+            <a:spAutoFit/>
+          </a:bodyPr>
+          <a:lstStyle/>
+          <a:p>
+            <a:pPr algn="ctr">
+              <a:spcAft>
+                <a:spcPts val="400"/>
+              </a:spcAft>
+            </a:pPr>
+            <a:r>
+              <a:rPr sz="1050" b="1" i="0">
+                <a:solidFill>
+                  <a:srgbClr val="1F3864"/>
+                </a:solidFill>
+                <a:latin typeface="Arial"/>
+              </a:rPr>
+              <a:t>+ terrain = DSM</a:t>
+            </a:r>
+          </a:p>
+        </p:txBody>
+      </p:sp>
+      <p:sp>
+        <p:nvSpPr>
+          <p:cNvPr id="17443" name="TextBox 17442"/>
+          <p:cNvSpPr txBox="1"/>
+          <p:nvPr/>
+        </p:nvSpPr>
+        <p:spPr>
+          <a:xfrm>
+            <a:off x="8147304" y="4901183"/>
+            <a:ext cx="1764792" cy="237744"/>
+          </a:xfrm>
+          <a:prstGeom prst="rect">
+            <a:avLst/>
+          </a:prstGeom>
+          <a:noFill/>
+        </p:spPr>
+        <p:txBody>
+          <a:bodyPr wrap="square" anchor="t" lIns="36576" rIns="36576" tIns="18288" bIns="18288">
+            <a:spAutoFit/>
+          </a:bodyPr>
+          <a:lstStyle/>
+          <a:p>
+            <a:pPr algn="ctr">
+              <a:spcAft>
+                <a:spcPts val="400"/>
+              </a:spcAft>
+            </a:pPr>
+            <a:r>
+              <a:rPr sz="900" b="0" i="0">
+                <a:solidFill>
+                  <a:srgbClr val="555E6B"/>
+                </a:solidFill>
+                <a:latin typeface="Arial"/>
+              </a:rPr>
+              <a:t>Copernicus 30 m</a:t>
+            </a:r>
+          </a:p>
+        </p:txBody>
+      </p:sp>
+      <p:sp>
+        <p:nvSpPr>
+          <p:cNvPr id="17444" name="Isosceles Triangle 17443"/>
+          <p:cNvSpPr/>
+          <p:nvPr/>
+        </p:nvSpPr>
+        <p:spPr>
+          <a:xfrm rot="5400000">
+            <a:off x="9944100" y="4014215"/>
+            <a:ext cx="128016" cy="219456"/>
+          </a:xfrm>
+          <a:prstGeom prst="triangle">
+            <a:avLst/>
+          </a:prstGeom>
+          <a:solidFill>
+            <a:srgbClr val="0070C0"/>
+          </a:solidFill>
+          <a:ln>
+            <a:noFill/>
+          </a:ln>
+          <a:effectLst/>
+        </p:spPr>
+        <p:style>
+          <a:lnRef idx="1">
+            <a:schemeClr val="accent1"/>
+          </a:lnRef>
+          <a:fillRef idx="3">
+            <a:schemeClr val="accent1"/>
+          </a:fillRef>
+          <a:effectRef idx="2">
+            <a:schemeClr val="accent1"/>
+          </a:effectRef>
+          <a:fontRef idx="minor">
+            <a:schemeClr val="lt1"/>
+          </a:fontRef>
+        </p:style>
+        <p:txBody>
+          <a:bodyPr rtlCol="0" anchor="ctr" lIns="54864" rIns="54864"/>
+          <a:lstStyle/>
+          <a:p>
+            <a:pPr algn="ctr"/>
+          </a:p>
+        </p:txBody>
+      </p:sp>
+      <p:pic>
+        <p:nvPicPr>
+          <p:cNvPr id="17445" name="Picture 17444" descr="hero.jpg"/>
+          <p:cNvPicPr>
+            <a:picLocks noChangeAspect="1"/>
+          </p:cNvPicPr>
+          <p:nvPr/>
+        </p:nvPicPr>
+        <p:blipFill>
+          <a:blip r:embed="rId10"/>
+          <a:srcRect l="3371" r="3371"/>
+          <a:stretch>
+            <a:fillRect/>
+          </a:stretch>
+        </p:blipFill>
+        <p:spPr>
+          <a:xfrm>
+            <a:off x="10104120" y="3584448"/>
+            <a:ext cx="1764792" cy="1078992"/>
+          </a:xfrm>
+          <a:prstGeom prst="rect">
+            <a:avLst/>
+          </a:prstGeom>
+          <a:ln w="9525">
+            <a:solidFill>
+              <a:srgbClr val="C9D6E8"/>
+            </a:solidFill>
+          </a:ln>
+        </p:spPr>
+      </p:pic>
+      <p:sp>
+        <p:nvSpPr>
+          <p:cNvPr id="17446" name="Oval 17445"/>
+          <p:cNvSpPr/>
+          <p:nvPr/>
+        </p:nvSpPr>
+        <p:spPr>
+          <a:xfrm>
+            <a:off x="10149840" y="3630168"/>
+            <a:ext cx="274320" cy="274320"/>
+          </a:xfrm>
+          <a:prstGeom prst="ellipse">
+            <a:avLst/>
+          </a:prstGeom>
+          <a:solidFill>
+            <a:srgbClr val="1F3864"/>
+          </a:solidFill>
+          <a:ln w="12700">
+            <a:solidFill>
+              <a:srgbClr val="FFFFFF"/>
+            </a:solidFill>
+          </a:ln>
+          <a:effectLst/>
+        </p:spPr>
+        <p:style>
+          <a:lnRef idx="1">
+            <a:schemeClr val="accent1"/>
+          </a:lnRef>
+          <a:fillRef idx="3">
+            <a:schemeClr val="accent1"/>
+          </a:fillRef>
+          <a:effectRef idx="2">
+            <a:schemeClr val="accent1"/>
+          </a:effectRef>
+          <a:fontRef idx="minor">
+            <a:schemeClr val="lt1"/>
+          </a:fontRef>
+        </p:style>
+        <p:txBody>
+          <a:bodyPr rtlCol="0" anchor="ctr" lIns="54864" rIns="54864" wrap="square"/>
+          <a:lstStyle/>
+          <a:p>
+            <a:pPr algn="ctr"/>
+            <a:r>
+              <a:rPr sz="1000" b="1" i="0">
+                <a:solidFill>
+                  <a:srgbClr val="FFFFFF"/>
+                </a:solidFill>
+                <a:latin typeface="Arial"/>
+              </a:rPr>
+              <a:t>6</a:t>
+            </a:r>
+          </a:p>
+        </p:txBody>
+      </p:sp>
+      <p:sp>
+        <p:nvSpPr>
+          <p:cNvPr id="17447" name="TextBox 17446"/>
+          <p:cNvSpPr txBox="1"/>
+          <p:nvPr/>
+        </p:nvSpPr>
+        <p:spPr>
+          <a:xfrm>
+            <a:off x="10104120" y="4681728"/>
+            <a:ext cx="1764792" cy="237744"/>
+          </a:xfrm>
+          <a:prstGeom prst="rect">
+            <a:avLst/>
+          </a:prstGeom>
+          <a:noFill/>
+        </p:spPr>
+        <p:txBody>
+          <a:bodyPr wrap="square" anchor="t" lIns="36576" rIns="36576" tIns="18288" bIns="18288">
+            <a:spAutoFit/>
+          </a:bodyPr>
+          <a:lstStyle/>
+          <a:p>
+            <a:pPr algn="ctr">
+              <a:spcAft>
+                <a:spcPts val="400"/>
+              </a:spcAft>
+            </a:pPr>
+            <a:r>
+              <a:rPr sz="1050" b="1" i="0">
+                <a:solidFill>
+                  <a:srgbClr val="1F3864"/>
+                </a:solidFill>
+                <a:latin typeface="Arial"/>
+              </a:rPr>
+              <a:t>3D flythrough</a:t>
+            </a:r>
+          </a:p>
+        </p:txBody>
+      </p:sp>
+      <p:sp>
+        <p:nvSpPr>
+          <p:cNvPr id="17448" name="TextBox 17447"/>
+          <p:cNvSpPr txBox="1"/>
+          <p:nvPr/>
+        </p:nvSpPr>
+        <p:spPr>
+          <a:xfrm>
+            <a:off x="10104120" y="4901183"/>
+            <a:ext cx="1764792" cy="237744"/>
+          </a:xfrm>
+          <a:prstGeom prst="rect">
+            <a:avLst/>
+          </a:prstGeom>
+          <a:noFill/>
+        </p:spPr>
+        <p:txBody>
+          <a:bodyPr wrap="square" anchor="t" lIns="36576" rIns="36576" tIns="18288" bIns="18288">
+            <a:spAutoFit/>
+          </a:bodyPr>
+          <a:lstStyle/>
+          <a:p>
+            <a:pPr algn="ctr">
+              <a:spcAft>
+                <a:spcPts val="400"/>
+              </a:spcAft>
+            </a:pPr>
+            <a:r>
+              <a:rPr sz="900" b="0" i="0">
+                <a:solidFill>
+                  <a:srgbClr val="555E6B"/>
+                </a:solidFill>
+                <a:latin typeface="Arial"/>
+              </a:rPr>
+              <a:t>Three.js, offline</a:t>
+            </a:r>
+          </a:p>
+        </p:txBody>
+      </p:sp>
+      <p:sp>
+        <p:nvSpPr>
+          <p:cNvPr id="17449" name="Rounded Rectangle 17448"/>
+          <p:cNvSpPr/>
+          <p:nvPr/>
+        </p:nvSpPr>
+        <p:spPr>
+          <a:xfrm>
+            <a:off x="320040" y="5212080"/>
+            <a:ext cx="822960" cy="292608"/>
           </a:xfrm>
           <a:prstGeom prst="roundRect">
             <a:avLst>
@@ -8569,7 +10485,7 @@
           <a:p>
             <a:pPr algn="ctr"/>
             <a:r>
-              <a:rPr sz="1050" b="1" i="0">
+              <a:rPr sz="1000" b="1" i="0">
                 <a:solidFill>
                   <a:srgbClr val="1F3864"/>
                 </a:solidFill>
@@ -8582,14 +10498,14 @@
       </p:sp>
       <p:sp>
         <p:nvSpPr>
-          <p:cNvPr id="17414" name="Rounded Rectangle 17413"/>
+          <p:cNvPr id="17450" name="Rounded Rectangle 17449"/>
           <p:cNvSpPr/>
           <p:nvPr/>
         </p:nvSpPr>
         <p:spPr>
           <a:xfrm>
-            <a:off x="1220070" y="1517904"/>
-            <a:ext cx="818388" cy="329184"/>
+            <a:off x="1281303" y="5212080"/>
+            <a:ext cx="822960" cy="292608"/>
           </a:xfrm>
           <a:prstGeom prst="roundRect">
             <a:avLst>
@@ -8626,7 +10542,7 @@
           <a:p>
             <a:pPr algn="ctr"/>
             <a:r>
-              <a:rPr sz="1050" b="1" i="0">
+              <a:rPr sz="1000" b="1" i="0">
                 <a:solidFill>
                   <a:srgbClr val="1F3864"/>
                 </a:solidFill>
@@ -8639,14 +10555,14 @@
       </p:sp>
       <p:sp>
         <p:nvSpPr>
-          <p:cNvPr id="17415" name="Rounded Rectangle 17414"/>
+          <p:cNvPr id="17451" name="Rounded Rectangle 17450"/>
           <p:cNvSpPr/>
           <p:nvPr/>
         </p:nvSpPr>
         <p:spPr>
           <a:xfrm>
-            <a:off x="2197825" y="1517904"/>
-            <a:ext cx="1595628" cy="329184"/>
+            <a:off x="2242566" y="5212080"/>
+            <a:ext cx="987552" cy="292608"/>
           </a:xfrm>
           <a:prstGeom prst="roundRect">
             <a:avLst>
@@ -8683,27 +10599,27 @@
           <a:p>
             <a:pPr algn="ctr"/>
             <a:r>
-              <a:rPr sz="1050" b="1" i="0">
+              <a:rPr sz="1000" b="1" i="0">
                 <a:solidFill>
                   <a:srgbClr val="1F3864"/>
                 </a:solidFill>
                 <a:latin typeface="Arial"/>
               </a:rPr>
-              <a:t>DINOv3-SAT (Meta)</a:t>
-            </a:r>
-          </a:p>
-        </p:txBody>
-      </p:sp>
-      <p:sp>
-        <p:nvSpPr>
-          <p:cNvPr id="17416" name="Rounded Rectangle 17415"/>
+              <a:t>DINOv3-SAT</a:t>
+            </a:r>
+          </a:p>
+        </p:txBody>
+      </p:sp>
+      <p:sp>
+        <p:nvSpPr>
+          <p:cNvPr id="17452" name="Rounded Rectangle 17451"/>
           <p:cNvSpPr/>
           <p:nvPr/>
         </p:nvSpPr>
         <p:spPr>
           <a:xfrm>
-            <a:off x="3952820" y="1517904"/>
-            <a:ext cx="1284732" cy="329184"/>
+            <a:off x="3368421" y="5212080"/>
+            <a:ext cx="1353312" cy="292608"/>
           </a:xfrm>
           <a:prstGeom prst="roundRect">
             <a:avLst>
@@ -8740,27 +10656,27 @@
           <a:p>
             <a:pPr algn="ctr"/>
             <a:r>
-              <a:rPr sz="1050" b="1" i="0">
+              <a:rPr sz="1000" b="1" i="0">
                 <a:solidFill>
                   <a:srgbClr val="1F3864"/>
                 </a:solidFill>
                 <a:latin typeface="Arial"/>
               </a:rPr>
-              <a:t>GAMUS dataset</a:t>
-            </a:r>
-          </a:p>
-        </p:txBody>
-      </p:sp>
-      <p:sp>
-        <p:nvSpPr>
-          <p:cNvPr id="17417" name="Rounded Rectangle 17416"/>
+              <a:t>HF Transformers</a:t>
+            </a:r>
+          </a:p>
+        </p:txBody>
+      </p:sp>
+      <p:sp>
+        <p:nvSpPr>
+          <p:cNvPr id="17453" name="Rounded Rectangle 17452"/>
           <p:cNvSpPr/>
           <p:nvPr/>
         </p:nvSpPr>
         <p:spPr>
           <a:xfrm>
-            <a:off x="5396919" y="1517904"/>
-            <a:ext cx="1595628" cy="329184"/>
+            <a:off x="4860036" y="5212080"/>
+            <a:ext cx="1353312" cy="292608"/>
           </a:xfrm>
           <a:prstGeom prst="roundRect">
             <a:avLst>
@@ -8797,27 +10713,27 @@
           <a:p>
             <a:pPr algn="ctr"/>
             <a:r>
-              <a:rPr sz="1050" b="1" i="0">
+              <a:rPr sz="1000" b="1" i="0">
                 <a:solidFill>
                   <a:srgbClr val="1F3864"/>
                 </a:solidFill>
                 <a:latin typeface="Arial"/>
               </a:rPr>
-              <a:t>Copernicus GLO-30</a:t>
-            </a:r>
-          </a:p>
-        </p:txBody>
-      </p:sp>
-      <p:sp>
-        <p:nvSpPr>
-          <p:cNvPr id="17418" name="Rounded Rectangle 17417"/>
+              <a:t>Rasterio · GDAL</a:t>
+            </a:r>
+          </a:p>
+        </p:txBody>
+      </p:sp>
+      <p:sp>
+        <p:nvSpPr>
+          <p:cNvPr id="17454" name="Rounded Rectangle 17453"/>
           <p:cNvSpPr/>
           <p:nvPr/>
         </p:nvSpPr>
         <p:spPr>
           <a:xfrm>
-            <a:off x="7151914" y="1517904"/>
-            <a:ext cx="1440180" cy="329184"/>
+            <a:off x="6351651" y="5212080"/>
+            <a:ext cx="1499616" cy="292608"/>
           </a:xfrm>
           <a:prstGeom prst="roundRect">
             <a:avLst>
@@ -8854,27 +10770,27 @@
           <a:p>
             <a:pPr algn="ctr"/>
             <a:r>
-              <a:rPr sz="1050" b="1" i="0">
+              <a:rPr sz="1000" b="1" i="0">
                 <a:solidFill>
                   <a:srgbClr val="1F3864"/>
                 </a:solidFill>
                 <a:latin typeface="Arial"/>
               </a:rPr>
-              <a:t>Rasterio · GDAL</a:t>
-            </a:r>
-          </a:p>
-        </p:txBody>
-      </p:sp>
-      <p:sp>
-        <p:nvSpPr>
-          <p:cNvPr id="17419" name="Rounded Rectangle 17418"/>
+              <a:t>Copernicus GLO-30</a:t>
+            </a:r>
+          </a:p>
+        </p:txBody>
+      </p:sp>
+      <p:sp>
+        <p:nvSpPr>
+          <p:cNvPr id="17455" name="Rounded Rectangle 17454"/>
           <p:cNvSpPr/>
           <p:nvPr/>
         </p:nvSpPr>
         <p:spPr>
           <a:xfrm>
-            <a:off x="8751461" y="1517904"/>
-            <a:ext cx="1517904" cy="329184"/>
+            <a:off x="7989570" y="5212080"/>
+            <a:ext cx="1426464" cy="292608"/>
           </a:xfrm>
           <a:prstGeom prst="roundRect">
             <a:avLst>
@@ -8911,7 +10827,7 @@
           <a:p>
             <a:pPr algn="ctr"/>
             <a:r>
-              <a:rPr sz="1050" b="1" i="0">
+              <a:rPr sz="1000" b="1" i="0">
                 <a:solidFill>
                   <a:srgbClr val="1F3864"/>
                 </a:solidFill>
@@ -8924,14 +10840,14 @@
       </p:sp>
       <p:sp>
         <p:nvSpPr>
-          <p:cNvPr id="17420" name="Rounded Rectangle 17419"/>
+          <p:cNvPr id="17456" name="Rounded Rectangle 17455"/>
           <p:cNvSpPr/>
           <p:nvPr/>
         </p:nvSpPr>
         <p:spPr>
           <a:xfrm>
-            <a:off x="10428732" y="1517904"/>
-            <a:ext cx="1440180" cy="329184"/>
+            <a:off x="9554337" y="5212080"/>
+            <a:ext cx="822960" cy="292608"/>
           </a:xfrm>
           <a:prstGeom prst="roundRect">
             <a:avLst>
@@ -8968,1312 +10884,31 @@
           <a:p>
             <a:pPr algn="ctr"/>
             <a:r>
-              <a:rPr sz="1050" b="1" i="0">
+              <a:rPr sz="1000" b="1" i="0">
                 <a:solidFill>
                   <a:srgbClr val="1F3864"/>
                 </a:solidFill>
                 <a:latin typeface="Arial"/>
               </a:rPr>
-              <a:t>USGS 3DEP LiDAR</a:t>
-            </a:r>
-          </a:p>
-        </p:txBody>
-      </p:sp>
-      <p:sp>
-        <p:nvSpPr>
-          <p:cNvPr id="17421" name="Rectangle 17420"/>
+              <a:t>GAMUS</a:t>
+            </a:r>
+          </a:p>
+        </p:txBody>
+      </p:sp>
+      <p:sp>
+        <p:nvSpPr>
+          <p:cNvPr id="17457" name="Rounded Rectangle 17456"/>
           <p:cNvSpPr/>
           <p:nvPr/>
         </p:nvSpPr>
         <p:spPr>
           <a:xfrm>
-            <a:off x="320040" y="2039112"/>
-            <a:ext cx="73152" cy="274320"/>
-          </a:xfrm>
-          <a:prstGeom prst="rect">
-            <a:avLst/>
-          </a:prstGeom>
-          <a:solidFill>
-            <a:srgbClr val="0070C0"/>
-          </a:solidFill>
-          <a:ln>
-            <a:noFill/>
-          </a:ln>
-          <a:effectLst/>
-        </p:spPr>
-        <p:style>
-          <a:lnRef idx="1">
-            <a:schemeClr val="accent1"/>
-          </a:lnRef>
-          <a:fillRef idx="3">
-            <a:schemeClr val="accent1"/>
-          </a:fillRef>
-          <a:effectRef idx="2">
-            <a:schemeClr val="accent1"/>
-          </a:effectRef>
-          <a:fontRef idx="minor">
-            <a:schemeClr val="lt1"/>
-          </a:fontRef>
-        </p:style>
-        <p:txBody>
-          <a:bodyPr rtlCol="0" anchor="ctr" lIns="54864" rIns="54864"/>
-          <a:lstStyle/>
-          <a:p>
-            <a:pPr algn="ctr"/>
-          </a:p>
-        </p:txBody>
-      </p:sp>
-      <p:sp>
-        <p:nvSpPr>
-          <p:cNvPr id="17422" name="TextBox 17421"/>
-          <p:cNvSpPr txBox="1"/>
-          <p:nvPr/>
-        </p:nvSpPr>
-        <p:spPr>
-          <a:xfrm>
-            <a:off x="448056" y="1993392"/>
-            <a:ext cx="10972800" cy="365760"/>
-          </a:xfrm>
-          <a:prstGeom prst="rect">
-            <a:avLst/>
-          </a:prstGeom>
-          <a:noFill/>
-        </p:spPr>
-        <p:txBody>
-          <a:bodyPr wrap="square" anchor="t" lIns="36576" rIns="36576" tIns="18288" bIns="18288">
-            <a:spAutoFit/>
-          </a:bodyPr>
-          <a:lstStyle/>
-          <a:p>
-            <a:pPr algn="l">
-              <a:spcAft>
-                <a:spcPts val="400"/>
-              </a:spcAft>
-            </a:pPr>
-            <a:r>
-              <a:rPr sz="1450" b="1" i="0">
-                <a:solidFill>
-                  <a:srgbClr val="0070C0"/>
-                </a:solidFill>
-                <a:latin typeface="Arial"/>
-              </a:rPr>
-              <a:t>METHODOLOGY: ONE IMAGE TO 3D (real outputs of our pipeline)</a:t>
-            </a:r>
-          </a:p>
-        </p:txBody>
-      </p:sp>
-      <p:pic>
-        <p:nvPicPr>
-          <p:cNvPr id="17423" name="Picture 17422" descr="india_rgb.jpg"/>
-          <p:cNvPicPr>
-            <a:picLocks noChangeAspect="1"/>
-          </p:cNvPicPr>
-          <p:nvPr/>
-        </p:nvPicPr>
-        <p:blipFill>
-          <a:blip r:embed="rId5"/>
-          <a:srcRect t="5440" b="5440"/>
-          <a:stretch>
-            <a:fillRect/>
-          </a:stretch>
-        </p:blipFill>
-        <p:spPr>
-          <a:xfrm>
-            <a:off x="320040" y="2377440"/>
-            <a:ext cx="1764792" cy="1572768"/>
-          </a:xfrm>
-          <a:prstGeom prst="rect">
-            <a:avLst/>
-          </a:prstGeom>
-          <a:ln w="9525">
-            <a:solidFill>
-              <a:srgbClr val="C9D6E8"/>
-            </a:solidFill>
-          </a:ln>
-        </p:spPr>
-      </p:pic>
-      <p:sp>
-        <p:nvSpPr>
-          <p:cNvPr id="17424" name="Oval 17423"/>
-          <p:cNvSpPr/>
-          <p:nvPr/>
-        </p:nvSpPr>
-        <p:spPr>
-          <a:xfrm>
-            <a:off x="384048" y="2441448"/>
-            <a:ext cx="329184" cy="329184"/>
-          </a:xfrm>
-          <a:prstGeom prst="ellipse">
-            <a:avLst/>
-          </a:prstGeom>
-          <a:solidFill>
-            <a:srgbClr val="1F3864"/>
-          </a:solidFill>
-          <a:ln w="15875">
-            <a:solidFill>
-              <a:srgbClr val="FFFFFF"/>
-            </a:solidFill>
-          </a:ln>
-          <a:effectLst/>
-        </p:spPr>
-        <p:style>
-          <a:lnRef idx="1">
-            <a:schemeClr val="accent1"/>
-          </a:lnRef>
-          <a:fillRef idx="3">
-            <a:schemeClr val="accent1"/>
-          </a:fillRef>
-          <a:effectRef idx="2">
-            <a:schemeClr val="accent1"/>
-          </a:effectRef>
-          <a:fontRef idx="minor">
-            <a:schemeClr val="lt1"/>
-          </a:fontRef>
-        </p:style>
-        <p:txBody>
-          <a:bodyPr rtlCol="0" anchor="ctr" lIns="54864" rIns="54864" wrap="square"/>
-          <a:lstStyle/>
-          <a:p>
-            <a:pPr algn="ctr"/>
-            <a:r>
-              <a:rPr sz="1100" b="1" i="0">
-                <a:solidFill>
-                  <a:srgbClr val="FFFFFF"/>
-                </a:solidFill>
-                <a:latin typeface="Arial"/>
-              </a:rPr>
-              <a:t>1</a:t>
-            </a:r>
-          </a:p>
-        </p:txBody>
-      </p:sp>
-      <p:sp>
-        <p:nvSpPr>
-          <p:cNvPr id="17425" name="TextBox 17424"/>
-          <p:cNvSpPr txBox="1"/>
-          <p:nvPr/>
-        </p:nvSpPr>
-        <p:spPr>
-          <a:xfrm>
-            <a:off x="320040" y="3986784"/>
-            <a:ext cx="1764792" cy="274320"/>
-          </a:xfrm>
-          <a:prstGeom prst="rect">
-            <a:avLst/>
-          </a:prstGeom>
-          <a:noFill/>
-        </p:spPr>
-        <p:txBody>
-          <a:bodyPr wrap="square" anchor="t" lIns="36576" rIns="36576" tIns="18288" bIns="18288">
-            <a:spAutoFit/>
-          </a:bodyPr>
-          <a:lstStyle/>
-          <a:p>
-            <a:pPr algn="ctr">
-              <a:spcAft>
-                <a:spcPts val="400"/>
-              </a:spcAft>
-            </a:pPr>
-            <a:r>
-              <a:rPr sz="1100" b="1" i="0">
-                <a:solidFill>
-                  <a:srgbClr val="1F3864"/>
-                </a:solidFill>
-                <a:latin typeface="Arial"/>
-              </a:rPr>
-              <a:t>Input image</a:t>
-            </a:r>
-          </a:p>
-        </p:txBody>
-      </p:sp>
-      <p:sp>
-        <p:nvSpPr>
-          <p:cNvPr id="17426" name="TextBox 17425"/>
-          <p:cNvSpPr txBox="1"/>
-          <p:nvPr/>
-        </p:nvSpPr>
-        <p:spPr>
-          <a:xfrm>
-            <a:off x="320040" y="4224528"/>
-            <a:ext cx="1764792" cy="274320"/>
-          </a:xfrm>
-          <a:prstGeom prst="rect">
-            <a:avLst/>
-          </a:prstGeom>
-          <a:noFill/>
-        </p:spPr>
-        <p:txBody>
-          <a:bodyPr wrap="square" anchor="t" lIns="36576" rIns="36576" tIns="18288" bIns="18288">
-            <a:spAutoFit/>
-          </a:bodyPr>
-          <a:lstStyle/>
-          <a:p>
-            <a:pPr algn="ctr">
-              <a:spcAft>
-                <a:spcPts val="400"/>
-              </a:spcAft>
-            </a:pPr>
-            <a:r>
-              <a:rPr sz="950" b="0" i="0">
-                <a:solidFill>
-                  <a:srgbClr val="555E6B"/>
-                </a:solidFill>
-                <a:latin typeface="Arial"/>
-              </a:rPr>
-              <a:t>WorldView-2, 0.31 m</a:t>
-            </a:r>
-          </a:p>
-        </p:txBody>
-      </p:sp>
-      <p:sp>
-        <p:nvSpPr>
-          <p:cNvPr id="17427" name="Isosceles Triangle 17426"/>
-          <p:cNvSpPr/>
-          <p:nvPr/>
-        </p:nvSpPr>
-        <p:spPr>
-          <a:xfrm rot="5400000">
-            <a:off x="2107691" y="3044952"/>
-            <a:ext cx="146304" cy="237744"/>
-          </a:xfrm>
-          <a:prstGeom prst="triangle">
-            <a:avLst/>
-          </a:prstGeom>
-          <a:solidFill>
-            <a:srgbClr val="0070C0"/>
-          </a:solidFill>
-          <a:ln>
-            <a:noFill/>
-          </a:ln>
-          <a:effectLst/>
-        </p:spPr>
-        <p:style>
-          <a:lnRef idx="1">
-            <a:schemeClr val="accent1"/>
-          </a:lnRef>
-          <a:fillRef idx="3">
-            <a:schemeClr val="accent1"/>
-          </a:fillRef>
-          <a:effectRef idx="2">
-            <a:schemeClr val="accent1"/>
-          </a:effectRef>
-          <a:fontRef idx="minor">
-            <a:schemeClr val="lt1"/>
-          </a:fontRef>
-        </p:style>
-        <p:txBody>
-          <a:bodyPr rtlCol="0" anchor="ctr" lIns="54864" rIns="54864"/>
-          <a:lstStyle/>
-          <a:p>
-            <a:pPr algn="ctr"/>
-          </a:p>
-        </p:txBody>
-      </p:sp>
-      <p:pic>
-        <p:nvPicPr>
-          <p:cNvPr id="17428" name="Picture 17427" descr="india_tiles.jpg"/>
-          <p:cNvPicPr>
-            <a:picLocks noChangeAspect="1"/>
-          </p:cNvPicPr>
-          <p:nvPr/>
-        </p:nvPicPr>
-        <p:blipFill>
-          <a:blip r:embed="rId6"/>
-          <a:srcRect t="5440" b="5440"/>
-          <a:stretch>
-            <a:fillRect/>
-          </a:stretch>
-        </p:blipFill>
-        <p:spPr>
-          <a:xfrm>
-            <a:off x="2276856" y="2377440"/>
-            <a:ext cx="1764792" cy="1572768"/>
-          </a:xfrm>
-          <a:prstGeom prst="rect">
-            <a:avLst/>
-          </a:prstGeom>
-          <a:ln w="9525">
-            <a:solidFill>
-              <a:srgbClr val="C9D6E8"/>
-            </a:solidFill>
-          </a:ln>
-        </p:spPr>
-      </p:pic>
-      <p:sp>
-        <p:nvSpPr>
-          <p:cNvPr id="17429" name="Oval 17428"/>
-          <p:cNvSpPr/>
-          <p:nvPr/>
-        </p:nvSpPr>
-        <p:spPr>
-          <a:xfrm>
-            <a:off x="2340864" y="2441448"/>
-            <a:ext cx="329184" cy="329184"/>
-          </a:xfrm>
-          <a:prstGeom prst="ellipse">
-            <a:avLst/>
-          </a:prstGeom>
-          <a:solidFill>
-            <a:srgbClr val="1F3864"/>
-          </a:solidFill>
-          <a:ln w="15875">
-            <a:solidFill>
-              <a:srgbClr val="FFFFFF"/>
-            </a:solidFill>
-          </a:ln>
-          <a:effectLst/>
-        </p:spPr>
-        <p:style>
-          <a:lnRef idx="1">
-            <a:schemeClr val="accent1"/>
-          </a:lnRef>
-          <a:fillRef idx="3">
-            <a:schemeClr val="accent1"/>
-          </a:fillRef>
-          <a:effectRef idx="2">
-            <a:schemeClr val="accent1"/>
-          </a:effectRef>
-          <a:fontRef idx="minor">
-            <a:schemeClr val="lt1"/>
-          </a:fontRef>
-        </p:style>
-        <p:txBody>
-          <a:bodyPr rtlCol="0" anchor="ctr" lIns="54864" rIns="54864" wrap="square"/>
-          <a:lstStyle/>
-          <a:p>
-            <a:pPr algn="ctr"/>
-            <a:r>
-              <a:rPr sz="1100" b="1" i="0">
-                <a:solidFill>
-                  <a:srgbClr val="FFFFFF"/>
-                </a:solidFill>
-                <a:latin typeface="Arial"/>
-              </a:rPr>
-              <a:t>2</a:t>
-            </a:r>
-          </a:p>
-        </p:txBody>
-      </p:sp>
-      <p:sp>
-        <p:nvSpPr>
-          <p:cNvPr id="17430" name="TextBox 17429"/>
-          <p:cNvSpPr txBox="1"/>
-          <p:nvPr/>
-        </p:nvSpPr>
-        <p:spPr>
-          <a:xfrm>
-            <a:off x="2276856" y="3986784"/>
-            <a:ext cx="1764792" cy="274320"/>
-          </a:xfrm>
-          <a:prstGeom prst="rect">
-            <a:avLst/>
-          </a:prstGeom>
-          <a:noFill/>
-        </p:spPr>
-        <p:txBody>
-          <a:bodyPr wrap="square" anchor="t" lIns="36576" rIns="36576" tIns="18288" bIns="18288">
-            <a:spAutoFit/>
-          </a:bodyPr>
-          <a:lstStyle/>
-          <a:p>
-            <a:pPr algn="ctr">
-              <a:spcAft>
-                <a:spcPts val="400"/>
-              </a:spcAft>
-            </a:pPr>
-            <a:r>
-              <a:rPr sz="1100" b="1" i="0">
-                <a:solidFill>
-                  <a:srgbClr val="1F3864"/>
-                </a:solidFill>
-                <a:latin typeface="Arial"/>
-              </a:rPr>
-              <a:t>Split into tiles</a:t>
-            </a:r>
-          </a:p>
-        </p:txBody>
-      </p:sp>
-      <p:sp>
-        <p:nvSpPr>
-          <p:cNvPr id="17431" name="TextBox 17430"/>
-          <p:cNvSpPr txBox="1"/>
-          <p:nvPr/>
-        </p:nvSpPr>
-        <p:spPr>
-          <a:xfrm>
-            <a:off x="2276856" y="4224528"/>
-            <a:ext cx="1764792" cy="274320"/>
-          </a:xfrm>
-          <a:prstGeom prst="rect">
-            <a:avLst/>
-          </a:prstGeom>
-          <a:noFill/>
-        </p:spPr>
-        <p:txBody>
-          <a:bodyPr wrap="square" anchor="t" lIns="36576" rIns="36576" tIns="18288" bIns="18288">
-            <a:spAutoFit/>
-          </a:bodyPr>
-          <a:lstStyle/>
-          <a:p>
-            <a:pPr algn="ctr">
-              <a:spcAft>
-                <a:spcPts val="400"/>
-              </a:spcAft>
-            </a:pPr>
-            <a:r>
-              <a:rPr sz="950" b="0" i="0">
-                <a:solidFill>
-                  <a:srgbClr val="555E6B"/>
-                </a:solidFill>
-                <a:latin typeface="Arial"/>
-              </a:rPr>
-              <a:t>608 px, 25% overlap</a:t>
-            </a:r>
-          </a:p>
-        </p:txBody>
-      </p:sp>
-      <p:sp>
-        <p:nvSpPr>
-          <p:cNvPr id="17432" name="Isosceles Triangle 17431"/>
-          <p:cNvSpPr/>
-          <p:nvPr/>
-        </p:nvSpPr>
-        <p:spPr>
-          <a:xfrm rot="5400000">
-            <a:off x="4064508" y="3044952"/>
-            <a:ext cx="146304" cy="237744"/>
-          </a:xfrm>
-          <a:prstGeom prst="triangle">
-            <a:avLst/>
-          </a:prstGeom>
-          <a:solidFill>
-            <a:srgbClr val="0070C0"/>
-          </a:solidFill>
-          <a:ln>
-            <a:noFill/>
-          </a:ln>
-          <a:effectLst/>
-        </p:spPr>
-        <p:style>
-          <a:lnRef idx="1">
-            <a:schemeClr val="accent1"/>
-          </a:lnRef>
-          <a:fillRef idx="3">
-            <a:schemeClr val="accent1"/>
-          </a:fillRef>
-          <a:effectRef idx="2">
-            <a:schemeClr val="accent1"/>
-          </a:effectRef>
-          <a:fontRef idx="minor">
-            <a:schemeClr val="lt1"/>
-          </a:fontRef>
-        </p:style>
-        <p:txBody>
-          <a:bodyPr rtlCol="0" anchor="ctr" lIns="54864" rIns="54864"/>
-          <a:lstStyle/>
-          <a:p>
-            <a:pPr algn="ctr"/>
-          </a:p>
-        </p:txBody>
-      </p:sp>
-      <p:pic>
-        <p:nvPicPr>
-          <p:cNvPr id="17433" name="Picture 17432" descr="india_features.jpg"/>
-          <p:cNvPicPr>
-            <a:picLocks noChangeAspect="1"/>
-          </p:cNvPicPr>
-          <p:nvPr/>
-        </p:nvPicPr>
-        <p:blipFill>
-          <a:blip r:embed="rId7"/>
-          <a:srcRect t="5440" b="5440"/>
-          <a:stretch>
-            <a:fillRect/>
-          </a:stretch>
-        </p:blipFill>
-        <p:spPr>
-          <a:xfrm>
-            <a:off x="4233672" y="2377440"/>
-            <a:ext cx="1764792" cy="1572768"/>
-          </a:xfrm>
-          <a:prstGeom prst="rect">
-            <a:avLst/>
-          </a:prstGeom>
-          <a:ln w="9525">
-            <a:solidFill>
-              <a:srgbClr val="C9D6E8"/>
-            </a:solidFill>
-          </a:ln>
-        </p:spPr>
-      </p:pic>
-      <p:sp>
-        <p:nvSpPr>
-          <p:cNvPr id="17434" name="Oval 17433"/>
-          <p:cNvSpPr/>
-          <p:nvPr/>
-        </p:nvSpPr>
-        <p:spPr>
-          <a:xfrm>
-            <a:off x="4297680" y="2441448"/>
-            <a:ext cx="329184" cy="329184"/>
-          </a:xfrm>
-          <a:prstGeom prst="ellipse">
-            <a:avLst/>
-          </a:prstGeom>
-          <a:solidFill>
-            <a:srgbClr val="1F3864"/>
-          </a:solidFill>
-          <a:ln w="15875">
-            <a:solidFill>
-              <a:srgbClr val="FFFFFF"/>
-            </a:solidFill>
-          </a:ln>
-          <a:effectLst/>
-        </p:spPr>
-        <p:style>
-          <a:lnRef idx="1">
-            <a:schemeClr val="accent1"/>
-          </a:lnRef>
-          <a:fillRef idx="3">
-            <a:schemeClr val="accent1"/>
-          </a:fillRef>
-          <a:effectRef idx="2">
-            <a:schemeClr val="accent1"/>
-          </a:effectRef>
-          <a:fontRef idx="minor">
-            <a:schemeClr val="lt1"/>
-          </a:fontRef>
-        </p:style>
-        <p:txBody>
-          <a:bodyPr rtlCol="0" anchor="ctr" lIns="54864" rIns="54864" wrap="square"/>
-          <a:lstStyle/>
-          <a:p>
-            <a:pPr algn="ctr"/>
-            <a:r>
-              <a:rPr sz="1100" b="1" i="0">
-                <a:solidFill>
-                  <a:srgbClr val="FFFFFF"/>
-                </a:solidFill>
-                <a:latin typeface="Arial"/>
-              </a:rPr>
-              <a:t>3</a:t>
-            </a:r>
-          </a:p>
-        </p:txBody>
-      </p:sp>
-      <p:sp>
-        <p:nvSpPr>
-          <p:cNvPr id="17435" name="TextBox 17434"/>
-          <p:cNvSpPr txBox="1"/>
-          <p:nvPr/>
-        </p:nvSpPr>
-        <p:spPr>
-          <a:xfrm>
-            <a:off x="4233672" y="3986784"/>
-            <a:ext cx="1764792" cy="274320"/>
-          </a:xfrm>
-          <a:prstGeom prst="rect">
-            <a:avLst/>
-          </a:prstGeom>
-          <a:noFill/>
-        </p:spPr>
-        <p:txBody>
-          <a:bodyPr wrap="square" anchor="t" lIns="36576" rIns="36576" tIns="18288" bIns="18288">
-            <a:spAutoFit/>
-          </a:bodyPr>
-          <a:lstStyle/>
-          <a:p>
-            <a:pPr algn="ctr">
-              <a:spcAft>
-                <a:spcPts val="400"/>
-              </a:spcAft>
-            </a:pPr>
-            <a:r>
-              <a:rPr sz="1100" b="1" i="0">
-                <a:solidFill>
-                  <a:srgbClr val="1F3864"/>
-                </a:solidFill>
-                <a:latin typeface="Arial"/>
-              </a:rPr>
-              <a:t>What the AI sees</a:t>
-            </a:r>
-          </a:p>
-        </p:txBody>
-      </p:sp>
-      <p:sp>
-        <p:nvSpPr>
-          <p:cNvPr id="17436" name="TextBox 17435"/>
-          <p:cNvSpPr txBox="1"/>
-          <p:nvPr/>
-        </p:nvSpPr>
-        <p:spPr>
-          <a:xfrm>
-            <a:off x="4233672" y="4224528"/>
-            <a:ext cx="1764792" cy="274320"/>
-          </a:xfrm>
-          <a:prstGeom prst="rect">
-            <a:avLst/>
-          </a:prstGeom>
-          <a:noFill/>
-        </p:spPr>
-        <p:txBody>
-          <a:bodyPr wrap="square" anchor="t" lIns="36576" rIns="36576" tIns="18288" bIns="18288">
-            <a:spAutoFit/>
-          </a:bodyPr>
-          <a:lstStyle/>
-          <a:p>
-            <a:pPr algn="ctr">
-              <a:spcAft>
-                <a:spcPts val="400"/>
-              </a:spcAft>
-            </a:pPr>
-            <a:r>
-              <a:rPr sz="950" b="0" i="0">
-                <a:solidFill>
-                  <a:srgbClr val="555E6B"/>
-                </a:solidFill>
-                <a:latin typeface="Arial"/>
-              </a:rPr>
-              <a:t>DINOv3-SAT features</a:t>
-            </a:r>
-          </a:p>
-        </p:txBody>
-      </p:sp>
-      <p:sp>
-        <p:nvSpPr>
-          <p:cNvPr id="17437" name="Isosceles Triangle 17436"/>
-          <p:cNvSpPr/>
-          <p:nvPr/>
-        </p:nvSpPr>
-        <p:spPr>
-          <a:xfrm rot="5400000">
-            <a:off x="6021324" y="3044952"/>
-            <a:ext cx="146304" cy="237744"/>
-          </a:xfrm>
-          <a:prstGeom prst="triangle">
-            <a:avLst/>
-          </a:prstGeom>
-          <a:solidFill>
-            <a:srgbClr val="0070C0"/>
-          </a:solidFill>
-          <a:ln>
-            <a:noFill/>
-          </a:ln>
-          <a:effectLst/>
-        </p:spPr>
-        <p:style>
-          <a:lnRef idx="1">
-            <a:schemeClr val="accent1"/>
-          </a:lnRef>
-          <a:fillRef idx="3">
-            <a:schemeClr val="accent1"/>
-          </a:fillRef>
-          <a:effectRef idx="2">
-            <a:schemeClr val="accent1"/>
-          </a:effectRef>
-          <a:fontRef idx="minor">
-            <a:schemeClr val="lt1"/>
-          </a:fontRef>
-        </p:style>
-        <p:txBody>
-          <a:bodyPr rtlCol="0" anchor="ctr" lIns="54864" rIns="54864"/>
-          <a:lstStyle/>
-          <a:p>
-            <a:pPr algn="ctr"/>
-          </a:p>
-        </p:txBody>
-      </p:sp>
-      <p:pic>
-        <p:nvPicPr>
-          <p:cNvPr id="17438" name="Picture 17437" descr="india_ndsm.jpg"/>
-          <p:cNvPicPr>
-            <a:picLocks noChangeAspect="1"/>
-          </p:cNvPicPr>
-          <p:nvPr/>
-        </p:nvPicPr>
-        <p:blipFill>
-          <a:blip r:embed="rId8"/>
-          <a:srcRect t="5440" b="5440"/>
-          <a:stretch>
-            <a:fillRect/>
-          </a:stretch>
-        </p:blipFill>
-        <p:spPr>
-          <a:xfrm>
-            <a:off x="6190488" y="2377440"/>
-            <a:ext cx="1764792" cy="1572768"/>
-          </a:xfrm>
-          <a:prstGeom prst="rect">
-            <a:avLst/>
-          </a:prstGeom>
-          <a:ln w="9525">
-            <a:solidFill>
-              <a:srgbClr val="C9D6E8"/>
-            </a:solidFill>
-          </a:ln>
-        </p:spPr>
-      </p:pic>
-      <p:sp>
-        <p:nvSpPr>
-          <p:cNvPr id="17439" name="Oval 17438"/>
-          <p:cNvSpPr/>
-          <p:nvPr/>
-        </p:nvSpPr>
-        <p:spPr>
-          <a:xfrm>
-            <a:off x="6254496" y="2441448"/>
-            <a:ext cx="329184" cy="329184"/>
-          </a:xfrm>
-          <a:prstGeom prst="ellipse">
-            <a:avLst/>
-          </a:prstGeom>
-          <a:solidFill>
-            <a:srgbClr val="1F3864"/>
-          </a:solidFill>
-          <a:ln w="15875">
-            <a:solidFill>
-              <a:srgbClr val="FFFFFF"/>
-            </a:solidFill>
-          </a:ln>
-          <a:effectLst/>
-        </p:spPr>
-        <p:style>
-          <a:lnRef idx="1">
-            <a:schemeClr val="accent1"/>
-          </a:lnRef>
-          <a:fillRef idx="3">
-            <a:schemeClr val="accent1"/>
-          </a:fillRef>
-          <a:effectRef idx="2">
-            <a:schemeClr val="accent1"/>
-          </a:effectRef>
-          <a:fontRef idx="minor">
-            <a:schemeClr val="lt1"/>
-          </a:fontRef>
-        </p:style>
-        <p:txBody>
-          <a:bodyPr rtlCol="0" anchor="ctr" lIns="54864" rIns="54864" wrap="square"/>
-          <a:lstStyle/>
-          <a:p>
-            <a:pPr algn="ctr"/>
-            <a:r>
-              <a:rPr sz="1100" b="1" i="0">
-                <a:solidFill>
-                  <a:srgbClr val="FFFFFF"/>
-                </a:solidFill>
-                <a:latin typeface="Arial"/>
-              </a:rPr>
-              <a:t>4</a:t>
-            </a:r>
-          </a:p>
-        </p:txBody>
-      </p:sp>
-      <p:sp>
-        <p:nvSpPr>
-          <p:cNvPr id="17440" name="TextBox 17439"/>
-          <p:cNvSpPr txBox="1"/>
-          <p:nvPr/>
-        </p:nvSpPr>
-        <p:spPr>
-          <a:xfrm>
-            <a:off x="6190488" y="3986784"/>
-            <a:ext cx="1764792" cy="274320"/>
-          </a:xfrm>
-          <a:prstGeom prst="rect">
-            <a:avLst/>
-          </a:prstGeom>
-          <a:noFill/>
-        </p:spPr>
-        <p:txBody>
-          <a:bodyPr wrap="square" anchor="t" lIns="36576" rIns="36576" tIns="18288" bIns="18288">
-            <a:spAutoFit/>
-          </a:bodyPr>
-          <a:lstStyle/>
-          <a:p>
-            <a:pPr algn="ctr">
-              <a:spcAft>
-                <a:spcPts val="400"/>
-              </a:spcAft>
-            </a:pPr>
-            <a:r>
-              <a:rPr sz="1100" b="1" i="0">
-                <a:solidFill>
-                  <a:srgbClr val="1F3864"/>
-                </a:solidFill>
-                <a:latin typeface="Arial"/>
-              </a:rPr>
-              <a:t>Height above ground</a:t>
-            </a:r>
-          </a:p>
-        </p:txBody>
-      </p:sp>
-      <p:sp>
-        <p:nvSpPr>
-          <p:cNvPr id="17441" name="TextBox 17440"/>
-          <p:cNvSpPr txBox="1"/>
-          <p:nvPr/>
-        </p:nvSpPr>
-        <p:spPr>
-          <a:xfrm>
-            <a:off x="6190488" y="4224528"/>
-            <a:ext cx="1764792" cy="274320"/>
-          </a:xfrm>
-          <a:prstGeom prst="rect">
-            <a:avLst/>
-          </a:prstGeom>
-          <a:noFill/>
-        </p:spPr>
-        <p:txBody>
-          <a:bodyPr wrap="square" anchor="t" lIns="36576" rIns="36576" tIns="18288" bIns="18288">
-            <a:spAutoFit/>
-          </a:bodyPr>
-          <a:lstStyle/>
-          <a:p>
-            <a:pPr algn="ctr">
-              <a:spcAft>
-                <a:spcPts val="400"/>
-              </a:spcAft>
-            </a:pPr>
-            <a:r>
-              <a:rPr sz="950" b="0" i="0">
-                <a:solidFill>
-                  <a:srgbClr val="555E6B"/>
-                </a:solidFill>
-                <a:latin typeface="Arial"/>
-              </a:rPr>
-              <a:t>our trained head, metres</a:t>
-            </a:r>
-          </a:p>
-        </p:txBody>
-      </p:sp>
-      <p:sp>
-        <p:nvSpPr>
-          <p:cNvPr id="17442" name="Isosceles Triangle 17441"/>
-          <p:cNvSpPr/>
-          <p:nvPr/>
-        </p:nvSpPr>
-        <p:spPr>
-          <a:xfrm rot="5400000">
-            <a:off x="7978140" y="3044952"/>
-            <a:ext cx="146304" cy="237744"/>
-          </a:xfrm>
-          <a:prstGeom prst="triangle">
-            <a:avLst/>
-          </a:prstGeom>
-          <a:solidFill>
-            <a:srgbClr val="0070C0"/>
-          </a:solidFill>
-          <a:ln>
-            <a:noFill/>
-          </a:ln>
-          <a:effectLst/>
-        </p:spPr>
-        <p:style>
-          <a:lnRef idx="1">
-            <a:schemeClr val="accent1"/>
-          </a:lnRef>
-          <a:fillRef idx="3">
-            <a:schemeClr val="accent1"/>
-          </a:fillRef>
-          <a:effectRef idx="2">
-            <a:schemeClr val="accent1"/>
-          </a:effectRef>
-          <a:fontRef idx="minor">
-            <a:schemeClr val="lt1"/>
-          </a:fontRef>
-        </p:style>
-        <p:txBody>
-          <a:bodyPr rtlCol="0" anchor="ctr" lIns="54864" rIns="54864"/>
-          <a:lstStyle/>
-          <a:p>
-            <a:pPr algn="ctr"/>
-          </a:p>
-        </p:txBody>
-      </p:sp>
-      <p:pic>
-        <p:nvPicPr>
-          <p:cNvPr id="17443" name="Picture 17442" descr="india_dsm.jpg"/>
-          <p:cNvPicPr>
-            <a:picLocks noChangeAspect="1"/>
-          </p:cNvPicPr>
-          <p:nvPr/>
-        </p:nvPicPr>
-        <p:blipFill>
-          <a:blip r:embed="rId9"/>
-          <a:srcRect t="5440" b="5440"/>
-          <a:stretch>
-            <a:fillRect/>
-          </a:stretch>
-        </p:blipFill>
-        <p:spPr>
-          <a:xfrm>
-            <a:off x="8147304" y="2377440"/>
-            <a:ext cx="1764792" cy="1572768"/>
-          </a:xfrm>
-          <a:prstGeom prst="rect">
-            <a:avLst/>
-          </a:prstGeom>
-          <a:ln w="9525">
-            <a:solidFill>
-              <a:srgbClr val="C9D6E8"/>
-            </a:solidFill>
-          </a:ln>
-        </p:spPr>
-      </p:pic>
-      <p:sp>
-        <p:nvSpPr>
-          <p:cNvPr id="17444" name="Oval 17443"/>
-          <p:cNvSpPr/>
-          <p:nvPr/>
-        </p:nvSpPr>
-        <p:spPr>
-          <a:xfrm>
-            <a:off x="8211312" y="2441448"/>
-            <a:ext cx="329184" cy="329184"/>
-          </a:xfrm>
-          <a:prstGeom prst="ellipse">
-            <a:avLst/>
-          </a:prstGeom>
-          <a:solidFill>
-            <a:srgbClr val="1F3864"/>
-          </a:solidFill>
-          <a:ln w="15875">
-            <a:solidFill>
-              <a:srgbClr val="FFFFFF"/>
-            </a:solidFill>
-          </a:ln>
-          <a:effectLst/>
-        </p:spPr>
-        <p:style>
-          <a:lnRef idx="1">
-            <a:schemeClr val="accent1"/>
-          </a:lnRef>
-          <a:fillRef idx="3">
-            <a:schemeClr val="accent1"/>
-          </a:fillRef>
-          <a:effectRef idx="2">
-            <a:schemeClr val="accent1"/>
-          </a:effectRef>
-          <a:fontRef idx="minor">
-            <a:schemeClr val="lt1"/>
-          </a:fontRef>
-        </p:style>
-        <p:txBody>
-          <a:bodyPr rtlCol="0" anchor="ctr" lIns="54864" rIns="54864" wrap="square"/>
-          <a:lstStyle/>
-          <a:p>
-            <a:pPr algn="ctr"/>
-            <a:r>
-              <a:rPr sz="1100" b="1" i="0">
-                <a:solidFill>
-                  <a:srgbClr val="FFFFFF"/>
-                </a:solidFill>
-                <a:latin typeface="Arial"/>
-              </a:rPr>
-              <a:t>5</a:t>
-            </a:r>
-          </a:p>
-        </p:txBody>
-      </p:sp>
-      <p:sp>
-        <p:nvSpPr>
-          <p:cNvPr id="17445" name="TextBox 17444"/>
-          <p:cNvSpPr txBox="1"/>
-          <p:nvPr/>
-        </p:nvSpPr>
-        <p:spPr>
-          <a:xfrm>
-            <a:off x="8147304" y="3986784"/>
-            <a:ext cx="1764792" cy="274320"/>
-          </a:xfrm>
-          <a:prstGeom prst="rect">
-            <a:avLst/>
-          </a:prstGeom>
-          <a:noFill/>
-        </p:spPr>
-        <p:txBody>
-          <a:bodyPr wrap="square" anchor="t" lIns="36576" rIns="36576" tIns="18288" bIns="18288">
-            <a:spAutoFit/>
-          </a:bodyPr>
-          <a:lstStyle/>
-          <a:p>
-            <a:pPr algn="ctr">
-              <a:spcAft>
-                <a:spcPts val="400"/>
-              </a:spcAft>
-            </a:pPr>
-            <a:r>
-              <a:rPr sz="1100" b="1" i="0">
-                <a:solidFill>
-                  <a:srgbClr val="1F3864"/>
-                </a:solidFill>
-                <a:latin typeface="Arial"/>
-              </a:rPr>
-              <a:t>+ terrain = DSM</a:t>
-            </a:r>
-          </a:p>
-        </p:txBody>
-      </p:sp>
-      <p:sp>
-        <p:nvSpPr>
-          <p:cNvPr id="17446" name="TextBox 17445"/>
-          <p:cNvSpPr txBox="1"/>
-          <p:nvPr/>
-        </p:nvSpPr>
-        <p:spPr>
-          <a:xfrm>
-            <a:off x="8147304" y="4224528"/>
-            <a:ext cx="1764792" cy="274320"/>
-          </a:xfrm>
-          <a:prstGeom prst="rect">
-            <a:avLst/>
-          </a:prstGeom>
-          <a:noFill/>
-        </p:spPr>
-        <p:txBody>
-          <a:bodyPr wrap="square" anchor="t" lIns="36576" rIns="36576" tIns="18288" bIns="18288">
-            <a:spAutoFit/>
-          </a:bodyPr>
-          <a:lstStyle/>
-          <a:p>
-            <a:pPr algn="ctr">
-              <a:spcAft>
-                <a:spcPts val="400"/>
-              </a:spcAft>
-            </a:pPr>
-            <a:r>
-              <a:rPr sz="950" b="0" i="0">
-                <a:solidFill>
-                  <a:srgbClr val="555E6B"/>
-                </a:solidFill>
-                <a:latin typeface="Arial"/>
-              </a:rPr>
-              <a:t>Copernicus 30 m, EGM2008</a:t>
-            </a:r>
-          </a:p>
-        </p:txBody>
-      </p:sp>
-      <p:sp>
-        <p:nvSpPr>
-          <p:cNvPr id="17447" name="Isosceles Triangle 17446"/>
-          <p:cNvSpPr/>
-          <p:nvPr/>
-        </p:nvSpPr>
-        <p:spPr>
-          <a:xfrm rot="5400000">
-            <a:off x="9934956" y="3044952"/>
-            <a:ext cx="146304" cy="237744"/>
-          </a:xfrm>
-          <a:prstGeom prst="triangle">
-            <a:avLst/>
-          </a:prstGeom>
-          <a:solidFill>
-            <a:srgbClr val="0070C0"/>
-          </a:solidFill>
-          <a:ln>
-            <a:noFill/>
-          </a:ln>
-          <a:effectLst/>
-        </p:spPr>
-        <p:style>
-          <a:lnRef idx="1">
-            <a:schemeClr val="accent1"/>
-          </a:lnRef>
-          <a:fillRef idx="3">
-            <a:schemeClr val="accent1"/>
-          </a:fillRef>
-          <a:effectRef idx="2">
-            <a:schemeClr val="accent1"/>
-          </a:effectRef>
-          <a:fontRef idx="minor">
-            <a:schemeClr val="lt1"/>
-          </a:fontRef>
-        </p:style>
-        <p:txBody>
-          <a:bodyPr rtlCol="0" anchor="ctr" lIns="54864" rIns="54864"/>
-          <a:lstStyle/>
-          <a:p>
-            <a:pPr algn="ctr"/>
-          </a:p>
-        </p:txBody>
-      </p:sp>
-      <p:pic>
-        <p:nvPicPr>
-          <p:cNvPr id="17448" name="Picture 17447" descr="hero.jpg"/>
-          <p:cNvPicPr>
-            <a:picLocks noChangeAspect="1"/>
-          </p:cNvPicPr>
-          <p:nvPr/>
-        </p:nvPicPr>
-        <p:blipFill>
-          <a:blip r:embed="rId10"/>
-          <a:srcRect l="18011" r="18011"/>
-          <a:stretch>
-            <a:fillRect/>
-          </a:stretch>
-        </p:blipFill>
-        <p:spPr>
-          <a:xfrm>
-            <a:off x="10104120" y="2377440"/>
-            <a:ext cx="1764792" cy="1572768"/>
-          </a:xfrm>
-          <a:prstGeom prst="rect">
-            <a:avLst/>
-          </a:prstGeom>
-          <a:ln w="9525">
-            <a:solidFill>
-              <a:srgbClr val="C9D6E8"/>
-            </a:solidFill>
-          </a:ln>
-        </p:spPr>
-      </p:pic>
-      <p:sp>
-        <p:nvSpPr>
-          <p:cNvPr id="17449" name="Oval 17448"/>
-          <p:cNvSpPr/>
-          <p:nvPr/>
-        </p:nvSpPr>
-        <p:spPr>
-          <a:xfrm>
-            <a:off x="10168128" y="2441448"/>
-            <a:ext cx="329184" cy="329184"/>
-          </a:xfrm>
-          <a:prstGeom prst="ellipse">
-            <a:avLst/>
-          </a:prstGeom>
-          <a:solidFill>
-            <a:srgbClr val="1F3864"/>
-          </a:solidFill>
-          <a:ln w="15875">
-            <a:solidFill>
-              <a:srgbClr val="FFFFFF"/>
-            </a:solidFill>
-          </a:ln>
-          <a:effectLst/>
-        </p:spPr>
-        <p:style>
-          <a:lnRef idx="1">
-            <a:schemeClr val="accent1"/>
-          </a:lnRef>
-          <a:fillRef idx="3">
-            <a:schemeClr val="accent1"/>
-          </a:fillRef>
-          <a:effectRef idx="2">
-            <a:schemeClr val="accent1"/>
-          </a:effectRef>
-          <a:fontRef idx="minor">
-            <a:schemeClr val="lt1"/>
-          </a:fontRef>
-        </p:style>
-        <p:txBody>
-          <a:bodyPr rtlCol="0" anchor="ctr" lIns="54864" rIns="54864" wrap="square"/>
-          <a:lstStyle/>
-          <a:p>
-            <a:pPr algn="ctr"/>
-            <a:r>
-              <a:rPr sz="1100" b="1" i="0">
-                <a:solidFill>
-                  <a:srgbClr val="FFFFFF"/>
-                </a:solidFill>
-                <a:latin typeface="Arial"/>
-              </a:rPr>
-              <a:t>6</a:t>
-            </a:r>
-          </a:p>
-        </p:txBody>
-      </p:sp>
-      <p:sp>
-        <p:nvSpPr>
-          <p:cNvPr id="17450" name="TextBox 17449"/>
-          <p:cNvSpPr txBox="1"/>
-          <p:nvPr/>
-        </p:nvSpPr>
-        <p:spPr>
-          <a:xfrm>
-            <a:off x="10104120" y="3986784"/>
-            <a:ext cx="1764792" cy="274320"/>
-          </a:xfrm>
-          <a:prstGeom prst="rect">
-            <a:avLst/>
-          </a:prstGeom>
-          <a:noFill/>
-        </p:spPr>
-        <p:txBody>
-          <a:bodyPr wrap="square" anchor="t" lIns="36576" rIns="36576" tIns="18288" bIns="18288">
-            <a:spAutoFit/>
-          </a:bodyPr>
-          <a:lstStyle/>
-          <a:p>
-            <a:pPr algn="ctr">
-              <a:spcAft>
-                <a:spcPts val="400"/>
-              </a:spcAft>
-            </a:pPr>
-            <a:r>
-              <a:rPr sz="1100" b="1" i="0">
-                <a:solidFill>
-                  <a:srgbClr val="1F3864"/>
-                </a:solidFill>
-                <a:latin typeface="Arial"/>
-              </a:rPr>
-              <a:t>3D flythrough</a:t>
-            </a:r>
-          </a:p>
-        </p:txBody>
-      </p:sp>
-      <p:sp>
-        <p:nvSpPr>
-          <p:cNvPr id="17451" name="TextBox 17450"/>
-          <p:cNvSpPr txBox="1"/>
-          <p:nvPr/>
-        </p:nvSpPr>
-        <p:spPr>
-          <a:xfrm>
-            <a:off x="10104120" y="4224528"/>
-            <a:ext cx="1764792" cy="274320"/>
-          </a:xfrm>
-          <a:prstGeom prst="rect">
-            <a:avLst/>
-          </a:prstGeom>
-          <a:noFill/>
-        </p:spPr>
-        <p:txBody>
-          <a:bodyPr wrap="square" anchor="t" lIns="36576" rIns="36576" tIns="18288" bIns="18288">
-            <a:spAutoFit/>
-          </a:bodyPr>
-          <a:lstStyle/>
-          <a:p>
-            <a:pPr algn="ctr">
-              <a:spcAft>
-                <a:spcPts val="400"/>
-              </a:spcAft>
-            </a:pPr>
-            <a:r>
-              <a:rPr sz="950" b="0" i="0">
-                <a:solidFill>
-                  <a:srgbClr val="555E6B"/>
-                </a:solidFill>
-                <a:latin typeface="Arial"/>
-              </a:rPr>
-              <a:t>Three.js, offline</a:t>
-            </a:r>
-          </a:p>
-        </p:txBody>
-      </p:sp>
-      <p:sp>
-        <p:nvSpPr>
-          <p:cNvPr id="17452" name="Rounded Rectangle 17451"/>
-          <p:cNvSpPr/>
-          <p:nvPr/>
-        </p:nvSpPr>
-        <p:spPr>
-          <a:xfrm>
-            <a:off x="320040" y="4590288"/>
-            <a:ext cx="7086600" cy="1627632"/>
+            <a:off x="10515600" y="5212080"/>
+            <a:ext cx="1353312" cy="292608"/>
           </a:xfrm>
           <a:prstGeom prst="roundRect">
             <a:avLst>
-              <a:gd name="adj" fmla="val 6000"/>
+              <a:gd name="adj" fmla="val 50000"/>
             </a:avLst>
           </a:prstGeom>
           <a:solidFill>
@@ -10301,273 +10936,36 @@
           </a:fontRef>
         </p:style>
         <p:txBody>
-          <a:bodyPr rtlCol="0" anchor="ctr" lIns="54864" rIns="54864"/>
+          <a:bodyPr rtlCol="0" anchor="ctr" lIns="54864" rIns="54864" wrap="square"/>
           <a:lstStyle/>
           <a:p>
             <a:pPr algn="ctr"/>
-          </a:p>
-        </p:txBody>
-      </p:sp>
-      <p:sp>
-        <p:nvSpPr>
-          <p:cNvPr id="17453" name="TextBox 17452"/>
-          <p:cNvSpPr txBox="1"/>
-          <p:nvPr/>
-        </p:nvSpPr>
-        <p:spPr>
-          <a:xfrm>
-            <a:off x="457200" y="4636008"/>
-            <a:ext cx="6858000" cy="274320"/>
-          </a:xfrm>
-          <a:prstGeom prst="rect">
-            <a:avLst/>
-          </a:prstGeom>
-          <a:noFill/>
-        </p:spPr>
-        <p:txBody>
-          <a:bodyPr wrap="square" anchor="t" lIns="36576" rIns="36576" tIns="18288" bIns="18288">
-            <a:spAutoFit/>
-          </a:bodyPr>
-          <a:lstStyle/>
-          <a:p>
-            <a:pPr algn="l">
-              <a:spcAft>
-                <a:spcPts val="400"/>
-              </a:spcAft>
-            </a:pPr>
-            <a:r>
-              <a:rPr sz="1150" b="1" i="0">
+            <a:r>
+              <a:rPr sz="1000" b="1" i="0">
                 <a:solidFill>
                   <a:srgbClr val="1F3864"/>
                 </a:solidFill>
                 <a:latin typeface="Arial"/>
               </a:rPr>
-              <a:t>TRAINING AND VALIDATION</a:t>
-            </a:r>
-          </a:p>
-        </p:txBody>
-      </p:sp>
-      <p:sp>
-        <p:nvSpPr>
-          <p:cNvPr id="17454" name="Rounded Rectangle 17453"/>
+              <a:t>USGS 3DEP LiDAR</a:t>
+            </a:r>
+          </a:p>
+        </p:txBody>
+      </p:sp>
+      <p:sp>
+        <p:nvSpPr>
+          <p:cNvPr id="17458" name="Rounded Rectangle 17457"/>
           <p:cNvSpPr/>
           <p:nvPr/>
         </p:nvSpPr>
         <p:spPr>
           <a:xfrm>
-            <a:off x="457200" y="4956048"/>
-            <a:ext cx="2157984" cy="1152144"/>
+            <a:off x="320040" y="5614416"/>
+            <a:ext cx="11548872" cy="603504"/>
           </a:xfrm>
           <a:prstGeom prst="roundRect">
             <a:avLst>
-              <a:gd name="adj" fmla="val 8000"/>
-            </a:avLst>
-          </a:prstGeom>
-          <a:solidFill>
-            <a:srgbClr val="FFFFFF"/>
-          </a:solidFill>
-          <a:ln w="12700">
-            <a:solidFill>
-              <a:srgbClr val="C9D6E8"/>
-            </a:solidFill>
-          </a:ln>
-          <a:effectLst/>
-        </p:spPr>
-        <p:style>
-          <a:lnRef idx="1">
-            <a:schemeClr val="accent1"/>
-          </a:lnRef>
-          <a:fillRef idx="3">
-            <a:schemeClr val="accent1"/>
-          </a:fillRef>
-          <a:effectRef idx="2">
-            <a:schemeClr val="accent1"/>
-          </a:effectRef>
-          <a:fontRef idx="minor">
-            <a:schemeClr val="lt1"/>
-          </a:fontRef>
-        </p:style>
-        <p:txBody>
-          <a:bodyPr rtlCol="0" anchor="ctr" lIns="54864" rIns="54864" wrap="square"/>
-          <a:lstStyle/>
-          <a:p>
-            <a:pPr algn="ctr"/>
-            <a:r>
-              <a:rPr sz="1150" b="1" i="0">
-                <a:solidFill>
-                  <a:srgbClr val="1F3864"/>
-                </a:solidFill>
-                <a:latin typeface="Arial"/>
-              </a:rPr>
-              <a:t>GAMUS</a:t>
-            </a:r>
-          </a:p>
-          <a:p>
-            <a:pPr algn="ctr"/>
-            <a:r>
-              <a:rPr sz="950" b="0" i="0">
-                <a:solidFill>
-                  <a:srgbClr val="1F3864"/>
-                </a:solidFill>
-                <a:latin typeface="Arial"/>
-              </a:rPr>
-              <a:t>aerial photos + airborne-LiDAR heights; 480 train · 48 val · 40 test tiles</a:t>
-            </a:r>
-          </a:p>
-        </p:txBody>
-      </p:sp>
-      <p:sp>
-        <p:nvSpPr>
-          <p:cNvPr id="17455" name="Rounded Rectangle 17454"/>
-          <p:cNvSpPr/>
-          <p:nvPr/>
-        </p:nvSpPr>
-        <p:spPr>
-          <a:xfrm>
-            <a:off x="2761488" y="4956048"/>
-            <a:ext cx="2157984" cy="1152144"/>
-          </a:xfrm>
-          <a:prstGeom prst="roundRect">
-            <a:avLst>
-              <a:gd name="adj" fmla="val 8000"/>
-            </a:avLst>
-          </a:prstGeom>
-          <a:solidFill>
-            <a:srgbClr val="FFFFFF"/>
-          </a:solidFill>
-          <a:ln w="12700">
-            <a:solidFill>
-              <a:srgbClr val="C9D6E8"/>
-            </a:solidFill>
-          </a:ln>
-          <a:effectLst/>
-        </p:spPr>
-        <p:style>
-          <a:lnRef idx="1">
-            <a:schemeClr val="accent1"/>
-          </a:lnRef>
-          <a:fillRef idx="3">
-            <a:schemeClr val="accent1"/>
-          </a:fillRef>
-          <a:effectRef idx="2">
-            <a:schemeClr val="accent1"/>
-          </a:effectRef>
-          <a:fontRef idx="minor">
-            <a:schemeClr val="lt1"/>
-          </a:fontRef>
-        </p:style>
-        <p:txBody>
-          <a:bodyPr rtlCol="0" anchor="ctr" lIns="54864" rIns="54864" wrap="square"/>
-          <a:lstStyle/>
-          <a:p>
-            <a:pPr algn="ctr"/>
-            <a:r>
-              <a:rPr sz="1150" b="1" i="0">
-                <a:solidFill>
-                  <a:srgbClr val="1F3864"/>
-                </a:solidFill>
-                <a:latin typeface="Arial"/>
-              </a:rPr>
-              <a:t>Model</a:t>
-            </a:r>
-          </a:p>
-          <a:p>
-            <a:pPr algn="ctr"/>
-            <a:r>
-              <a:rPr sz="950" b="0" i="0">
-                <a:solidFill>
-                  <a:srgbClr val="1F3864"/>
-                </a:solidFill>
-                <a:latin typeface="Arial"/>
-              </a:rPr>
-              <a:t>frozen DINOv3-SAT encoder + our DPT head, Huber loss in metres</a:t>
-            </a:r>
-          </a:p>
-        </p:txBody>
-      </p:sp>
-      <p:sp>
-        <p:nvSpPr>
-          <p:cNvPr id="17456" name="Rounded Rectangle 17455"/>
-          <p:cNvSpPr/>
-          <p:nvPr/>
-        </p:nvSpPr>
-        <p:spPr>
-          <a:xfrm>
-            <a:off x="5065776" y="4956048"/>
-            <a:ext cx="2157984" cy="1152144"/>
-          </a:xfrm>
-          <a:prstGeom prst="roundRect">
-            <a:avLst>
-              <a:gd name="adj" fmla="val 8000"/>
-            </a:avLst>
-          </a:prstGeom>
-          <a:solidFill>
-            <a:srgbClr val="FFFFFF"/>
-          </a:solidFill>
-          <a:ln w="12700">
-            <a:solidFill>
-              <a:srgbClr val="C9D6E8"/>
-            </a:solidFill>
-          </a:ln>
-          <a:effectLst/>
-        </p:spPr>
-        <p:style>
-          <a:lnRef idx="1">
-            <a:schemeClr val="accent1"/>
-          </a:lnRef>
-          <a:fillRef idx="3">
-            <a:schemeClr val="accent1"/>
-          </a:fillRef>
-          <a:effectRef idx="2">
-            <a:schemeClr val="accent1"/>
-          </a:effectRef>
-          <a:fontRef idx="minor">
-            <a:schemeClr val="lt1"/>
-          </a:fontRef>
-        </p:style>
-        <p:txBody>
-          <a:bodyPr rtlCol="0" anchor="ctr" lIns="54864" rIns="54864" wrap="square"/>
-          <a:lstStyle/>
-          <a:p>
-            <a:pPr algn="ctr"/>
-            <a:r>
-              <a:rPr sz="1150" b="1" i="0">
-                <a:solidFill>
-                  <a:srgbClr val="1F3864"/>
-                </a:solidFill>
-                <a:latin typeface="Arial"/>
-              </a:rPr>
-              <a:t>Tested</a:t>
-            </a:r>
-          </a:p>
-          <a:p>
-            <a:pPr algn="ctr"/>
-            <a:r>
-              <a:rPr sz="950" b="0" i="0">
-                <a:solidFill>
-                  <a:srgbClr val="1F3864"/>
-                </a:solidFill>
-                <a:latin typeface="Arial"/>
-              </a:rPr>
-              <a:t>on held-out tiles and 8 USGS LiDAR sites, never on training data</a:t>
-            </a:r>
-          </a:p>
-        </p:txBody>
-      </p:sp>
-      <p:sp>
-        <p:nvSpPr>
-          <p:cNvPr id="17457" name="Rounded Rectangle 17456"/>
-          <p:cNvSpPr/>
-          <p:nvPr/>
-        </p:nvSpPr>
-        <p:spPr>
-          <a:xfrm>
-            <a:off x="7543800" y="4590288"/>
-            <a:ext cx="4325112" cy="1627632"/>
-          </a:xfrm>
-          <a:prstGeom prst="roundRect">
-            <a:avLst>
-              <a:gd name="adj" fmla="val 6000"/>
+              <a:gd name="adj" fmla="val 10000"/>
             </a:avLst>
           </a:prstGeom>
           <a:solidFill>
@@ -10595,117 +10993,27 @@
           </a:fontRef>
         </p:style>
         <p:txBody>
-          <a:bodyPr rtlCol="0" anchor="ctr" lIns="54864" rIns="54864"/>
+          <a:bodyPr rtlCol="0" anchor="ctr" lIns="54864" rIns="54864" wrap="square"/>
           <a:lstStyle/>
           <a:p>
             <a:pPr algn="ctr"/>
-          </a:p>
-        </p:txBody>
-      </p:sp>
-      <p:pic>
-        <p:nvPicPr>
-          <p:cNvPr id="17458" name="Picture 17457" descr="india_02_height.jpg"/>
-          <p:cNvPicPr>
-            <a:picLocks noChangeAspect="1"/>
-          </p:cNvPicPr>
-          <p:nvPr/>
-        </p:nvPicPr>
-        <p:blipFill>
-          <a:blip r:embed="rId11"/>
-          <a:srcRect l="16195" r="16195"/>
-          <a:stretch>
-            <a:fillRect/>
-          </a:stretch>
-        </p:blipFill>
-        <p:spPr>
-          <a:xfrm>
-            <a:off x="7635240" y="4681728"/>
-            <a:ext cx="2103120" cy="1444752"/>
-          </a:xfrm>
-          <a:prstGeom prst="rect">
-            <a:avLst/>
-          </a:prstGeom>
-          <a:ln w="9525">
-            <a:solidFill>
-              <a:srgbClr val="C9D6E8"/>
-            </a:solidFill>
-          </a:ln>
-        </p:spPr>
-      </p:pic>
-      <p:sp>
-        <p:nvSpPr>
-          <p:cNvPr id="17459" name="TextBox 17458"/>
-          <p:cNvSpPr txBox="1"/>
-          <p:nvPr/>
-        </p:nvSpPr>
-        <p:spPr>
-          <a:xfrm>
-            <a:off x="9802368" y="4663440"/>
-            <a:ext cx="2011680" cy="274320"/>
-          </a:xfrm>
-          <a:prstGeom prst="rect">
-            <a:avLst/>
-          </a:prstGeom>
-          <a:noFill/>
-        </p:spPr>
-        <p:txBody>
-          <a:bodyPr wrap="square" anchor="t" lIns="36576" rIns="36576" tIns="18288" bIns="18288">
-            <a:spAutoFit/>
-          </a:bodyPr>
-          <a:lstStyle/>
-          <a:p>
-            <a:pPr algn="l">
-              <a:spcAft>
-                <a:spcPts val="400"/>
-              </a:spcAft>
-            </a:pPr>
-            <a:r>
-              <a:rPr sz="1150" b="1" i="0">
+            <a:r>
+              <a:rPr sz="1050" b="1" i="0">
                 <a:solidFill>
                   <a:srgbClr val="1F3864"/>
                 </a:solidFill>
                 <a:latin typeface="Arial"/>
               </a:rPr>
-              <a:t>WORKING PROTOTYPE</a:t>
-            </a:r>
-          </a:p>
-        </p:txBody>
-      </p:sp>
-      <p:sp>
-        <p:nvSpPr>
-          <p:cNvPr id="17460" name="TextBox 17459"/>
-          <p:cNvSpPr txBox="1"/>
-          <p:nvPr/>
-        </p:nvSpPr>
-        <p:spPr>
-          <a:xfrm>
-            <a:off x="9802368" y="4956048"/>
-            <a:ext cx="2011680" cy="1188720"/>
-          </a:xfrm>
-          <a:prstGeom prst="rect">
-            <a:avLst/>
-          </a:prstGeom>
-          <a:noFill/>
-        </p:spPr>
-        <p:txBody>
-          <a:bodyPr wrap="square" anchor="t" lIns="36576" rIns="36576" tIns="18288" bIns="18288">
-            <a:spAutoFit/>
-          </a:bodyPr>
-          <a:lstStyle/>
-          <a:p>
-            <a:pPr algn="l">
-              <a:spcAft>
-                <a:spcPts val="400"/>
-              </a:spcAft>
-            </a:pPr>
-            <a:r>
-              <a:rPr sz="1000" b="0" i="0">
-                <a:solidFill>
-                  <a:srgbClr val="1C1C1C"/>
-                </a:solidFill>
-                <a:latin typeface="Arial"/>
-              </a:rPr>
-              <a:t>Upload an image, get the DSM, fly through it in 3D and check it against LiDAR, all in the browser, offline.</a:t>
+              <a:t>TRAINING</a:t>
+            </a:r>
+            <a:r>
+              <a:rPr sz="1050" b="0" i="0">
+                <a:solidFill>
+                  <a:srgbClr val="1F3864"/>
+                </a:solidFill>
+                <a:latin typeface="Arial"/>
+              </a:rPr>
+              <a:t>   GAMUS [3]: 1,500 training, 48 validation and 40 held-out test tiles of aerial RGB with airborne-LiDAR heights  ·  AdamW, masked Huber loss in metres  ·  model chosen on the validation split only</a:t>
             </a:r>
           </a:p>
         </p:txBody>
@@ -11173,7 +11481,7 @@
                 </a:solidFill>
                 <a:latin typeface="Arial"/>
               </a:rPr>
-              <a:t>It already works</a:t>
+              <a:t>Working prototype today</a:t>
             </a:r>
           </a:p>
         </p:txBody>
@@ -11212,7 +11520,7 @@
                 </a:solidFill>
                 <a:latin typeface="Arial"/>
               </a:rPr>
-              <a:t>Built and tested end to end: image in, DSM GeoTIFF and 3D scene out. 101 automated tests pass.</a:t>
+              <a:t>Upload an image and get a DSM GeoTIFF and a 3D scene in seconds. Covered by 101 automated tests.</a:t>
             </a:r>
           </a:p>
         </p:txBody>
@@ -11341,7 +11649,7 @@
                 </a:solidFill>
                 <a:latin typeface="Arial"/>
               </a:rPr>
-              <a:t>Accuracy is measured</a:t>
+              <a:t>Checked against real LiDAR</a:t>
             </a:r>
           </a:p>
         </p:txBody>
@@ -11380,7 +11688,7 @@
                 </a:solidFill>
                 <a:latin typeface="Arial"/>
               </a:rPr>
-              <a:t>40 held-out LiDAR tiles and 8 USGS airborne-LiDAR sites, from towns to hills.</a:t>
+              <a:t>40 held-out GAMUS test tiles [3] and 8 USGS airborne-LiDAR sites [8], from towns to hills.</a:t>
             </a:r>
           </a:p>
         </p:txBody>
@@ -11509,7 +11817,7 @@
                 </a:solidFill>
                 <a:latin typeface="Arial"/>
               </a:rPr>
-              <a:t>Cheap to run</a:t>
+              <a:t>Low cost, runs offline</a:t>
             </a:r>
           </a:p>
         </p:txBody>
@@ -11548,7 +11856,7 @@
                 </a:solidFill>
                 <a:latin typeface="Arial"/>
               </a:rPr>
-              <a:t>Laptop GPU, offline, free data (GAMUS, Copernicus DEM). No survey flights.</a:t>
+              <a:t>A laptop GPU and free data: GAMUS [3] and the Copernicus DEM [7]. No survey flights needed.</a:t>
             </a:r>
           </a:p>
         </p:txBody>
@@ -11563,7 +11871,7 @@
         </p:nvGraphicFramePr>
         <p:xfrm>
           <a:off x="320040" y="2194560"/>
-          <a:ext cx="5669280" cy="2194560"/>
+          <a:ext cx="5669280" cy="2011680"/>
         </p:xfrm>
         <a:graphic>
           <a:graphicData uri="http://schemas.openxmlformats.org/drawingml/2006/chart">
@@ -11571,9 +11879,66 @@
           </a:graphicData>
         </a:graphic>
       </p:graphicFrame>
+      <p:sp>
+        <p:nvSpPr>
+          <p:cNvPr id="17424" name="TextBox 17423"/>
+          <p:cNvSpPr txBox="1"/>
+          <p:nvPr/>
+        </p:nvSpPr>
+        <p:spPr>
+          <a:xfrm>
+            <a:off x="320040" y="4187952"/>
+            <a:ext cx="5669280" cy="256032"/>
+          </a:xfrm>
+          <a:prstGeom prst="rect">
+            <a:avLst/>
+          </a:prstGeom>
+          <a:noFill/>
+        </p:spPr>
+        <p:txBody>
+          <a:bodyPr wrap="square" anchor="t" lIns="36576" rIns="36576" tIns="18288" bIns="18288">
+            <a:spAutoFit/>
+          </a:bodyPr>
+          <a:lstStyle/>
+          <a:p>
+            <a:pPr algn="ctr">
+              <a:spcAft>
+                <a:spcPts val="400"/>
+              </a:spcAft>
+            </a:pPr>
+            <a:r>
+              <a:rPr sz="1000" b="0" i="0">
+                <a:solidFill>
+                  <a:srgbClr val="1F3864"/>
+                </a:solidFill>
+                <a:latin typeface="Arial"/>
+              </a:rPr>
+              <a:t>Correlation with LiDAR: </a:t>
+            </a:r>
+            <a:r>
+              <a:rPr sz="1000" b="1" i="0">
+                <a:solidFill>
+                  <a:srgbClr val="1F3864"/>
+                </a:solidFill>
+                <a:latin typeface="Arial"/>
+              </a:rPr>
+              <a:t>ours r = 0.81</a:t>
+            </a:r>
+            <a:r>
+              <a:rPr sz="1000" b="0" i="0">
+                <a:solidFill>
+                  <a:srgbClr val="1F3864"/>
+                </a:solidFill>
+                <a:latin typeface="Arial"/>
+              </a:rPr>
+              <a:t>, RS3DAda r = 0.60</a:t>
+            </a:r>
+          </a:p>
+        </p:txBody>
+      </p:sp>
       <p:graphicFrame>
         <p:nvGraphicFramePr>
-          <p:cNvPr id="17424" name="Chart 17423"/>
+          <p:cNvPr id="17425" name="Chart 17424"/>
           <p:cNvGraphicFramePr>
             <a:graphicFrameLocks noGrp="1"/>
           </p:cNvGraphicFramePr>
@@ -11581,7 +11946,7 @@
         </p:nvGraphicFramePr>
         <p:xfrm>
           <a:off x="6199632" y="2194560"/>
-          <a:ext cx="5669280" cy="2194560"/>
+          <a:ext cx="5669280" cy="2011680"/>
         </p:xfrm>
         <a:graphic>
           <a:graphicData uri="http://schemas.openxmlformats.org/drawingml/2006/chart">
@@ -11589,17 +11954,56 @@
           </a:graphicData>
         </a:graphic>
       </p:graphicFrame>
+      <p:sp>
+        <p:nvSpPr>
+          <p:cNvPr id="17426" name="TextBox 17425"/>
+          <p:cNvSpPr txBox="1"/>
+          <p:nvPr/>
+        </p:nvSpPr>
+        <p:spPr>
+          <a:xfrm>
+            <a:off x="6199632" y="4187952"/>
+            <a:ext cx="5669280" cy="256032"/>
+          </a:xfrm>
+          <a:prstGeom prst="rect">
+            <a:avLst/>
+          </a:prstGeom>
+          <a:noFill/>
+        </p:spPr>
+        <p:txBody>
+          <a:bodyPr wrap="square" anchor="t" lIns="36576" rIns="36576" tIns="18288" bIns="18288">
+            <a:spAutoFit/>
+          </a:bodyPr>
+          <a:lstStyle/>
+          <a:p>
+            <a:pPr algn="ctr">
+              <a:spcAft>
+                <a:spcPts val="400"/>
+              </a:spcAft>
+            </a:pPr>
+            <a:r>
+              <a:rPr sz="1000" b="0" i="0">
+                <a:solidFill>
+                  <a:srgbClr val="1F3864"/>
+                </a:solidFill>
+                <a:latin typeface="Arial"/>
+              </a:rPr>
+              <a:t>Whole pipeline, GeoTIFF in → DSM out, on 8 USGS sites</a:t>
+            </a:r>
+          </a:p>
+        </p:txBody>
+      </p:sp>
       <p:graphicFrame>
         <p:nvGraphicFramePr>
-          <p:cNvPr id="17425" name="Table 17424"/>
+          <p:cNvPr id="17427" name="Table 17426"/>
           <p:cNvGraphicFramePr>
             <a:graphicFrameLocks noGrp="1"/>
           </p:cNvGraphicFramePr>
           <p:nvPr/>
         </p:nvGraphicFramePr>
         <p:xfrm>
-          <a:off x="320040" y="4498848"/>
-          <a:ext cx="11548872" cy="1737360"/>
+          <a:off x="320040" y="4526280"/>
+          <a:ext cx="11548872" cy="1691640"/>
         </p:xfrm>
         <a:graphic>
           <a:graphicData uri="http://schemas.openxmlformats.org/drawingml/2006/table">
@@ -11608,10 +12012,10 @@
                 <a:tableStyleId>{5C22544A-7EE6-4342-B048-85BDC9FD1C3A}</a:tableStyleId>
               </a:tblPr>
               <a:tblGrid>
-                <a:gridCol w="4754880"/>
-                <a:gridCol w="6793992"/>
+                <a:gridCol w="3840480"/>
+                <a:gridCol w="7708392"/>
               </a:tblGrid>
-              <a:tr h="310896">
+              <a:tr h="301752">
                 <a:tc>
                   <a:txBody>
                     <a:bodyPr/>
@@ -11624,7 +12028,7 @@
                           </a:solidFill>
                           <a:latin typeface="Arial"/>
                         </a:rPr>
-                        <a:t>Challenge</a:t>
+                        <a:t>Risk</a:t>
                       </a:r>
                     </a:p>
                   </a:txBody>
@@ -11646,7 +12050,7 @@
                           </a:solidFill>
                           <a:latin typeface="Arial"/>
                         </a:rPr>
-                        <a:t>How we handle it</a:t>
+                        <a:t>Mitigation</a:t>
                       </a:r>
                     </a:p>
                   </a:txBody>
@@ -11657,7 +12061,7 @@
                   </a:tcPr>
                 </a:tc>
               </a:tr>
-              <a:tr h="356616">
+              <a:tr h="347472">
                 <a:tc>
                   <a:txBody>
                     <a:bodyPr/>
@@ -11670,7 +12074,7 @@
                           </a:solidFill>
                           <a:latin typeface="Arial"/>
                         </a:rPr>
-                        <a:t>Tall towers and dense 25 m canopy are under-predicted.</a:t>
+                        <a:t>Very tall towers and dense forest canopy</a:t>
                       </a:r>
                     </a:p>
                   </a:txBody>
@@ -11692,7 +12096,7 @@
                           </a:solidFill>
                           <a:latin typeface="Arial"/>
                         </a:rPr>
-                        <a:t>We report it openly (35.9 m error in a downtown); next, more tall-building and forest tiles in training.</a:t>
+                        <a:t>More tall-building and forest tiles in training; per-landscape scores tracked on every run.</a:t>
                       </a:r>
                     </a:p>
                   </a:txBody>
@@ -11703,7 +12107,7 @@
                   </a:tcPr>
                 </a:tc>
               </a:tr>
-              <a:tr h="356616">
+              <a:tr h="347472">
                 <a:tc>
                   <a:txBody>
                     <a:bodyPr/>
@@ -11716,7 +12120,7 @@
                           </a:solidFill>
                           <a:latin typeface="Arial"/>
                         </a:rPr>
-                        <a:t>Trained on US aerial photos; Indian satellite accuracy not yet measured.</a:t>
+                        <a:t>New sensors and regions (ISRO imagery)</a:t>
                       </a:r>
                     </a:p>
                   </a:txBody>
@@ -11738,7 +12142,7 @@
                           </a:solidFill>
                           <a:latin typeface="Arial"/>
                         </a:rPr>
-                        <a:t>Pixel-size normalisation (tested 0.3–1 m); the built-in reference check scores any ISRO scene with ground truth.</a:t>
+                        <a:t>Pixel size normalised (0.3–1 m tested); the built-in reference check scores and calibrates on ISRO data.</a:t>
                       </a:r>
                     </a:p>
                   </a:txBody>
@@ -11749,7 +12153,7 @@
                   </a:tcPr>
                 </a:tc>
               </a:tr>
-              <a:tr h="356616">
+              <a:tr h="347472">
                 <a:tc>
                   <a:txBody>
                     <a:bodyPr/>
@@ -11762,7 +12166,7 @@
                           </a:solidFill>
                           <a:latin typeface="Arial"/>
                         </a:rPr>
-                        <a:t>Metric scale from one image is ill-posed.</a:t>
+                        <a:t>Absolute scale from a single image</a:t>
                       </a:r>
                     </a:p>
                   </a:txBody>
@@ -11784,7 +12188,7 @@
                           </a:solidFill>
                           <a:latin typeface="Arial"/>
                         </a:rPr>
-                        <a:t>Model trained on LiDAR metres; terrain from Copernicus or SRTM; map points or a reference raster calibrate.</a:t>
+                        <a:t>Metric training on LiDAR heights, DEM / SRTM fusion, GCPs and reference-based calibration.</a:t>
                       </a:r>
                     </a:p>
                   </a:txBody>
@@ -11795,7 +12199,7 @@
                   </a:tcPr>
                 </a:tc>
               </a:tr>
-              <a:tr h="356616">
+              <a:tr h="347472">
                 <a:tc>
                   <a:txBody>
                     <a:bodyPr/>
@@ -11808,7 +12212,7 @@
                           </a:solidFill>
                           <a:latin typeface="Arial"/>
                         </a:rPr>
-                        <a:t>Angled (oblique) photos show building walls.</a:t>
+                        <a:t>Angled (oblique) photos</a:t>
                       </a:r>
                     </a:p>
                   </a:txBody>
@@ -11830,7 +12234,7 @@
                           </a:solidFill>
                           <a:latin typeface="Arial"/>
                         </a:rPr>
-                        <a:t>We take top-down satellite and aerial imagery, as the problem statement specifies.</a:t>
+                        <a:t>Built for top-down satellite and aerial imagery, as the problem statement specifies.</a:t>
                       </a:r>
                     </a:p>
                   </a:txBody>
@@ -12423,7 +12827,7 @@
                 </a:solidFill>
                 <a:latin typeface="Arial"/>
               </a:rPr>
-              <a:t>Flood and landslide screening from one image. Here, at a 36 m river rise, 12 of 204 buildings are reached.</a:t>
+              <a:t>Flood and landslide screening from one image. In Chungthang [9], a 36 m river rise reaches 12 of 204 buildings.</a:t>
             </a:r>
           </a:p>
         </p:txBody>
@@ -13268,80 +13672,6 @@
       </p:sp>
       <p:sp>
         <p:nvSpPr>
-          <p:cNvPr id="17410" name="TextBox 8"/>
-          <p:cNvSpPr txBox="1">
-            <a:spLocks noChangeArrowheads="1"/>
-          </p:cNvSpPr>
-          <p:nvPr/>
-        </p:nvSpPr>
-        <p:spPr bwMode="auto">
-          <a:xfrm>
-            <a:off x="609600" y="2795263"/>
-            <a:ext cx="9385300" cy="523220"/>
-          </a:xfrm>
-          <a:prstGeom prst="rect">
-            <a:avLst/>
-          </a:prstGeom>
-          <a:noFill/>
-          <a:ln w="9525">
-            <a:noFill/>
-            <a:miter lim="800000"/>
-            <a:headEnd/>
-            <a:tailEnd/>
-          </a:ln>
-        </p:spPr>
-        <p:txBody>
-          <a:bodyPr wrap="square">
-            <a:spAutoFit/>
-          </a:bodyPr>
-          <a:lstStyle/>
-          <a:p>
-            <a:pPr marL="342900" marR="0" lvl="0" indent="-342900" algn="just" defTabSz="457200" rtl="0" eaLnBrk="1" fontAlgn="base" latinLnBrk="0" hangingPunct="1">
-              <a:lnSpc>
-                <a:spcPct val="100000"/>
-              </a:lnSpc>
-              <a:spcBef>
-                <a:spcPct val="0"/>
-              </a:spcBef>
-              <a:spcAft>
-                <a:spcPct val="0"/>
-              </a:spcAft>
-              <a:buClrTx/>
-              <a:buSzTx/>
-              <a:buFont typeface="Arial" panose="020B0604020202020204" pitchFamily="34" charset="0"/>
-              <a:buChar char="•"/>
-              <a:tabLst/>
-              <a:defRPr/>
-            </a:pPr>
-            <a:r>
-              <a:rPr lang="en-US" sz="2800" noProof="0" dirty="0">
-                <a:solidFill>
-                  <a:prstClr val="black"/>
-                </a:solidFill>
-                <a:latin typeface="Arial" pitchFamily="34" charset="0"/>
-                <a:cs typeface="Arial" pitchFamily="34" charset="0"/>
-              </a:rPr>
-              <a:t>Details / Links of the reference and research work</a:t>
-            </a:r>
-            <a:endParaRPr kumimoji="0" lang="en-US" sz="2800" b="0" i="0" u="none" strike="noStrike" kern="1200" cap="none" spc="0" normalizeH="0" baseline="0" noProof="0" dirty="0">
-              <a:ln>
-                <a:noFill/>
-              </a:ln>
-              <a:solidFill>
-                <a:prstClr val="black"/>
-              </a:solidFill>
-              <a:effectLst/>
-              <a:uLnTx/>
-              <a:uFillTx/>
-              <a:latin typeface="Arial" pitchFamily="34" charset="0"/>
-              <a:ea typeface="ＭＳ Ｐゴシック" pitchFamily="1" charset="-128"/>
-              <a:cs typeface="Arial" pitchFamily="34" charset="0"/>
-            </a:endParaRPr>
-          </a:p>
-        </p:txBody>
-      </p:sp>
-      <p:sp>
-        <p:nvSpPr>
           <p:cNvPr id="6" name="Slide Number Placeholder 5"/>
           <p:cNvSpPr>
             <a:spLocks noGrp="1"/>
@@ -13494,57 +13824,6 @@
           </a:p>
         </p:txBody>
       </p:sp>
-      <p:sp>
-        <p:nvSpPr>
-          <p:cNvPr id="9" name="Oval 8" descr="Your startup LOGO">
-            <a:extLst>
-              <a:ext uri="{FF2B5EF4-FFF2-40B4-BE49-F238E27FC236}">
-                <a16:creationId xmlns:a16="http://schemas.microsoft.com/office/drawing/2014/main" id="{5DBCE864-823D-4A13-9607-5DA1F0ED5FB8}"/>
-              </a:ext>
-              <a:ext uri="{C183D7F6-B498-43B3-948B-1728B52AA6E4}">
-                <adec:decorative xmlns:adec="http://schemas.microsoft.com/office/drawing/2017/decorative" xmlns="" val="0"/>
-              </a:ext>
-            </a:extLst>
-          </p:cNvPr>
-          <p:cNvSpPr/>
-          <p:nvPr/>
-        </p:nvSpPr>
-        <p:spPr>
-          <a:xfrm>
-            <a:off x="329773" y="252246"/>
-            <a:ext cx="1251857" cy="807334"/>
-          </a:xfrm>
-          <a:prstGeom prst="ellipse">
-            <a:avLst/>
-          </a:prstGeom>
-        </p:spPr>
-        <p:style>
-          <a:lnRef idx="2">
-            <a:schemeClr val="accent4"/>
-          </a:lnRef>
-          <a:fillRef idx="1">
-            <a:schemeClr val="lt1"/>
-          </a:fillRef>
-          <a:effectRef idx="0">
-            <a:schemeClr val="accent4"/>
-          </a:effectRef>
-          <a:fontRef idx="minor">
-            <a:schemeClr val="dk1"/>
-          </a:fontRef>
-        </p:style>
-        <p:txBody>
-          <a:bodyPr rtlCol="0" anchor="ctr"/>
-          <a:lstStyle/>
-          <a:p>
-            <a:pPr algn="ctr"/>
-            <a:r>
-              <a:rPr lang="en-US" dirty="0"/>
-              <a:t>Your Team Name</a:t>
-            </a:r>
-            <a:endParaRPr lang="en-IN" dirty="0"/>
-          </a:p>
-        </p:txBody>
-      </p:sp>
       <p:pic>
         <p:nvPicPr>
           <p:cNvPr id="12" name="Picture 11"/>
@@ -13575,6 +13854,2154 @@
           </a:prstGeom>
         </p:spPr>
       </p:pic>
+      <p:pic>
+        <p:nvPicPr>
+          <p:cNvPr id="17410" name="Picture 17409" descr="parallax.png"/>
+          <p:cNvPicPr>
+            <a:picLocks noChangeAspect="1"/>
+          </p:cNvPicPr>
+          <p:nvPr/>
+        </p:nvPicPr>
+        <p:blipFill>
+          <a:blip r:embed="rId4"/>
+          <a:stretch>
+            <a:fillRect/>
+          </a:stretch>
+        </p:blipFill>
+        <p:spPr>
+          <a:xfrm>
+            <a:off x="274320" y="329184"/>
+            <a:ext cx="1965960" cy="548310"/>
+          </a:xfrm>
+          <a:prstGeom prst="rect">
+            <a:avLst/>
+          </a:prstGeom>
+        </p:spPr>
+      </p:pic>
+      <p:sp>
+        <p:nvSpPr>
+          <p:cNvPr id="17411" name="Rectangle 17410"/>
+          <p:cNvSpPr/>
+          <p:nvPr/>
+        </p:nvSpPr>
+        <p:spPr>
+          <a:xfrm>
+            <a:off x="320040" y="1188720"/>
+            <a:ext cx="5715000" cy="768096"/>
+          </a:xfrm>
+          <a:prstGeom prst="rect">
+            <a:avLst/>
+          </a:prstGeom>
+          <a:solidFill>
+            <a:srgbClr val="EEF3FA"/>
+          </a:solidFill>
+          <a:ln w="12700">
+            <a:solidFill>
+              <a:srgbClr val="C9D6E8"/>
+            </a:solidFill>
+          </a:ln>
+          <a:effectLst/>
+        </p:spPr>
+        <p:style>
+          <a:lnRef idx="1">
+            <a:schemeClr val="accent1"/>
+          </a:lnRef>
+          <a:fillRef idx="3">
+            <a:schemeClr val="accent1"/>
+          </a:fillRef>
+          <a:effectRef idx="2">
+            <a:schemeClr val="accent1"/>
+          </a:effectRef>
+          <a:fontRef idx="minor">
+            <a:schemeClr val="lt1"/>
+          </a:fontRef>
+        </p:style>
+        <p:txBody>
+          <a:bodyPr rtlCol="0" anchor="ctr" lIns="54864" rIns="54864"/>
+          <a:lstStyle/>
+          <a:p>
+            <a:pPr algn="ctr"/>
+          </a:p>
+        </p:txBody>
+      </p:sp>
+      <p:sp>
+        <p:nvSpPr>
+          <p:cNvPr id="17412" name="Rectangle 17411"/>
+          <p:cNvSpPr/>
+          <p:nvPr/>
+        </p:nvSpPr>
+        <p:spPr>
+          <a:xfrm>
+            <a:off x="320040" y="1188720"/>
+            <a:ext cx="502920" cy="768096"/>
+          </a:xfrm>
+          <a:prstGeom prst="rect">
+            <a:avLst/>
+          </a:prstGeom>
+          <a:solidFill>
+            <a:srgbClr val="0070C0"/>
+          </a:solidFill>
+          <a:ln>
+            <a:noFill/>
+          </a:ln>
+          <a:effectLst/>
+        </p:spPr>
+        <p:style>
+          <a:lnRef idx="1">
+            <a:schemeClr val="accent1"/>
+          </a:lnRef>
+          <a:fillRef idx="3">
+            <a:schemeClr val="accent1"/>
+          </a:fillRef>
+          <a:effectRef idx="2">
+            <a:schemeClr val="accent1"/>
+          </a:effectRef>
+          <a:fontRef idx="minor">
+            <a:schemeClr val="lt1"/>
+          </a:fontRef>
+        </p:style>
+        <p:txBody>
+          <a:bodyPr rtlCol="0" anchor="ctr" lIns="54864" rIns="54864" wrap="square"/>
+          <a:lstStyle/>
+          <a:p>
+            <a:pPr algn="ctr"/>
+            <a:r>
+              <a:rPr sz="1500" b="1" i="0">
+                <a:solidFill>
+                  <a:srgbClr val="FFFFFF"/>
+                </a:solidFill>
+                <a:latin typeface="Arial"/>
+              </a:rPr>
+              <a:t>1</a:t>
+            </a:r>
+          </a:p>
+        </p:txBody>
+      </p:sp>
+      <p:sp>
+        <p:nvSpPr>
+          <p:cNvPr id="17413" name="TextBox 17412"/>
+          <p:cNvSpPr txBox="1"/>
+          <p:nvPr/>
+        </p:nvSpPr>
+        <p:spPr>
+          <a:xfrm>
+            <a:off x="914400" y="1243584"/>
+            <a:ext cx="5029200" cy="274320"/>
+          </a:xfrm>
+          <a:prstGeom prst="rect">
+            <a:avLst/>
+          </a:prstGeom>
+          <a:noFill/>
+        </p:spPr>
+        <p:txBody>
+          <a:bodyPr wrap="square" anchor="t" lIns="36576" rIns="36576" tIns="18288" bIns="18288">
+            <a:spAutoFit/>
+          </a:bodyPr>
+          <a:lstStyle/>
+          <a:p>
+            <a:pPr algn="l">
+              <a:spcAft>
+                <a:spcPts val="400"/>
+              </a:spcAft>
+            </a:pPr>
+            <a:r>
+              <a:rPr sz="1150" b="1" i="0">
+                <a:solidFill>
+                  <a:srgbClr val="1F3864"/>
+                </a:solidFill>
+                <a:latin typeface="Arial"/>
+              </a:rPr>
+              <a:t>India flood losses</a:t>
+            </a:r>
+          </a:p>
+        </p:txBody>
+      </p:sp>
+      <p:sp>
+        <p:nvSpPr>
+          <p:cNvPr id="17414" name="TextBox 17413"/>
+          <p:cNvSpPr txBox="1"/>
+          <p:nvPr/>
+        </p:nvSpPr>
+        <p:spPr>
+          <a:xfrm>
+            <a:off x="914400" y="1517904"/>
+            <a:ext cx="5029200" cy="438912"/>
+          </a:xfrm>
+          <a:prstGeom prst="rect">
+            <a:avLst/>
+          </a:prstGeom>
+          <a:noFill/>
+        </p:spPr>
+        <p:txBody>
+          <a:bodyPr wrap="square" anchor="t" lIns="36576" rIns="36576" tIns="18288" bIns="18288">
+            <a:spAutoFit/>
+          </a:bodyPr>
+          <a:lstStyle/>
+          <a:p>
+            <a:pPr algn="l">
+              <a:spcAft>
+                <a:spcPts val="400"/>
+              </a:spcAft>
+            </a:pPr>
+            <a:r>
+              <a:rPr sz="950" b="0" i="0">
+                <a:solidFill>
+                  <a:srgbClr val="555E6B"/>
+                </a:solidFill>
+                <a:latin typeface="Arial"/>
+              </a:rPr>
+              <a:t>UNISDR Global Assessment Report 2015: India AAL ≈ USD 9.8 bn/yr, floods USD 7.4 bn.</a:t>
+            </a:r>
+          </a:p>
+        </p:txBody>
+      </p:sp>
+      <p:sp>
+        <p:nvSpPr>
+          <p:cNvPr id="17415" name="Rectangle 17414"/>
+          <p:cNvSpPr/>
+          <p:nvPr/>
+        </p:nvSpPr>
+        <p:spPr>
+          <a:xfrm>
+            <a:off x="6153912" y="1188720"/>
+            <a:ext cx="5715000" cy="768096"/>
+          </a:xfrm>
+          <a:prstGeom prst="rect">
+            <a:avLst/>
+          </a:prstGeom>
+          <a:solidFill>
+            <a:srgbClr val="EEF3FA"/>
+          </a:solidFill>
+          <a:ln w="12700">
+            <a:solidFill>
+              <a:srgbClr val="C9D6E8"/>
+            </a:solidFill>
+          </a:ln>
+          <a:effectLst/>
+        </p:spPr>
+        <p:style>
+          <a:lnRef idx="1">
+            <a:schemeClr val="accent1"/>
+          </a:lnRef>
+          <a:fillRef idx="3">
+            <a:schemeClr val="accent1"/>
+          </a:fillRef>
+          <a:effectRef idx="2">
+            <a:schemeClr val="accent1"/>
+          </a:effectRef>
+          <a:fontRef idx="minor">
+            <a:schemeClr val="lt1"/>
+          </a:fontRef>
+        </p:style>
+        <p:txBody>
+          <a:bodyPr rtlCol="0" anchor="ctr" lIns="54864" rIns="54864"/>
+          <a:lstStyle/>
+          <a:p>
+            <a:pPr algn="ctr"/>
+          </a:p>
+        </p:txBody>
+      </p:sp>
+      <p:sp>
+        <p:nvSpPr>
+          <p:cNvPr id="17416" name="Rectangle 17415"/>
+          <p:cNvSpPr/>
+          <p:nvPr/>
+        </p:nvSpPr>
+        <p:spPr>
+          <a:xfrm>
+            <a:off x="6153912" y="1188720"/>
+            <a:ext cx="502920" cy="768096"/>
+          </a:xfrm>
+          <a:prstGeom prst="rect">
+            <a:avLst/>
+          </a:prstGeom>
+          <a:solidFill>
+            <a:srgbClr val="0070C0"/>
+          </a:solidFill>
+          <a:ln>
+            <a:noFill/>
+          </a:ln>
+          <a:effectLst/>
+        </p:spPr>
+        <p:style>
+          <a:lnRef idx="1">
+            <a:schemeClr val="accent1"/>
+          </a:lnRef>
+          <a:fillRef idx="3">
+            <a:schemeClr val="accent1"/>
+          </a:fillRef>
+          <a:effectRef idx="2">
+            <a:schemeClr val="accent1"/>
+          </a:effectRef>
+          <a:fontRef idx="minor">
+            <a:schemeClr val="lt1"/>
+          </a:fontRef>
+        </p:style>
+        <p:txBody>
+          <a:bodyPr rtlCol="0" anchor="ctr" lIns="54864" rIns="54864" wrap="square"/>
+          <a:lstStyle/>
+          <a:p>
+            <a:pPr algn="ctr"/>
+            <a:r>
+              <a:rPr sz="1500" b="1" i="0">
+                <a:solidFill>
+                  <a:srgbClr val="FFFFFF"/>
+                </a:solidFill>
+                <a:latin typeface="Arial"/>
+              </a:rPr>
+              <a:t>2</a:t>
+            </a:r>
+          </a:p>
+        </p:txBody>
+      </p:sp>
+      <p:sp>
+        <p:nvSpPr>
+          <p:cNvPr id="17417" name="TextBox 17416"/>
+          <p:cNvSpPr txBox="1"/>
+          <p:nvPr/>
+        </p:nvSpPr>
+        <p:spPr>
+          <a:xfrm>
+            <a:off x="6748272" y="1243584"/>
+            <a:ext cx="5029200" cy="274320"/>
+          </a:xfrm>
+          <a:prstGeom prst="rect">
+            <a:avLst/>
+          </a:prstGeom>
+          <a:noFill/>
+        </p:spPr>
+        <p:txBody>
+          <a:bodyPr wrap="square" anchor="t" lIns="36576" rIns="36576" tIns="18288" bIns="18288">
+            <a:spAutoFit/>
+          </a:bodyPr>
+          <a:lstStyle/>
+          <a:p>
+            <a:pPr algn="l">
+              <a:spcAft>
+                <a:spcPts val="400"/>
+              </a:spcAft>
+            </a:pPr>
+            <a:r>
+              <a:rPr sz="1150" b="1" i="0">
+                <a:solidFill>
+                  <a:srgbClr val="1F3864"/>
+                </a:solidFill>
+                <a:latin typeface="Arial"/>
+              </a:rPr>
+              <a:t>Elevation survey cost</a:t>
+            </a:r>
+          </a:p>
+        </p:txBody>
+      </p:sp>
+      <p:sp>
+        <p:nvSpPr>
+          <p:cNvPr id="17418" name="TextBox 17417"/>
+          <p:cNvSpPr txBox="1"/>
+          <p:nvPr/>
+        </p:nvSpPr>
+        <p:spPr>
+          <a:xfrm>
+            <a:off x="6748272" y="1517904"/>
+            <a:ext cx="5029200" cy="438912"/>
+          </a:xfrm>
+          <a:prstGeom prst="rect">
+            <a:avLst/>
+          </a:prstGeom>
+          <a:noFill/>
+        </p:spPr>
+        <p:txBody>
+          <a:bodyPr wrap="square" anchor="t" lIns="36576" rIns="36576" tIns="18288" bIns="18288">
+            <a:spAutoFit/>
+          </a:bodyPr>
+          <a:lstStyle/>
+          <a:p>
+            <a:pPr algn="l">
+              <a:spcAft>
+                <a:spcPts val="400"/>
+              </a:spcAft>
+            </a:pPr>
+            <a:r>
+              <a:rPr sz="950" b="0" i="0">
+                <a:solidFill>
+                  <a:srgbClr val="555E6B"/>
+                </a:solidFill>
+                <a:latin typeface="Arial"/>
+              </a:rPr>
+              <a:t>Kapcher / Candrone: LiDAR survey $5k–$100k+; Drone Launch Academy: survey-grade LiDAR over $100k.</a:t>
+            </a:r>
+          </a:p>
+        </p:txBody>
+      </p:sp>
+      <p:sp>
+        <p:nvSpPr>
+          <p:cNvPr id="17419" name="Rectangle 17418"/>
+          <p:cNvSpPr/>
+          <p:nvPr/>
+        </p:nvSpPr>
+        <p:spPr>
+          <a:xfrm>
+            <a:off x="320040" y="2034540"/>
+            <a:ext cx="5715000" cy="768096"/>
+          </a:xfrm>
+          <a:prstGeom prst="rect">
+            <a:avLst/>
+          </a:prstGeom>
+          <a:solidFill>
+            <a:srgbClr val="EEF3FA"/>
+          </a:solidFill>
+          <a:ln w="12700">
+            <a:solidFill>
+              <a:srgbClr val="C9D6E8"/>
+            </a:solidFill>
+          </a:ln>
+          <a:effectLst/>
+        </p:spPr>
+        <p:style>
+          <a:lnRef idx="1">
+            <a:schemeClr val="accent1"/>
+          </a:lnRef>
+          <a:fillRef idx="3">
+            <a:schemeClr val="accent1"/>
+          </a:fillRef>
+          <a:effectRef idx="2">
+            <a:schemeClr val="accent1"/>
+          </a:effectRef>
+          <a:fontRef idx="minor">
+            <a:schemeClr val="lt1"/>
+          </a:fontRef>
+        </p:style>
+        <p:txBody>
+          <a:bodyPr rtlCol="0" anchor="ctr" lIns="54864" rIns="54864"/>
+          <a:lstStyle/>
+          <a:p>
+            <a:pPr algn="ctr"/>
+          </a:p>
+        </p:txBody>
+      </p:sp>
+      <p:sp>
+        <p:nvSpPr>
+          <p:cNvPr id="17420" name="Rectangle 17419"/>
+          <p:cNvSpPr/>
+          <p:nvPr/>
+        </p:nvSpPr>
+        <p:spPr>
+          <a:xfrm>
+            <a:off x="320040" y="2034540"/>
+            <a:ext cx="502920" cy="768096"/>
+          </a:xfrm>
+          <a:prstGeom prst="rect">
+            <a:avLst/>
+          </a:prstGeom>
+          <a:solidFill>
+            <a:srgbClr val="0070C0"/>
+          </a:solidFill>
+          <a:ln>
+            <a:noFill/>
+          </a:ln>
+          <a:effectLst/>
+        </p:spPr>
+        <p:style>
+          <a:lnRef idx="1">
+            <a:schemeClr val="accent1"/>
+          </a:lnRef>
+          <a:fillRef idx="3">
+            <a:schemeClr val="accent1"/>
+          </a:fillRef>
+          <a:effectRef idx="2">
+            <a:schemeClr val="accent1"/>
+          </a:effectRef>
+          <a:fontRef idx="minor">
+            <a:schemeClr val="lt1"/>
+          </a:fontRef>
+        </p:style>
+        <p:txBody>
+          <a:bodyPr rtlCol="0" anchor="ctr" lIns="54864" rIns="54864" wrap="square"/>
+          <a:lstStyle/>
+          <a:p>
+            <a:pPr algn="ctr"/>
+            <a:r>
+              <a:rPr sz="1500" b="1" i="0">
+                <a:solidFill>
+                  <a:srgbClr val="FFFFFF"/>
+                </a:solidFill>
+                <a:latin typeface="Arial"/>
+              </a:rPr>
+              <a:t>3</a:t>
+            </a:r>
+          </a:p>
+        </p:txBody>
+      </p:sp>
+      <p:sp>
+        <p:nvSpPr>
+          <p:cNvPr id="17421" name="TextBox 17420"/>
+          <p:cNvSpPr txBox="1"/>
+          <p:nvPr/>
+        </p:nvSpPr>
+        <p:spPr>
+          <a:xfrm>
+            <a:off x="914400" y="2089404"/>
+            <a:ext cx="5029200" cy="274320"/>
+          </a:xfrm>
+          <a:prstGeom prst="rect">
+            <a:avLst/>
+          </a:prstGeom>
+          <a:noFill/>
+        </p:spPr>
+        <p:txBody>
+          <a:bodyPr wrap="square" anchor="t" lIns="36576" rIns="36576" tIns="18288" bIns="18288">
+            <a:spAutoFit/>
+          </a:bodyPr>
+          <a:lstStyle/>
+          <a:p>
+            <a:pPr algn="l">
+              <a:spcAft>
+                <a:spcPts val="400"/>
+              </a:spcAft>
+            </a:pPr>
+            <a:r>
+              <a:rPr sz="1150" b="1" i="0">
+                <a:solidFill>
+                  <a:srgbClr val="1F3864"/>
+                </a:solidFill>
+                <a:latin typeface="Arial"/>
+              </a:rPr>
+              <a:t>GAMUS dataset</a:t>
+            </a:r>
+          </a:p>
+        </p:txBody>
+      </p:sp>
+      <p:sp>
+        <p:nvSpPr>
+          <p:cNvPr id="17422" name="TextBox 17421"/>
+          <p:cNvSpPr txBox="1"/>
+          <p:nvPr/>
+        </p:nvSpPr>
+        <p:spPr>
+          <a:xfrm>
+            <a:off x="914400" y="2363724"/>
+            <a:ext cx="5029200" cy="438912"/>
+          </a:xfrm>
+          <a:prstGeom prst="rect">
+            <a:avLst/>
+          </a:prstGeom>
+          <a:noFill/>
+        </p:spPr>
+        <p:txBody>
+          <a:bodyPr wrap="square" anchor="t" lIns="36576" rIns="36576" tIns="18288" bIns="18288">
+            <a:spAutoFit/>
+          </a:bodyPr>
+          <a:lstStyle/>
+          <a:p>
+            <a:pPr algn="l">
+              <a:spcAft>
+                <a:spcPts val="400"/>
+              </a:spcAft>
+            </a:pPr>
+            <a:r>
+              <a:rPr sz="950" b="0" i="0">
+                <a:solidFill>
+                  <a:srgbClr val="555E6B"/>
+                </a:solidFill>
+                <a:latin typeface="Arial"/>
+              </a:rPr>
+              <a:t>Xiong et al., “GAMUS: Geometry-aware Multi-modal Semantic Segmentation Benchmark”, arXiv:2305.14914.</a:t>
+            </a:r>
+          </a:p>
+        </p:txBody>
+      </p:sp>
+      <p:sp>
+        <p:nvSpPr>
+          <p:cNvPr id="17423" name="Rectangle 17422"/>
+          <p:cNvSpPr/>
+          <p:nvPr/>
+        </p:nvSpPr>
+        <p:spPr>
+          <a:xfrm>
+            <a:off x="6153912" y="2034540"/>
+            <a:ext cx="5715000" cy="768096"/>
+          </a:xfrm>
+          <a:prstGeom prst="rect">
+            <a:avLst/>
+          </a:prstGeom>
+          <a:solidFill>
+            <a:srgbClr val="EEF3FA"/>
+          </a:solidFill>
+          <a:ln w="12700">
+            <a:solidFill>
+              <a:srgbClr val="C9D6E8"/>
+            </a:solidFill>
+          </a:ln>
+          <a:effectLst/>
+        </p:spPr>
+        <p:style>
+          <a:lnRef idx="1">
+            <a:schemeClr val="accent1"/>
+          </a:lnRef>
+          <a:fillRef idx="3">
+            <a:schemeClr val="accent1"/>
+          </a:fillRef>
+          <a:effectRef idx="2">
+            <a:schemeClr val="accent1"/>
+          </a:effectRef>
+          <a:fontRef idx="minor">
+            <a:schemeClr val="lt1"/>
+          </a:fontRef>
+        </p:style>
+        <p:txBody>
+          <a:bodyPr rtlCol="0" anchor="ctr" lIns="54864" rIns="54864"/>
+          <a:lstStyle/>
+          <a:p>
+            <a:pPr algn="ctr"/>
+          </a:p>
+        </p:txBody>
+      </p:sp>
+      <p:sp>
+        <p:nvSpPr>
+          <p:cNvPr id="17424" name="Rectangle 17423"/>
+          <p:cNvSpPr/>
+          <p:nvPr/>
+        </p:nvSpPr>
+        <p:spPr>
+          <a:xfrm>
+            <a:off x="6153912" y="2034540"/>
+            <a:ext cx="502920" cy="768096"/>
+          </a:xfrm>
+          <a:prstGeom prst="rect">
+            <a:avLst/>
+          </a:prstGeom>
+          <a:solidFill>
+            <a:srgbClr val="0070C0"/>
+          </a:solidFill>
+          <a:ln>
+            <a:noFill/>
+          </a:ln>
+          <a:effectLst/>
+        </p:spPr>
+        <p:style>
+          <a:lnRef idx="1">
+            <a:schemeClr val="accent1"/>
+          </a:lnRef>
+          <a:fillRef idx="3">
+            <a:schemeClr val="accent1"/>
+          </a:fillRef>
+          <a:effectRef idx="2">
+            <a:schemeClr val="accent1"/>
+          </a:effectRef>
+          <a:fontRef idx="minor">
+            <a:schemeClr val="lt1"/>
+          </a:fontRef>
+        </p:style>
+        <p:txBody>
+          <a:bodyPr rtlCol="0" anchor="ctr" lIns="54864" rIns="54864" wrap="square"/>
+          <a:lstStyle/>
+          <a:p>
+            <a:pPr algn="ctr"/>
+            <a:r>
+              <a:rPr sz="1500" b="1" i="0">
+                <a:solidFill>
+                  <a:srgbClr val="FFFFFF"/>
+                </a:solidFill>
+                <a:latin typeface="Arial"/>
+              </a:rPr>
+              <a:t>4</a:t>
+            </a:r>
+          </a:p>
+        </p:txBody>
+      </p:sp>
+      <p:sp>
+        <p:nvSpPr>
+          <p:cNvPr id="17425" name="TextBox 17424"/>
+          <p:cNvSpPr txBox="1"/>
+          <p:nvPr/>
+        </p:nvSpPr>
+        <p:spPr>
+          <a:xfrm>
+            <a:off x="6748272" y="2089404"/>
+            <a:ext cx="5029200" cy="274320"/>
+          </a:xfrm>
+          <a:prstGeom prst="rect">
+            <a:avLst/>
+          </a:prstGeom>
+          <a:noFill/>
+        </p:spPr>
+        <p:txBody>
+          <a:bodyPr wrap="square" anchor="t" lIns="36576" rIns="36576" tIns="18288" bIns="18288">
+            <a:spAutoFit/>
+          </a:bodyPr>
+          <a:lstStyle/>
+          <a:p>
+            <a:pPr algn="l">
+              <a:spcAft>
+                <a:spcPts val="400"/>
+              </a:spcAft>
+            </a:pPr>
+            <a:r>
+              <a:rPr sz="1150" b="1" i="0">
+                <a:solidFill>
+                  <a:srgbClr val="1F3864"/>
+                </a:solidFill>
+                <a:latin typeface="Arial"/>
+              </a:rPr>
+              <a:t>DINOv3</a:t>
+            </a:r>
+          </a:p>
+        </p:txBody>
+      </p:sp>
+      <p:sp>
+        <p:nvSpPr>
+          <p:cNvPr id="17426" name="TextBox 17425"/>
+          <p:cNvSpPr txBox="1"/>
+          <p:nvPr/>
+        </p:nvSpPr>
+        <p:spPr>
+          <a:xfrm>
+            <a:off x="6748272" y="2363724"/>
+            <a:ext cx="5029200" cy="438912"/>
+          </a:xfrm>
+          <a:prstGeom prst="rect">
+            <a:avLst/>
+          </a:prstGeom>
+          <a:noFill/>
+        </p:spPr>
+        <p:txBody>
+          <a:bodyPr wrap="square" anchor="t" lIns="36576" rIns="36576" tIns="18288" bIns="18288">
+            <a:spAutoFit/>
+          </a:bodyPr>
+          <a:lstStyle/>
+          <a:p>
+            <a:pPr algn="l">
+              <a:spcAft>
+                <a:spcPts val="400"/>
+              </a:spcAft>
+            </a:pPr>
+            <a:r>
+              <a:rPr sz="950" b="0" i="0">
+                <a:solidFill>
+                  <a:srgbClr val="555E6B"/>
+                </a:solidFill>
+                <a:latin typeface="Arial"/>
+              </a:rPr>
+              <a:t>Meta AI, 2025: self-supervised vision model; SAT-493M satellite weights (our frozen encoder).</a:t>
+            </a:r>
+          </a:p>
+        </p:txBody>
+      </p:sp>
+      <p:sp>
+        <p:nvSpPr>
+          <p:cNvPr id="17427" name="Rectangle 17426"/>
+          <p:cNvSpPr/>
+          <p:nvPr/>
+        </p:nvSpPr>
+        <p:spPr>
+          <a:xfrm>
+            <a:off x="320040" y="2880360"/>
+            <a:ext cx="5715000" cy="768096"/>
+          </a:xfrm>
+          <a:prstGeom prst="rect">
+            <a:avLst/>
+          </a:prstGeom>
+          <a:solidFill>
+            <a:srgbClr val="EEF3FA"/>
+          </a:solidFill>
+          <a:ln w="12700">
+            <a:solidFill>
+              <a:srgbClr val="C9D6E8"/>
+            </a:solidFill>
+          </a:ln>
+          <a:effectLst/>
+        </p:spPr>
+        <p:style>
+          <a:lnRef idx="1">
+            <a:schemeClr val="accent1"/>
+          </a:lnRef>
+          <a:fillRef idx="3">
+            <a:schemeClr val="accent1"/>
+          </a:fillRef>
+          <a:effectRef idx="2">
+            <a:schemeClr val="accent1"/>
+          </a:effectRef>
+          <a:fontRef idx="minor">
+            <a:schemeClr val="lt1"/>
+          </a:fontRef>
+        </p:style>
+        <p:txBody>
+          <a:bodyPr rtlCol="0" anchor="ctr" lIns="54864" rIns="54864"/>
+          <a:lstStyle/>
+          <a:p>
+            <a:pPr algn="ctr"/>
+          </a:p>
+        </p:txBody>
+      </p:sp>
+      <p:sp>
+        <p:nvSpPr>
+          <p:cNvPr id="17428" name="Rectangle 17427"/>
+          <p:cNvSpPr/>
+          <p:nvPr/>
+        </p:nvSpPr>
+        <p:spPr>
+          <a:xfrm>
+            <a:off x="320040" y="2880360"/>
+            <a:ext cx="502920" cy="768096"/>
+          </a:xfrm>
+          <a:prstGeom prst="rect">
+            <a:avLst/>
+          </a:prstGeom>
+          <a:solidFill>
+            <a:srgbClr val="0070C0"/>
+          </a:solidFill>
+          <a:ln>
+            <a:noFill/>
+          </a:ln>
+          <a:effectLst/>
+        </p:spPr>
+        <p:style>
+          <a:lnRef idx="1">
+            <a:schemeClr val="accent1"/>
+          </a:lnRef>
+          <a:fillRef idx="3">
+            <a:schemeClr val="accent1"/>
+          </a:fillRef>
+          <a:effectRef idx="2">
+            <a:schemeClr val="accent1"/>
+          </a:effectRef>
+          <a:fontRef idx="minor">
+            <a:schemeClr val="lt1"/>
+          </a:fontRef>
+        </p:style>
+        <p:txBody>
+          <a:bodyPr rtlCol="0" anchor="ctr" lIns="54864" rIns="54864" wrap="square"/>
+          <a:lstStyle/>
+          <a:p>
+            <a:pPr algn="ctr"/>
+            <a:r>
+              <a:rPr sz="1500" b="1" i="0">
+                <a:solidFill>
+                  <a:srgbClr val="FFFFFF"/>
+                </a:solidFill>
+                <a:latin typeface="Arial"/>
+              </a:rPr>
+              <a:t>5</a:t>
+            </a:r>
+          </a:p>
+        </p:txBody>
+      </p:sp>
+      <p:sp>
+        <p:nvSpPr>
+          <p:cNvPr id="17429" name="TextBox 17428"/>
+          <p:cNvSpPr txBox="1"/>
+          <p:nvPr/>
+        </p:nvSpPr>
+        <p:spPr>
+          <a:xfrm>
+            <a:off x="914400" y="2935224"/>
+            <a:ext cx="5029200" cy="274320"/>
+          </a:xfrm>
+          <a:prstGeom prst="rect">
+            <a:avLst/>
+          </a:prstGeom>
+          <a:noFill/>
+        </p:spPr>
+        <p:txBody>
+          <a:bodyPr wrap="square" anchor="t" lIns="36576" rIns="36576" tIns="18288" bIns="18288">
+            <a:spAutoFit/>
+          </a:bodyPr>
+          <a:lstStyle/>
+          <a:p>
+            <a:pPr algn="l">
+              <a:spcAft>
+                <a:spcPts val="400"/>
+              </a:spcAft>
+            </a:pPr>
+            <a:r>
+              <a:rPr sz="1150" b="1" i="0">
+                <a:solidFill>
+                  <a:srgbClr val="1F3864"/>
+                </a:solidFill>
+                <a:latin typeface="Arial"/>
+              </a:rPr>
+              <a:t>DPT head</a:t>
+            </a:r>
+          </a:p>
+        </p:txBody>
+      </p:sp>
+      <p:sp>
+        <p:nvSpPr>
+          <p:cNvPr id="17430" name="TextBox 17429"/>
+          <p:cNvSpPr txBox="1"/>
+          <p:nvPr/>
+        </p:nvSpPr>
+        <p:spPr>
+          <a:xfrm>
+            <a:off x="914400" y="3209544"/>
+            <a:ext cx="5029200" cy="438912"/>
+          </a:xfrm>
+          <a:prstGeom prst="rect">
+            <a:avLst/>
+          </a:prstGeom>
+          <a:noFill/>
+        </p:spPr>
+        <p:txBody>
+          <a:bodyPr wrap="square" anchor="t" lIns="36576" rIns="36576" tIns="18288" bIns="18288">
+            <a:spAutoFit/>
+          </a:bodyPr>
+          <a:lstStyle/>
+          <a:p>
+            <a:pPr algn="l">
+              <a:spcAft>
+                <a:spcPts val="400"/>
+              </a:spcAft>
+            </a:pPr>
+            <a:r>
+              <a:rPr sz="950" b="0" i="0">
+                <a:solidFill>
+                  <a:srgbClr val="555E6B"/>
+                </a:solidFill>
+                <a:latin typeface="Arial"/>
+              </a:rPr>
+              <a:t>Ranftl et al., “Vision Transformers for Dense Prediction”, ICCV 2021.</a:t>
+            </a:r>
+          </a:p>
+        </p:txBody>
+      </p:sp>
+      <p:sp>
+        <p:nvSpPr>
+          <p:cNvPr id="17431" name="Rectangle 17430"/>
+          <p:cNvSpPr/>
+          <p:nvPr/>
+        </p:nvSpPr>
+        <p:spPr>
+          <a:xfrm>
+            <a:off x="6153912" y="2880360"/>
+            <a:ext cx="5715000" cy="768096"/>
+          </a:xfrm>
+          <a:prstGeom prst="rect">
+            <a:avLst/>
+          </a:prstGeom>
+          <a:solidFill>
+            <a:srgbClr val="EEF3FA"/>
+          </a:solidFill>
+          <a:ln w="12700">
+            <a:solidFill>
+              <a:srgbClr val="C9D6E8"/>
+            </a:solidFill>
+          </a:ln>
+          <a:effectLst/>
+        </p:spPr>
+        <p:style>
+          <a:lnRef idx="1">
+            <a:schemeClr val="accent1"/>
+          </a:lnRef>
+          <a:fillRef idx="3">
+            <a:schemeClr val="accent1"/>
+          </a:fillRef>
+          <a:effectRef idx="2">
+            <a:schemeClr val="accent1"/>
+          </a:effectRef>
+          <a:fontRef idx="minor">
+            <a:schemeClr val="lt1"/>
+          </a:fontRef>
+        </p:style>
+        <p:txBody>
+          <a:bodyPr rtlCol="0" anchor="ctr" lIns="54864" rIns="54864"/>
+          <a:lstStyle/>
+          <a:p>
+            <a:pPr algn="ctr"/>
+          </a:p>
+        </p:txBody>
+      </p:sp>
+      <p:sp>
+        <p:nvSpPr>
+          <p:cNvPr id="17432" name="Rectangle 17431"/>
+          <p:cNvSpPr/>
+          <p:nvPr/>
+        </p:nvSpPr>
+        <p:spPr>
+          <a:xfrm>
+            <a:off x="6153912" y="2880360"/>
+            <a:ext cx="502920" cy="768096"/>
+          </a:xfrm>
+          <a:prstGeom prst="rect">
+            <a:avLst/>
+          </a:prstGeom>
+          <a:solidFill>
+            <a:srgbClr val="0070C0"/>
+          </a:solidFill>
+          <a:ln>
+            <a:noFill/>
+          </a:ln>
+          <a:effectLst/>
+        </p:spPr>
+        <p:style>
+          <a:lnRef idx="1">
+            <a:schemeClr val="accent1"/>
+          </a:lnRef>
+          <a:fillRef idx="3">
+            <a:schemeClr val="accent1"/>
+          </a:fillRef>
+          <a:effectRef idx="2">
+            <a:schemeClr val="accent1"/>
+          </a:effectRef>
+          <a:fontRef idx="minor">
+            <a:schemeClr val="lt1"/>
+          </a:fontRef>
+        </p:style>
+        <p:txBody>
+          <a:bodyPr rtlCol="0" anchor="ctr" lIns="54864" rIns="54864" wrap="square"/>
+          <a:lstStyle/>
+          <a:p>
+            <a:pPr algn="ctr"/>
+            <a:r>
+              <a:rPr sz="1500" b="1" i="0">
+                <a:solidFill>
+                  <a:srgbClr val="FFFFFF"/>
+                </a:solidFill>
+                <a:latin typeface="Arial"/>
+              </a:rPr>
+              <a:t>6</a:t>
+            </a:r>
+          </a:p>
+        </p:txBody>
+      </p:sp>
+      <p:sp>
+        <p:nvSpPr>
+          <p:cNvPr id="17433" name="TextBox 17432"/>
+          <p:cNvSpPr txBox="1"/>
+          <p:nvPr/>
+        </p:nvSpPr>
+        <p:spPr>
+          <a:xfrm>
+            <a:off x="6748272" y="2935224"/>
+            <a:ext cx="5029200" cy="274320"/>
+          </a:xfrm>
+          <a:prstGeom prst="rect">
+            <a:avLst/>
+          </a:prstGeom>
+          <a:noFill/>
+        </p:spPr>
+        <p:txBody>
+          <a:bodyPr wrap="square" anchor="t" lIns="36576" rIns="36576" tIns="18288" bIns="18288">
+            <a:spAutoFit/>
+          </a:bodyPr>
+          <a:lstStyle/>
+          <a:p>
+            <a:pPr algn="l">
+              <a:spcAft>
+                <a:spcPts val="400"/>
+              </a:spcAft>
+            </a:pPr>
+            <a:r>
+              <a:rPr sz="1150" b="1" i="0">
+                <a:solidFill>
+                  <a:srgbClr val="1F3864"/>
+                </a:solidFill>
+                <a:latin typeface="Arial"/>
+              </a:rPr>
+              <a:t>RS3DAda baseline</a:t>
+            </a:r>
+          </a:p>
+        </p:txBody>
+      </p:sp>
+      <p:sp>
+        <p:nvSpPr>
+          <p:cNvPr id="17434" name="TextBox 17433"/>
+          <p:cNvSpPr txBox="1"/>
+          <p:nvPr/>
+        </p:nvSpPr>
+        <p:spPr>
+          <a:xfrm>
+            <a:off x="6748272" y="3209544"/>
+            <a:ext cx="5029200" cy="438912"/>
+          </a:xfrm>
+          <a:prstGeom prst="rect">
+            <a:avLst/>
+          </a:prstGeom>
+          <a:noFill/>
+        </p:spPr>
+        <p:txBody>
+          <a:bodyPr wrap="square" anchor="t" lIns="36576" rIns="36576" tIns="18288" bIns="18288">
+            <a:spAutoFit/>
+          </a:bodyPr>
+          <a:lstStyle/>
+          <a:p>
+            <a:pPr algn="l">
+              <a:spcAft>
+                <a:spcPts val="400"/>
+              </a:spcAft>
+            </a:pPr>
+            <a:r>
+              <a:rPr sz="950" b="0" i="0">
+                <a:solidFill>
+                  <a:srgbClr val="555E6B"/>
+                </a:solidFill>
+                <a:latin typeface="Arial"/>
+              </a:rPr>
+              <a:t>Song et al., “SynRS3D”, NeurIPS 2024, arXiv:2406.18151: public weights, run by us.</a:t>
+            </a:r>
+          </a:p>
+        </p:txBody>
+      </p:sp>
+      <p:sp>
+        <p:nvSpPr>
+          <p:cNvPr id="17435" name="Rectangle 17434"/>
+          <p:cNvSpPr/>
+          <p:nvPr/>
+        </p:nvSpPr>
+        <p:spPr>
+          <a:xfrm>
+            <a:off x="320040" y="3726180"/>
+            <a:ext cx="5715000" cy="768096"/>
+          </a:xfrm>
+          <a:prstGeom prst="rect">
+            <a:avLst/>
+          </a:prstGeom>
+          <a:solidFill>
+            <a:srgbClr val="EEF3FA"/>
+          </a:solidFill>
+          <a:ln w="12700">
+            <a:solidFill>
+              <a:srgbClr val="C9D6E8"/>
+            </a:solidFill>
+          </a:ln>
+          <a:effectLst/>
+        </p:spPr>
+        <p:style>
+          <a:lnRef idx="1">
+            <a:schemeClr val="accent1"/>
+          </a:lnRef>
+          <a:fillRef idx="3">
+            <a:schemeClr val="accent1"/>
+          </a:fillRef>
+          <a:effectRef idx="2">
+            <a:schemeClr val="accent1"/>
+          </a:effectRef>
+          <a:fontRef idx="minor">
+            <a:schemeClr val="lt1"/>
+          </a:fontRef>
+        </p:style>
+        <p:txBody>
+          <a:bodyPr rtlCol="0" anchor="ctr" lIns="54864" rIns="54864"/>
+          <a:lstStyle/>
+          <a:p>
+            <a:pPr algn="ctr"/>
+          </a:p>
+        </p:txBody>
+      </p:sp>
+      <p:sp>
+        <p:nvSpPr>
+          <p:cNvPr id="17436" name="Rectangle 17435"/>
+          <p:cNvSpPr/>
+          <p:nvPr/>
+        </p:nvSpPr>
+        <p:spPr>
+          <a:xfrm>
+            <a:off x="320040" y="3726180"/>
+            <a:ext cx="502920" cy="768096"/>
+          </a:xfrm>
+          <a:prstGeom prst="rect">
+            <a:avLst/>
+          </a:prstGeom>
+          <a:solidFill>
+            <a:srgbClr val="0070C0"/>
+          </a:solidFill>
+          <a:ln>
+            <a:noFill/>
+          </a:ln>
+          <a:effectLst/>
+        </p:spPr>
+        <p:style>
+          <a:lnRef idx="1">
+            <a:schemeClr val="accent1"/>
+          </a:lnRef>
+          <a:fillRef idx="3">
+            <a:schemeClr val="accent1"/>
+          </a:fillRef>
+          <a:effectRef idx="2">
+            <a:schemeClr val="accent1"/>
+          </a:effectRef>
+          <a:fontRef idx="minor">
+            <a:schemeClr val="lt1"/>
+          </a:fontRef>
+        </p:style>
+        <p:txBody>
+          <a:bodyPr rtlCol="0" anchor="ctr" lIns="54864" rIns="54864" wrap="square"/>
+          <a:lstStyle/>
+          <a:p>
+            <a:pPr algn="ctr"/>
+            <a:r>
+              <a:rPr sz="1500" b="1" i="0">
+                <a:solidFill>
+                  <a:srgbClr val="FFFFFF"/>
+                </a:solidFill>
+                <a:latin typeface="Arial"/>
+              </a:rPr>
+              <a:t>7</a:t>
+            </a:r>
+          </a:p>
+        </p:txBody>
+      </p:sp>
+      <p:sp>
+        <p:nvSpPr>
+          <p:cNvPr id="17437" name="TextBox 17436"/>
+          <p:cNvSpPr txBox="1"/>
+          <p:nvPr/>
+        </p:nvSpPr>
+        <p:spPr>
+          <a:xfrm>
+            <a:off x="914400" y="3781044"/>
+            <a:ext cx="5029200" cy="274320"/>
+          </a:xfrm>
+          <a:prstGeom prst="rect">
+            <a:avLst/>
+          </a:prstGeom>
+          <a:noFill/>
+        </p:spPr>
+        <p:txBody>
+          <a:bodyPr wrap="square" anchor="t" lIns="36576" rIns="36576" tIns="18288" bIns="18288">
+            <a:spAutoFit/>
+          </a:bodyPr>
+          <a:lstStyle/>
+          <a:p>
+            <a:pPr algn="l">
+              <a:spcAft>
+                <a:spcPts val="400"/>
+              </a:spcAft>
+            </a:pPr>
+            <a:r>
+              <a:rPr sz="1150" b="1" i="0">
+                <a:solidFill>
+                  <a:srgbClr val="1F3864"/>
+                </a:solidFill>
+                <a:latin typeface="Arial"/>
+              </a:rPr>
+              <a:t>Terrain map</a:t>
+            </a:r>
+          </a:p>
+        </p:txBody>
+      </p:sp>
+      <p:sp>
+        <p:nvSpPr>
+          <p:cNvPr id="17438" name="TextBox 17437"/>
+          <p:cNvSpPr txBox="1"/>
+          <p:nvPr/>
+        </p:nvSpPr>
+        <p:spPr>
+          <a:xfrm>
+            <a:off x="914400" y="4055364"/>
+            <a:ext cx="5029200" cy="438912"/>
+          </a:xfrm>
+          <a:prstGeom prst="rect">
+            <a:avLst/>
+          </a:prstGeom>
+          <a:noFill/>
+        </p:spPr>
+        <p:txBody>
+          <a:bodyPr wrap="square" anchor="t" lIns="36576" rIns="36576" tIns="18288" bIns="18288">
+            <a:spAutoFit/>
+          </a:bodyPr>
+          <a:lstStyle/>
+          <a:p>
+            <a:pPr algn="l">
+              <a:spcAft>
+                <a:spcPts val="400"/>
+              </a:spcAft>
+            </a:pPr>
+            <a:r>
+              <a:rPr sz="950" b="0" i="0">
+                <a:solidFill>
+                  <a:srgbClr val="555E6B"/>
+                </a:solidFill>
+                <a:latin typeface="Arial"/>
+              </a:rPr>
+              <a:t>Copernicus DEM GLO-30 (ESA / Airbus), 30 m; SRTM 30 m also supported.</a:t>
+            </a:r>
+          </a:p>
+        </p:txBody>
+      </p:sp>
+      <p:sp>
+        <p:nvSpPr>
+          <p:cNvPr id="17439" name="Rectangle 17438"/>
+          <p:cNvSpPr/>
+          <p:nvPr/>
+        </p:nvSpPr>
+        <p:spPr>
+          <a:xfrm>
+            <a:off x="6153912" y="3726180"/>
+            <a:ext cx="5715000" cy="768096"/>
+          </a:xfrm>
+          <a:prstGeom prst="rect">
+            <a:avLst/>
+          </a:prstGeom>
+          <a:solidFill>
+            <a:srgbClr val="EEF3FA"/>
+          </a:solidFill>
+          <a:ln w="12700">
+            <a:solidFill>
+              <a:srgbClr val="C9D6E8"/>
+            </a:solidFill>
+          </a:ln>
+          <a:effectLst/>
+        </p:spPr>
+        <p:style>
+          <a:lnRef idx="1">
+            <a:schemeClr val="accent1"/>
+          </a:lnRef>
+          <a:fillRef idx="3">
+            <a:schemeClr val="accent1"/>
+          </a:fillRef>
+          <a:effectRef idx="2">
+            <a:schemeClr val="accent1"/>
+          </a:effectRef>
+          <a:fontRef idx="minor">
+            <a:schemeClr val="lt1"/>
+          </a:fontRef>
+        </p:style>
+        <p:txBody>
+          <a:bodyPr rtlCol="0" anchor="ctr" lIns="54864" rIns="54864"/>
+          <a:lstStyle/>
+          <a:p>
+            <a:pPr algn="ctr"/>
+          </a:p>
+        </p:txBody>
+      </p:sp>
+      <p:sp>
+        <p:nvSpPr>
+          <p:cNvPr id="17440" name="Rectangle 17439"/>
+          <p:cNvSpPr/>
+          <p:nvPr/>
+        </p:nvSpPr>
+        <p:spPr>
+          <a:xfrm>
+            <a:off x="6153912" y="3726180"/>
+            <a:ext cx="502920" cy="768096"/>
+          </a:xfrm>
+          <a:prstGeom prst="rect">
+            <a:avLst/>
+          </a:prstGeom>
+          <a:solidFill>
+            <a:srgbClr val="0070C0"/>
+          </a:solidFill>
+          <a:ln>
+            <a:noFill/>
+          </a:ln>
+          <a:effectLst/>
+        </p:spPr>
+        <p:style>
+          <a:lnRef idx="1">
+            <a:schemeClr val="accent1"/>
+          </a:lnRef>
+          <a:fillRef idx="3">
+            <a:schemeClr val="accent1"/>
+          </a:fillRef>
+          <a:effectRef idx="2">
+            <a:schemeClr val="accent1"/>
+          </a:effectRef>
+          <a:fontRef idx="minor">
+            <a:schemeClr val="lt1"/>
+          </a:fontRef>
+        </p:style>
+        <p:txBody>
+          <a:bodyPr rtlCol="0" anchor="ctr" lIns="54864" rIns="54864" wrap="square"/>
+          <a:lstStyle/>
+          <a:p>
+            <a:pPr algn="ctr"/>
+            <a:r>
+              <a:rPr sz="1500" b="1" i="0">
+                <a:solidFill>
+                  <a:srgbClr val="FFFFFF"/>
+                </a:solidFill>
+                <a:latin typeface="Arial"/>
+              </a:rPr>
+              <a:t>8</a:t>
+            </a:r>
+          </a:p>
+        </p:txBody>
+      </p:sp>
+      <p:sp>
+        <p:nvSpPr>
+          <p:cNvPr id="17441" name="TextBox 17440"/>
+          <p:cNvSpPr txBox="1"/>
+          <p:nvPr/>
+        </p:nvSpPr>
+        <p:spPr>
+          <a:xfrm>
+            <a:off x="6748272" y="3781044"/>
+            <a:ext cx="5029200" cy="274320"/>
+          </a:xfrm>
+          <a:prstGeom prst="rect">
+            <a:avLst/>
+          </a:prstGeom>
+          <a:noFill/>
+        </p:spPr>
+        <p:txBody>
+          <a:bodyPr wrap="square" anchor="t" lIns="36576" rIns="36576" tIns="18288" bIns="18288">
+            <a:spAutoFit/>
+          </a:bodyPr>
+          <a:lstStyle/>
+          <a:p>
+            <a:pPr algn="l">
+              <a:spcAft>
+                <a:spcPts val="400"/>
+              </a:spcAft>
+            </a:pPr>
+            <a:r>
+              <a:rPr sz="1150" b="1" i="0">
+                <a:solidFill>
+                  <a:srgbClr val="1F3864"/>
+                </a:solidFill>
+                <a:latin typeface="Arial"/>
+              </a:rPr>
+              <a:t>Independent LiDAR check</a:t>
+            </a:r>
+          </a:p>
+        </p:txBody>
+      </p:sp>
+      <p:sp>
+        <p:nvSpPr>
+          <p:cNvPr id="17442" name="TextBox 17441"/>
+          <p:cNvSpPr txBox="1"/>
+          <p:nvPr/>
+        </p:nvSpPr>
+        <p:spPr>
+          <a:xfrm>
+            <a:off x="6748272" y="4055364"/>
+            <a:ext cx="5029200" cy="438912"/>
+          </a:xfrm>
+          <a:prstGeom prst="rect">
+            <a:avLst/>
+          </a:prstGeom>
+          <a:noFill/>
+        </p:spPr>
+        <p:txBody>
+          <a:bodyPr wrap="square" anchor="t" lIns="36576" rIns="36576" tIns="18288" bIns="18288">
+            <a:spAutoFit/>
+          </a:bodyPr>
+          <a:lstStyle/>
+          <a:p>
+            <a:pPr algn="l">
+              <a:spcAft>
+                <a:spcPts val="400"/>
+              </a:spcAft>
+            </a:pPr>
+            <a:r>
+              <a:rPr sz="950" b="0" i="0">
+                <a:solidFill>
+                  <a:srgbClr val="555E6B"/>
+                </a:solidFill>
+                <a:latin typeface="Arial"/>
+              </a:rPr>
+              <a:t>USGS 3D Elevation Program airborne LiDAR + USDA NAIP imagery (public domain).</a:t>
+            </a:r>
+          </a:p>
+        </p:txBody>
+      </p:sp>
+      <p:sp>
+        <p:nvSpPr>
+          <p:cNvPr id="17443" name="Rectangle 17442"/>
+          <p:cNvSpPr/>
+          <p:nvPr/>
+        </p:nvSpPr>
+        <p:spPr>
+          <a:xfrm>
+            <a:off x="320040" y="4572000"/>
+            <a:ext cx="5715000" cy="768096"/>
+          </a:xfrm>
+          <a:prstGeom prst="rect">
+            <a:avLst/>
+          </a:prstGeom>
+          <a:solidFill>
+            <a:srgbClr val="EEF3FA"/>
+          </a:solidFill>
+          <a:ln w="12700">
+            <a:solidFill>
+              <a:srgbClr val="C9D6E8"/>
+            </a:solidFill>
+          </a:ln>
+          <a:effectLst/>
+        </p:spPr>
+        <p:style>
+          <a:lnRef idx="1">
+            <a:schemeClr val="accent1"/>
+          </a:lnRef>
+          <a:fillRef idx="3">
+            <a:schemeClr val="accent1"/>
+          </a:fillRef>
+          <a:effectRef idx="2">
+            <a:schemeClr val="accent1"/>
+          </a:effectRef>
+          <a:fontRef idx="minor">
+            <a:schemeClr val="lt1"/>
+          </a:fontRef>
+        </p:style>
+        <p:txBody>
+          <a:bodyPr rtlCol="0" anchor="ctr" lIns="54864" rIns="54864"/>
+          <a:lstStyle/>
+          <a:p>
+            <a:pPr algn="ctr"/>
+          </a:p>
+        </p:txBody>
+      </p:sp>
+      <p:sp>
+        <p:nvSpPr>
+          <p:cNvPr id="17444" name="Rectangle 17443"/>
+          <p:cNvSpPr/>
+          <p:nvPr/>
+        </p:nvSpPr>
+        <p:spPr>
+          <a:xfrm>
+            <a:off x="320040" y="4572000"/>
+            <a:ext cx="502920" cy="768096"/>
+          </a:xfrm>
+          <a:prstGeom prst="rect">
+            <a:avLst/>
+          </a:prstGeom>
+          <a:solidFill>
+            <a:srgbClr val="0070C0"/>
+          </a:solidFill>
+          <a:ln>
+            <a:noFill/>
+          </a:ln>
+          <a:effectLst/>
+        </p:spPr>
+        <p:style>
+          <a:lnRef idx="1">
+            <a:schemeClr val="accent1"/>
+          </a:lnRef>
+          <a:fillRef idx="3">
+            <a:schemeClr val="accent1"/>
+          </a:fillRef>
+          <a:effectRef idx="2">
+            <a:schemeClr val="accent1"/>
+          </a:effectRef>
+          <a:fontRef idx="minor">
+            <a:schemeClr val="lt1"/>
+          </a:fontRef>
+        </p:style>
+        <p:txBody>
+          <a:bodyPr rtlCol="0" anchor="ctr" lIns="54864" rIns="54864" wrap="square"/>
+          <a:lstStyle/>
+          <a:p>
+            <a:pPr algn="ctr"/>
+            <a:r>
+              <a:rPr sz="1500" b="1" i="0">
+                <a:solidFill>
+                  <a:srgbClr val="FFFFFF"/>
+                </a:solidFill>
+                <a:latin typeface="Arial"/>
+              </a:rPr>
+              <a:t>9</a:t>
+            </a:r>
+          </a:p>
+        </p:txBody>
+      </p:sp>
+      <p:sp>
+        <p:nvSpPr>
+          <p:cNvPr id="17445" name="TextBox 17444"/>
+          <p:cNvSpPr txBox="1"/>
+          <p:nvPr/>
+        </p:nvSpPr>
+        <p:spPr>
+          <a:xfrm>
+            <a:off x="914400" y="4626864"/>
+            <a:ext cx="5029200" cy="274320"/>
+          </a:xfrm>
+          <a:prstGeom prst="rect">
+            <a:avLst/>
+          </a:prstGeom>
+          <a:noFill/>
+        </p:spPr>
+        <p:txBody>
+          <a:bodyPr wrap="square" anchor="t" lIns="36576" rIns="36576" tIns="18288" bIns="18288">
+            <a:spAutoFit/>
+          </a:bodyPr>
+          <a:lstStyle/>
+          <a:p>
+            <a:pPr algn="l">
+              <a:spcAft>
+                <a:spcPts val="400"/>
+              </a:spcAft>
+            </a:pPr>
+            <a:r>
+              <a:rPr sz="1150" b="1" i="0">
+                <a:solidFill>
+                  <a:srgbClr val="1F3864"/>
+                </a:solidFill>
+                <a:latin typeface="Arial"/>
+              </a:rPr>
+              <a:t>Indian test image</a:t>
+            </a:r>
+          </a:p>
+        </p:txBody>
+      </p:sp>
+      <p:sp>
+        <p:nvSpPr>
+          <p:cNvPr id="17446" name="TextBox 17445"/>
+          <p:cNvSpPr txBox="1"/>
+          <p:nvPr/>
+        </p:nvSpPr>
+        <p:spPr>
+          <a:xfrm>
+            <a:off x="914400" y="4901184"/>
+            <a:ext cx="5029200" cy="438912"/>
+          </a:xfrm>
+          <a:prstGeom prst="rect">
+            <a:avLst/>
+          </a:prstGeom>
+          <a:noFill/>
+        </p:spPr>
+        <p:txBody>
+          <a:bodyPr wrap="square" anchor="t" lIns="36576" rIns="36576" tIns="18288" bIns="18288">
+            <a:spAutoFit/>
+          </a:bodyPr>
+          <a:lstStyle/>
+          <a:p>
+            <a:pPr algn="l">
+              <a:spcAft>
+                <a:spcPts val="400"/>
+              </a:spcAft>
+            </a:pPr>
+            <a:r>
+              <a:rPr sz="950" b="0" i="0">
+                <a:solidFill>
+                  <a:srgbClr val="555E6B"/>
+                </a:solidFill>
+                <a:latin typeface="Arial"/>
+              </a:rPr>
+              <a:t>Maxar Open Data Program, WorldView-2, Chungthang, Sikkim (CC BY-NC 4.0).</a:t>
+            </a:r>
+          </a:p>
+        </p:txBody>
+      </p:sp>
+      <p:sp>
+        <p:nvSpPr>
+          <p:cNvPr id="17447" name="Rectangle 17446"/>
+          <p:cNvSpPr/>
+          <p:nvPr/>
+        </p:nvSpPr>
+        <p:spPr>
+          <a:xfrm>
+            <a:off x="6153912" y="4572000"/>
+            <a:ext cx="5715000" cy="768096"/>
+          </a:xfrm>
+          <a:prstGeom prst="rect">
+            <a:avLst/>
+          </a:prstGeom>
+          <a:solidFill>
+            <a:srgbClr val="EEF3FA"/>
+          </a:solidFill>
+          <a:ln w="12700">
+            <a:solidFill>
+              <a:srgbClr val="C9D6E8"/>
+            </a:solidFill>
+          </a:ln>
+          <a:effectLst/>
+        </p:spPr>
+        <p:style>
+          <a:lnRef idx="1">
+            <a:schemeClr val="accent1"/>
+          </a:lnRef>
+          <a:fillRef idx="3">
+            <a:schemeClr val="accent1"/>
+          </a:fillRef>
+          <a:effectRef idx="2">
+            <a:schemeClr val="accent1"/>
+          </a:effectRef>
+          <a:fontRef idx="minor">
+            <a:schemeClr val="lt1"/>
+          </a:fontRef>
+        </p:style>
+        <p:txBody>
+          <a:bodyPr rtlCol="0" anchor="ctr" lIns="54864" rIns="54864"/>
+          <a:lstStyle/>
+          <a:p>
+            <a:pPr algn="ctr"/>
+          </a:p>
+        </p:txBody>
+      </p:sp>
+      <p:sp>
+        <p:nvSpPr>
+          <p:cNvPr id="17448" name="Rectangle 17447"/>
+          <p:cNvSpPr/>
+          <p:nvPr/>
+        </p:nvSpPr>
+        <p:spPr>
+          <a:xfrm>
+            <a:off x="6153912" y="4572000"/>
+            <a:ext cx="502920" cy="768096"/>
+          </a:xfrm>
+          <a:prstGeom prst="rect">
+            <a:avLst/>
+          </a:prstGeom>
+          <a:solidFill>
+            <a:srgbClr val="0070C0"/>
+          </a:solidFill>
+          <a:ln>
+            <a:noFill/>
+          </a:ln>
+          <a:effectLst/>
+        </p:spPr>
+        <p:style>
+          <a:lnRef idx="1">
+            <a:schemeClr val="accent1"/>
+          </a:lnRef>
+          <a:fillRef idx="3">
+            <a:schemeClr val="accent1"/>
+          </a:fillRef>
+          <a:effectRef idx="2">
+            <a:schemeClr val="accent1"/>
+          </a:effectRef>
+          <a:fontRef idx="minor">
+            <a:schemeClr val="lt1"/>
+          </a:fontRef>
+        </p:style>
+        <p:txBody>
+          <a:bodyPr rtlCol="0" anchor="ctr" lIns="54864" rIns="54864" wrap="square"/>
+          <a:lstStyle/>
+          <a:p>
+            <a:pPr algn="ctr"/>
+            <a:r>
+              <a:rPr sz="1500" b="1" i="0">
+                <a:solidFill>
+                  <a:srgbClr val="FFFFFF"/>
+                </a:solidFill>
+                <a:latin typeface="Arial"/>
+              </a:rPr>
+              <a:t>10</a:t>
+            </a:r>
+          </a:p>
+        </p:txBody>
+      </p:sp>
+      <p:sp>
+        <p:nvSpPr>
+          <p:cNvPr id="17449" name="TextBox 17448"/>
+          <p:cNvSpPr txBox="1"/>
+          <p:nvPr/>
+        </p:nvSpPr>
+        <p:spPr>
+          <a:xfrm>
+            <a:off x="6748272" y="4626864"/>
+            <a:ext cx="5029200" cy="274320"/>
+          </a:xfrm>
+          <a:prstGeom prst="rect">
+            <a:avLst/>
+          </a:prstGeom>
+          <a:noFill/>
+        </p:spPr>
+        <p:txBody>
+          <a:bodyPr wrap="square" anchor="t" lIns="36576" rIns="36576" tIns="18288" bIns="18288">
+            <a:spAutoFit/>
+          </a:bodyPr>
+          <a:lstStyle/>
+          <a:p>
+            <a:pPr algn="l">
+              <a:spcAft>
+                <a:spcPts val="400"/>
+              </a:spcAft>
+            </a:pPr>
+            <a:r>
+              <a:rPr sz="1150" b="1" i="0">
+                <a:solidFill>
+                  <a:srgbClr val="1F3864"/>
+                </a:solidFill>
+                <a:latin typeface="Arial"/>
+              </a:rPr>
+              <a:t>Rendering</a:t>
+            </a:r>
+          </a:p>
+        </p:txBody>
+      </p:sp>
+      <p:sp>
+        <p:nvSpPr>
+          <p:cNvPr id="17450" name="TextBox 17449"/>
+          <p:cNvSpPr txBox="1"/>
+          <p:nvPr/>
+        </p:nvSpPr>
+        <p:spPr>
+          <a:xfrm>
+            <a:off x="6748272" y="4901184"/>
+            <a:ext cx="5029200" cy="438912"/>
+          </a:xfrm>
+          <a:prstGeom prst="rect">
+            <a:avLst/>
+          </a:prstGeom>
+          <a:noFill/>
+        </p:spPr>
+        <p:txBody>
+          <a:bodyPr wrap="square" anchor="t" lIns="36576" rIns="36576" tIns="18288" bIns="18288">
+            <a:spAutoFit/>
+          </a:bodyPr>
+          <a:lstStyle/>
+          <a:p>
+            <a:pPr algn="l">
+              <a:spcAft>
+                <a:spcPts val="400"/>
+              </a:spcAft>
+            </a:pPr>
+            <a:r>
+              <a:rPr sz="950" b="0" i="0">
+                <a:solidFill>
+                  <a:srgbClr val="555E6B"/>
+                </a:solidFill>
+                <a:latin typeface="Arial"/>
+              </a:rPr>
+              <a:t>Three.js: WebGL library for the interactive 3D flythrough, bundled for offline use.</a:t>
+            </a:r>
+          </a:p>
+        </p:txBody>
+      </p:sp>
+      <p:sp>
+        <p:nvSpPr>
+          <p:cNvPr id="17451" name="Rectangle 17450"/>
+          <p:cNvSpPr/>
+          <p:nvPr/>
+        </p:nvSpPr>
+        <p:spPr>
+          <a:xfrm>
+            <a:off x="320040" y="5417820"/>
+            <a:ext cx="5715000" cy="768096"/>
+          </a:xfrm>
+          <a:prstGeom prst="rect">
+            <a:avLst/>
+          </a:prstGeom>
+          <a:solidFill>
+            <a:srgbClr val="EEF3FA"/>
+          </a:solidFill>
+          <a:ln w="12700">
+            <a:solidFill>
+              <a:srgbClr val="C9D6E8"/>
+            </a:solidFill>
+          </a:ln>
+          <a:effectLst/>
+        </p:spPr>
+        <p:style>
+          <a:lnRef idx="1">
+            <a:schemeClr val="accent1"/>
+          </a:lnRef>
+          <a:fillRef idx="3">
+            <a:schemeClr val="accent1"/>
+          </a:fillRef>
+          <a:effectRef idx="2">
+            <a:schemeClr val="accent1"/>
+          </a:effectRef>
+          <a:fontRef idx="minor">
+            <a:schemeClr val="lt1"/>
+          </a:fontRef>
+        </p:style>
+        <p:txBody>
+          <a:bodyPr rtlCol="0" anchor="ctr" lIns="54864" rIns="54864"/>
+          <a:lstStyle/>
+          <a:p>
+            <a:pPr algn="ctr"/>
+          </a:p>
+        </p:txBody>
+      </p:sp>
+      <p:sp>
+        <p:nvSpPr>
+          <p:cNvPr id="17452" name="Rectangle 17451"/>
+          <p:cNvSpPr/>
+          <p:nvPr/>
+        </p:nvSpPr>
+        <p:spPr>
+          <a:xfrm>
+            <a:off x="320040" y="5417820"/>
+            <a:ext cx="502920" cy="768096"/>
+          </a:xfrm>
+          <a:prstGeom prst="rect">
+            <a:avLst/>
+          </a:prstGeom>
+          <a:solidFill>
+            <a:srgbClr val="0070C0"/>
+          </a:solidFill>
+          <a:ln>
+            <a:noFill/>
+          </a:ln>
+          <a:effectLst/>
+        </p:spPr>
+        <p:style>
+          <a:lnRef idx="1">
+            <a:schemeClr val="accent1"/>
+          </a:lnRef>
+          <a:fillRef idx="3">
+            <a:schemeClr val="accent1"/>
+          </a:fillRef>
+          <a:effectRef idx="2">
+            <a:schemeClr val="accent1"/>
+          </a:effectRef>
+          <a:fontRef idx="minor">
+            <a:schemeClr val="lt1"/>
+          </a:fontRef>
+        </p:style>
+        <p:txBody>
+          <a:bodyPr rtlCol="0" anchor="ctr" lIns="54864" rIns="54864" wrap="square"/>
+          <a:lstStyle/>
+          <a:p>
+            <a:pPr algn="ctr"/>
+            <a:r>
+              <a:rPr sz="1500" b="1" i="0">
+                <a:solidFill>
+                  <a:srgbClr val="FFFFFF"/>
+                </a:solidFill>
+                <a:latin typeface="Arial"/>
+              </a:rPr>
+              <a:t>11</a:t>
+            </a:r>
+          </a:p>
+        </p:txBody>
+      </p:sp>
+      <p:sp>
+        <p:nvSpPr>
+          <p:cNvPr id="17453" name="TextBox 17452"/>
+          <p:cNvSpPr txBox="1"/>
+          <p:nvPr/>
+        </p:nvSpPr>
+        <p:spPr>
+          <a:xfrm>
+            <a:off x="914400" y="5472683"/>
+            <a:ext cx="5029200" cy="274320"/>
+          </a:xfrm>
+          <a:prstGeom prst="rect">
+            <a:avLst/>
+          </a:prstGeom>
+          <a:noFill/>
+        </p:spPr>
+        <p:txBody>
+          <a:bodyPr wrap="square" anchor="t" lIns="36576" rIns="36576" tIns="18288" bIns="18288">
+            <a:spAutoFit/>
+          </a:bodyPr>
+          <a:lstStyle/>
+          <a:p>
+            <a:pPr algn="l">
+              <a:spcAft>
+                <a:spcPts val="400"/>
+              </a:spcAft>
+            </a:pPr>
+            <a:r>
+              <a:rPr sz="1150" b="1" i="0">
+                <a:solidFill>
+                  <a:srgbClr val="1F3864"/>
+                </a:solidFill>
+                <a:latin typeface="Arial"/>
+              </a:rPr>
+              <a:t>Problem statement</a:t>
+            </a:r>
+          </a:p>
+        </p:txBody>
+      </p:sp>
+      <p:sp>
+        <p:nvSpPr>
+          <p:cNvPr id="17454" name="TextBox 17453"/>
+          <p:cNvSpPr txBox="1"/>
+          <p:nvPr/>
+        </p:nvSpPr>
+        <p:spPr>
+          <a:xfrm>
+            <a:off x="914400" y="5747004"/>
+            <a:ext cx="5029200" cy="438912"/>
+          </a:xfrm>
+          <a:prstGeom prst="rect">
+            <a:avLst/>
+          </a:prstGeom>
+          <a:noFill/>
+        </p:spPr>
+        <p:txBody>
+          <a:bodyPr wrap="square" anchor="t" lIns="36576" rIns="36576" tIns="18288" bIns="18288">
+            <a:spAutoFit/>
+          </a:bodyPr>
+          <a:lstStyle/>
+          <a:p>
+            <a:pPr algn="l">
+              <a:spcAft>
+                <a:spcPts val="400"/>
+              </a:spcAft>
+            </a:pPr>
+            <a:r>
+              <a:rPr sz="950" b="0" i="0">
+                <a:solidFill>
+                  <a:srgbClr val="555E6B"/>
+                </a:solidFill>
+                <a:latin typeface="Arial"/>
+              </a:rPr>
+              <a:t>ISRO SAC, SIH 2026 PS 26175; github.com/IMG-PROCESS-SAC/SIH-DepthWizard-2026</a:t>
+            </a:r>
+          </a:p>
+        </p:txBody>
+      </p:sp>
+      <p:sp>
+        <p:nvSpPr>
+          <p:cNvPr id="17455" name="Rectangle 17454"/>
+          <p:cNvSpPr/>
+          <p:nvPr/>
+        </p:nvSpPr>
+        <p:spPr>
+          <a:xfrm>
+            <a:off x="6153912" y="5417820"/>
+            <a:ext cx="5715000" cy="768096"/>
+          </a:xfrm>
+          <a:prstGeom prst="rect">
+            <a:avLst/>
+          </a:prstGeom>
+          <a:solidFill>
+            <a:srgbClr val="EEF3FA"/>
+          </a:solidFill>
+          <a:ln w="12700">
+            <a:solidFill>
+              <a:srgbClr val="C9D6E8"/>
+            </a:solidFill>
+          </a:ln>
+          <a:effectLst/>
+        </p:spPr>
+        <p:style>
+          <a:lnRef idx="1">
+            <a:schemeClr val="accent1"/>
+          </a:lnRef>
+          <a:fillRef idx="3">
+            <a:schemeClr val="accent1"/>
+          </a:fillRef>
+          <a:effectRef idx="2">
+            <a:schemeClr val="accent1"/>
+          </a:effectRef>
+          <a:fontRef idx="minor">
+            <a:schemeClr val="lt1"/>
+          </a:fontRef>
+        </p:style>
+        <p:txBody>
+          <a:bodyPr rtlCol="0" anchor="ctr" lIns="54864" rIns="54864"/>
+          <a:lstStyle/>
+          <a:p>
+            <a:pPr algn="ctr"/>
+          </a:p>
+        </p:txBody>
+      </p:sp>
+      <p:sp>
+        <p:nvSpPr>
+          <p:cNvPr id="17456" name="Rectangle 17455"/>
+          <p:cNvSpPr/>
+          <p:nvPr/>
+        </p:nvSpPr>
+        <p:spPr>
+          <a:xfrm>
+            <a:off x="6153912" y="5417820"/>
+            <a:ext cx="502920" cy="768096"/>
+          </a:xfrm>
+          <a:prstGeom prst="rect">
+            <a:avLst/>
+          </a:prstGeom>
+          <a:solidFill>
+            <a:srgbClr val="0070C0"/>
+          </a:solidFill>
+          <a:ln>
+            <a:noFill/>
+          </a:ln>
+          <a:effectLst/>
+        </p:spPr>
+        <p:style>
+          <a:lnRef idx="1">
+            <a:schemeClr val="accent1"/>
+          </a:lnRef>
+          <a:fillRef idx="3">
+            <a:schemeClr val="accent1"/>
+          </a:fillRef>
+          <a:effectRef idx="2">
+            <a:schemeClr val="accent1"/>
+          </a:effectRef>
+          <a:fontRef idx="minor">
+            <a:schemeClr val="lt1"/>
+          </a:fontRef>
+        </p:style>
+        <p:txBody>
+          <a:bodyPr rtlCol="0" anchor="ctr" lIns="54864" rIns="54864" wrap="square"/>
+          <a:lstStyle/>
+          <a:p>
+            <a:pPr algn="ctr"/>
+            <a:r>
+              <a:rPr sz="1500" b="1" i="0">
+                <a:solidFill>
+                  <a:srgbClr val="FFFFFF"/>
+                </a:solidFill>
+                <a:latin typeface="Arial"/>
+              </a:rPr>
+              <a:t>12</a:t>
+            </a:r>
+          </a:p>
+        </p:txBody>
+      </p:sp>
+      <p:sp>
+        <p:nvSpPr>
+          <p:cNvPr id="17457" name="TextBox 17456"/>
+          <p:cNvSpPr txBox="1"/>
+          <p:nvPr/>
+        </p:nvSpPr>
+        <p:spPr>
+          <a:xfrm>
+            <a:off x="6748272" y="5472683"/>
+            <a:ext cx="5029200" cy="274320"/>
+          </a:xfrm>
+          <a:prstGeom prst="rect">
+            <a:avLst/>
+          </a:prstGeom>
+          <a:noFill/>
+        </p:spPr>
+        <p:txBody>
+          <a:bodyPr wrap="square" anchor="t" lIns="36576" rIns="36576" tIns="18288" bIns="18288">
+            <a:spAutoFit/>
+          </a:bodyPr>
+          <a:lstStyle/>
+          <a:p>
+            <a:pPr algn="l">
+              <a:spcAft>
+                <a:spcPts val="400"/>
+              </a:spcAft>
+            </a:pPr>
+            <a:r>
+              <a:rPr sz="1150" b="1" i="0">
+                <a:solidFill>
+                  <a:srgbClr val="1F3864"/>
+                </a:solidFill>
+                <a:latin typeface="Arial"/>
+              </a:rPr>
+              <a:t>Our code and results</a:t>
+            </a:r>
+          </a:p>
+        </p:txBody>
+      </p:sp>
+      <p:sp>
+        <p:nvSpPr>
+          <p:cNvPr id="17458" name="TextBox 17457"/>
+          <p:cNvSpPr txBox="1"/>
+          <p:nvPr/>
+        </p:nvSpPr>
+        <p:spPr>
+          <a:xfrm>
+            <a:off x="6748272" y="5747004"/>
+            <a:ext cx="5029200" cy="438912"/>
+          </a:xfrm>
+          <a:prstGeom prst="rect">
+            <a:avLst/>
+          </a:prstGeom>
+          <a:noFill/>
+        </p:spPr>
+        <p:txBody>
+          <a:bodyPr wrap="square" anchor="t" lIns="36576" rIns="36576" tIns="18288" bIns="18288">
+            <a:spAutoFit/>
+          </a:bodyPr>
+          <a:lstStyle/>
+          <a:p>
+            <a:pPr algn="l">
+              <a:spcAft>
+                <a:spcPts val="400"/>
+              </a:spcAft>
+            </a:pPr>
+            <a:r>
+              <a:rPr sz="950" b="0" i="0">
+                <a:solidFill>
+                  <a:srgbClr val="555E6B"/>
+                </a:solidFill>
+                <a:latin typeface="Arial"/>
+              </a:rPr>
+              <a:t>github.com/AHSharan/SIH2026PS175: RESULTS.md, results/lidar_benchmark.md</a:t>
+            </a:r>
+          </a:p>
+        </p:txBody>
+      </p:sp>
     </p:spTree>
     <p:extLst>
       <p:ext uri="{BB962C8B-B14F-4D97-AF65-F5344CB8AC3E}">
